--- a/slides/datasets-in-10-minutes-global-piqa.pptx
+++ b/slides/datasets-in-10-minutes-global-piqa.pptx
@@ -7487,7 +7487,7 @@
                 <a:ea typeface="Noto Sans CJK JP"/>
                 <a:cs typeface="Noto Sans"/>
               </a:rPr>
-              <a:t>parallel集合は、文化的な固有名への依存を抑えた共通問題を各言語へ訳す。物の性質・位置関係・時間・簡単な個数などを扱う。</a:t>
+              <a:t>parallel集合では、文化的な固有名への依存を抑えた共通問題を各言語へ訳す。物の性質・位置関係・時間・簡単な個数などを扱う。</a:t>
             </a:r>
           </a:p>
           <a:p>
@@ -11551,7 +11551,7 @@
                 <a:ea typeface="Noto Sans CJK JP"/>
                 <a:cs typeface="Noto Sans"/>
               </a:rPr>
-              <a:t>英語・日本語・スペイン語は103問、エクペイ語は101問。</a:t>
+              <a:t>英語・日本語・ペルーのスペイン語は103問、エクペイ語は101問。</a:t>
             </a:r>
           </a:p>
         </p:txBody>
@@ -12360,7 +12360,7 @@
                 <a:ea typeface="Noto Sans CJK JP"/>
                 <a:cs typeface="Noto Sans"/>
               </a:rPr>
-              <a:t>独自問題を整え、各言語100問へそろえる</a:t>
+              <a:t>独自問題を整え、各言語100問にそろえる</a:t>
             </a:r>
           </a:p>
         </p:txBody>
@@ -12734,7 +12734,7 @@
                           <a:ea typeface="Noto Sans CJK JP"/>
                           <a:cs typeface="Noto Sans"/>
                         </a:rPr>
-                        <a:t>母語話者が自然さ・正解・日常性を確認</a:t>
+                        <a:t>母語話者が自然さ・正解・日常性を確認する</a:t>
                       </a:r>
                     </a:p>
                   </a:txBody>
@@ -12836,7 +12836,7 @@
                           <a:ea typeface="Noto Sans CJK JP"/>
                           <a:cs typeface="Noto Sans"/>
                         </a:rPr>
-                        <a:t>形式を統一し、英訳と文化的特徴を注釈</a:t>
+                        <a:t>形式を統一し、英訳と文化的特徴を注記する</a:t>
                       </a:r>
                     </a:p>
                   </a:txBody>
@@ -14137,7 +14137,7 @@
                 <a:ea typeface="Noto Sans CJK JP"/>
                 <a:cs typeface="Noto Sans"/>
               </a:rPr>
-              <a:t>英語母語話者が109問を作り、Gemini 2.5 ProまたはGemini 3 Flashで翻訳した。対象言語の母語話者が訳文と正解を確認する。</a:t>
+              <a:t>英語母語話者が109問を作り、Gemini 2.5 ProまたはGemini 3 Flashで翻訳した。対象言語の母語話者が訳文と正解を確認した。</a:t>
             </a:r>
           </a:p>
           <a:p>
@@ -14167,7 +14167,7 @@
                 <a:ea typeface="Noto Sans CJK JP"/>
                 <a:cs typeface="Noto Sans"/>
               </a:rPr>
-              <a:t>訳語に「溶ける」と「溶解する」の区別がない場合や、元の問題が曖昧な場合に除外し、最終103問とした。</a:t>
+              <a:t>訳語で「溶ける」と「溶解する」を区別できない問題や、元の内容が曖昧な問題を除外し、最終103問とした。</a:t>
             </a:r>
           </a:p>
           <a:p>
@@ -14197,7 +14197,7 @@
                 <a:ea typeface="Noto Sans CJK JP"/>
                 <a:cs typeface="Noto Sans"/>
               </a:rPr>
-              <a:t>131種類の言語に展開した。エクペイ語では方角を扱う2問も除いたため101問となり、合計13,491問を配布する。</a:t>
+              <a:t>131種類の言語に展開した。エクペイ語では方角を扱う2問も除いたため101問となり、合計13,491問を配布している。</a:t>
             </a:r>
           </a:p>
         </p:txBody>
@@ -14985,7 +14985,7 @@
                           <a:ea typeface="Noto Sans CJK JP"/>
                           <a:cs typeface="Noto Sans"/>
                         </a:rPr>
-                        <a:t>両集合での言語の種類</a:t>
+                        <a:t>両集合を合わせた言語の種類</a:t>
                       </a:r>
                     </a:p>
                   </a:txBody>
@@ -15470,7 +15470,7 @@
                 <a:spcPts val="2640"/>
               </a:lnSpc>
               <a:spcAft>
-                <a:spcPts val="800"/>
+                <a:spcPts val="0"/>
               </a:spcAft>
               <a:buSzPct val="60455"/>
               <a:buFont typeface="Noto Sans CJK JP"/>
@@ -15491,7 +15491,7 @@
                 <a:ea typeface="Noto Sans CJK JP"/>
                 <a:cs typeface="Noto Sans"/>
               </a:rPr>
-              <a:t>non-parallelは、各言語の話者が選んだ地域の日常を扱う。言語ごとに固有の生活習慣や道具を問う問題がある。</a:t>
+              <a:t>元になったPIQAは、物体の性質や使い方を扱う英語の二択評価。Global PIQAはその形式を、多言語と文化ごとの常識へ広げた。</a:t>
             </a:r>
           </a:p>
           <a:p>
@@ -15521,7 +15521,7 @@
                 <a:ea typeface="Noto Sans CJK JP"/>
                 <a:cs typeface="Noto Sans"/>
               </a:rPr>
-              <a:t>parallelは、共通の場面を多言語へ訳す。言語の違いと、同じモデルの回答の変化を調べるために使う。</a:t>
+              <a:t>non-parallelは、各言語の話者が選んだ地域の日常を扱う。言語ごとに固有の生活習慣や道具を問う問題がある。</a:t>
             </a:r>
           </a:p>
           <a:p>
@@ -15530,7 +15530,7 @@
                 <a:spcPts val="2640"/>
               </a:lnSpc>
               <a:spcAft>
-                <a:spcPts val="0"/>
+                <a:spcPts val="800"/>
               </a:spcAft>
               <a:buSzPct val="60455"/>
               <a:buFont typeface="Noto Sans CJK JP"/>
@@ -15551,7 +15551,7 @@
                 <a:ea typeface="Noto Sans CJK JP"/>
                 <a:cs typeface="Noto Sans"/>
               </a:rPr>
-              <a:t>元になったPIQAは、物体の性質や使い方を扱う英語の二択評価。Global PIQAはその形式から、多言語と文化ごとの常識へ広げた。</a:t>
+              <a:t>parallelは、共通の場面を多言語へ翻訳したもの。同じモデルの回答が言語間でどう変わるかを調べるために使う。</a:t>
             </a:r>
           </a:p>
         </p:txBody>
@@ -22771,7 +22771,7 @@
                           <a:ea typeface="Noto Sans CJK JP"/>
                           <a:cs typeface="Noto Sans"/>
                         </a:rPr>
-                        <a:t>対応する種類</a:t>
+                        <a:t>言語・文字・地域</a:t>
                       </a:r>
                     </a:p>
                   </a:txBody>
@@ -24390,7 +24390,7 @@
                 <a:ea typeface="Noto Sans CJK JP"/>
                 <a:cs typeface="Noto Sans"/>
               </a:rPr>
-              <a:t>掲載した日本語non-parallelの問題は、llm_usedが1。Global PIQA全体での割合4.1%と、日本語のこの選定例の属性を確認できる。</a:t>
+              <a:t>掲載した日本語non-parallelの問題はllm_usedが1である。Global PIQA全体での割合4.1%とともに、日本語のこの選定例の属性を確認できる。</a:t>
             </a:r>
           </a:p>
           <a:p>
@@ -24420,7 +24420,7 @@
                 <a:ea typeface="Noto Sans CJK JP"/>
                 <a:cs typeface="Noto Sans"/>
               </a:rPr>
-              <a:t>データカードは、LLMの補助を用いた例も含め、すべて少なくとも一人の母語話者が確認したと説明する。</a:t>
+              <a:t>データカードには、LLMの補助を用いた例も含め、すべて少なくとも一人の母語話者が確認したと記載されている。</a:t>
             </a:r>
           </a:p>
           <a:p>
@@ -25761,18 +25761,18 @@
               <a:spcAft>
                 <a:spcPts val="800"/>
               </a:spcAft>
-              <a:buSzPct val="66500"/>
+              <a:buSzPct val="71892"/>
               <a:buFont typeface="Noto Sans CJK JP"/>
               <a:buChar char="●"/>
-              <a:defRPr sz="2000" b="0">
-                <a:solidFill>
-                  <a:srgbClr val="303437"/>
-                </a:solidFill>
-                <a:latin typeface="Noto Sans"/>
-              </a:defRPr>
-            </a:pPr>
-            <a:r>
-              <a:rPr sz="2000" b="0" lang="ja-JP" altLang="en-US">
+              <a:defRPr sz="1850" b="0">
+                <a:solidFill>
+                  <a:srgbClr val="303437"/>
+                </a:solidFill>
+                <a:latin typeface="Noto Sans"/>
+              </a:defRPr>
+            </a:pPr>
+            <a:r>
+              <a:rPr sz="1850" b="0" lang="ja-JP" altLang="en-US">
                 <a:solidFill>
                   <a:srgbClr val="303437"/>
                 </a:solidFill>
@@ -25791,18 +25791,18 @@
               <a:spcAft>
                 <a:spcPts val="800"/>
               </a:spcAft>
-              <a:buSzPct val="66500"/>
+              <a:buSzPct val="71892"/>
               <a:buFont typeface="Noto Sans CJK JP"/>
               <a:buChar char="●"/>
-              <a:defRPr sz="2000" b="0">
-                <a:solidFill>
-                  <a:srgbClr val="303437"/>
-                </a:solidFill>
-                <a:latin typeface="Noto Sans"/>
-              </a:defRPr>
-            </a:pPr>
-            <a:r>
-              <a:rPr sz="2000" b="0" lang="ja-JP" altLang="en-US">
+              <a:defRPr sz="1850" b="0">
+                <a:solidFill>
+                  <a:srgbClr val="303437"/>
+                </a:solidFill>
+                <a:latin typeface="Noto Sans"/>
+              </a:defRPr>
+            </a:pPr>
+            <a:r>
+              <a:rPr sz="1850" b="0" lang="ja-JP" altLang="en-US">
                 <a:solidFill>
                   <a:srgbClr val="303437"/>
                 </a:solidFill>
@@ -25821,26 +25821,26 @@
               <a:spcAft>
                 <a:spcPts val="0"/>
               </a:spcAft>
-              <a:buSzPct val="66500"/>
+              <a:buSzPct val="71892"/>
               <a:buFont typeface="Noto Sans CJK JP"/>
               <a:buChar char="●"/>
-              <a:defRPr sz="2000" b="0">
-                <a:solidFill>
-                  <a:srgbClr val="303437"/>
-                </a:solidFill>
-                <a:latin typeface="Noto Sans"/>
-              </a:defRPr>
-            </a:pPr>
-            <a:r>
-              <a:rPr sz="2000" b="0" lang="ja-JP" altLang="en-US">
-                <a:solidFill>
-                  <a:srgbClr val="303437"/>
-                </a:solidFill>
-                <a:latin typeface="Noto Sans"/>
-                <a:ea typeface="Noto Sans CJK JP"/>
-                <a:cs typeface="Noto Sans"/>
-              </a:rPr>
-              <a:t>データはCC BY-SA 4.0で、掲載例と追加した日本語訳も同ライセンス。提供元はAIシステムの学習や、その種データとしての使用を認めないと明記する。</a:t>
+              <a:defRPr sz="1850" b="0">
+                <a:solidFill>
+                  <a:srgbClr val="303437"/>
+                </a:solidFill>
+                <a:latin typeface="Noto Sans"/>
+              </a:defRPr>
+            </a:pPr>
+            <a:r>
+              <a:rPr sz="1850" b="0" lang="ja-JP" altLang="en-US">
+                <a:solidFill>
+                  <a:srgbClr val="303437"/>
+                </a:solidFill>
+                <a:latin typeface="Noto Sans"/>
+                <a:ea typeface="Noto Sans CJK JP"/>
+                <a:cs typeface="Noto Sans"/>
+              </a:rPr>
+              <a:t>データはCC BY-SA 4.0で、掲載例と追加した日本語訳も同ライセンス。提供元は、Global PIQA自体や、それを種に生成した合成データによるAIシステムの学習を認めないと明記している。</a:t>
             </a:r>
           </a:p>
         </p:txBody>
@@ -26272,7 +26272,7 @@
                 <a:ea typeface="Noto Sans CJK JP"/>
                 <a:cs typeface="Noto Sans"/>
               </a:rPr>
-              <a:t>原著は全著者と各チームの所属・データ作成方法を付録に掲載する。公開の全著者リストの最終著者はDavid Ifeoluwa Adelani。</a:t>
+              <a:t>原著では全著者と各チームの所属・データ作成方法が付録に掲載されている。公開された全著者リストの最終著者はDavid Ifeoluwa Adelani。</a:t>
             </a:r>
           </a:p>
         </p:txBody>

--- a/slides/datasets-in-10-minutes-global-piqa.pptx
+++ b/slides/datasets-in-10-minutes-global-piqa.pptx
@@ -14,7 +14,6 @@
     <p:sldId id="262" r:id="rId4"/>
     <p:sldId id="263" r:id="rId3"/>
     <p:sldId id="308" r:id="rId58"/>
-    <p:sldId id="309" r:id="rId59"/>
     <p:sldId id="265" r:id="rId15"/>
     <p:sldId id="266" r:id="rId16"/>
     <p:sldId id="310" r:id="rId60"/>
@@ -38,25 +37,15 @@
     <p:sldId id="284" r:id="rId34"/>
     <p:sldId id="285" r:id="rId35"/>
     <p:sldId id="312" r:id="rId62"/>
-    <p:sldId id="313" r:id="rId63"/>
     <p:sldId id="314" r:id="rId64"/>
-    <p:sldId id="315" r:id="rId65"/>
     <p:sldId id="316" r:id="rId66"/>
-    <p:sldId id="317" r:id="rId67"/>
     <p:sldId id="318" r:id="rId68"/>
-    <p:sldId id="319" r:id="rId69"/>
     <p:sldId id="320" r:id="rId70"/>
-    <p:sldId id="321" r:id="rId71"/>
     <p:sldId id="322" r:id="rId72"/>
-    <p:sldId id="323" r:id="rId73"/>
     <p:sldId id="324" r:id="rId74"/>
-    <p:sldId id="325" r:id="rId75"/>
     <p:sldId id="326" r:id="rId76"/>
-    <p:sldId id="327" r:id="rId77"/>
     <p:sldId id="328" r:id="rId78"/>
-    <p:sldId id="329" r:id="rId79"/>
     <p:sldId id="330" r:id="rId80"/>
-    <p:sldId id="331" r:id="rId81"/>
     <p:sldId id="296" r:id="rId46"/>
     <p:sldId id="297" r:id="rId47"/>
     <p:sldId id="298" r:id="rId48"/>
@@ -7393,535 +7382,6 @@
 </p:sld>
 </file>
 
-<file path=ppt/slides/slide10.xml><?xml version="1.0" encoding="utf-8"?>
-<p:sld xmlns:a="http://schemas.openxmlformats.org/drawingml/2006/main" xmlns:p="http://schemas.openxmlformats.org/presentationml/2006/main" xmlns:r="http://schemas.openxmlformats.org/officeDocument/2006/relationships">
-  <p:cSld>
-    <p:spTree>
-      <p:nvGrpSpPr>
-        <p:cNvPr id="1" name=""/>
-        <p:cNvGrpSpPr/>
-        <p:nvPr/>
-      </p:nvGrpSpPr>
-      <p:grpSpPr/>
-      <p:sp>
-        <p:nvSpPr>
-          <p:cNvPr id="2" name="Title 1"/>
-          <p:cNvSpPr>
-            <a:spLocks noGrp="1"/>
-          </p:cNvSpPr>
-          <p:nvPr>
-            <p:ph type="title"/>
-          </p:nvPr>
-        </p:nvSpPr>
-        <p:spPr>
-          <a:xfrm>
-            <a:off x="548640" y="786384"/>
-            <a:ext cx="8046720" cy="502920"/>
-          </a:xfrm>
-        </p:spPr>
-        <p:txBody>
-          <a:bodyPr wrap="square" lIns="0" rIns="0" tIns="0" bIns="0">
-            <a:noAutofit/>
-          </a:bodyPr>
-          <a:lstStyle/>
-          <a:p>
-            <a:pPr algn="l">
-              <a:lnSpc>
-                <a:spcPct val="110000"/>
-              </a:lnSpc>
-              <a:buNone/>
-              <a:defRPr sz="2800" b="0">
-                <a:solidFill>
-                  <a:srgbClr val="303437"/>
-                </a:solidFill>
-                <a:latin typeface="Noto Sans"/>
-              </a:defRPr>
-            </a:pPr>
-            <a:r>
-              <a:rPr sz="2800" b="1" lang="ja-JP" altLang="en-US">
-                <a:solidFill>
-                  <a:srgbClr val="303437"/>
-                </a:solidFill>
-                <a:latin typeface="Noto Sans"/>
-                <a:ea typeface="Noto Sans CJK JP"/>
-                <a:cs typeface="Noto Sans"/>
-              </a:rPr>
-              <a:t>実例2：日本語訳と解説</a:t>
-            </a:r>
-          </a:p>
-        </p:txBody>
-      </p:sp>
-      <p:sp>
-        <p:nvSpPr>
-          <p:cNvPr id="3" name="Title 2"/>
-          <p:cNvSpPr>
-            <a:spLocks noGrp="1"/>
-          </p:cNvSpPr>
-          <p:nvPr>
-            <p:ph type="title" idx="2"/>
-          </p:nvPr>
-        </p:nvSpPr>
-        <p:spPr>
-          <a:xfrm>
-            <a:off x="75895" y="0"/>
-            <a:ext cx="8115300" cy="480060"/>
-          </a:xfrm>
-        </p:spPr>
-        <p:txBody>
-          <a:bodyPr wrap="square" lIns="0" rIns="0" tIns="0" bIns="0" anchor="ctr">
-            <a:noAutofit/>
-          </a:bodyPr>
-          <a:lstStyle/>
-          <a:p>
-            <a:pPr algn="l">
-              <a:lnSpc>
-                <a:spcPct val="110000"/>
-              </a:lnSpc>
-              <a:buNone/>
-              <a:defRPr sz="1400" b="0">
-                <a:solidFill>
-                  <a:srgbClr val="303437"/>
-                </a:solidFill>
-                <a:latin typeface="Noto Sans"/>
-              </a:defRPr>
-            </a:pPr>
-            <a:r>
-              <a:rPr sz="1400" b="1" lang="ja-JP" altLang="en-US">
-                <a:solidFill>
-                  <a:srgbClr val="FFFFFF"/>
-                </a:solidFill>
-                <a:latin typeface="Noto Sans"/>
-                <a:ea typeface="Noto Sans CJK JP"/>
-                <a:cs typeface="Noto Sans"/>
-              </a:rPr>
-              <a:t>1. 文化と言語に根ざした常識問題</a:t>
-            </a:r>
-          </a:p>
-        </p:txBody>
-      </p:sp>
-      <p:sp>
-        <p:nvSpPr>
-          <p:cNvPr id="4" name="実例ラベル"/>
-          <p:cNvSpPr txBox="1"/>
-          <p:nvPr/>
-        </p:nvSpPr>
-        <p:spPr>
-          <a:xfrm>
-            <a:off x="594360" y="1480880"/>
-            <a:ext cx="7955279" cy="274320"/>
-          </a:xfrm>
-          <a:prstGeom prst="rect">
-            <a:avLst/>
-          </a:prstGeom>
-          <a:noFill/>
-        </p:spPr>
-        <p:txBody>
-          <a:bodyPr wrap="square" lIns="0" rIns="0" tIns="0" bIns="0">
-            <a:noAutofit/>
-          </a:bodyPr>
-          <a:lstStyle/>
-          <a:p>
-            <a:pPr algn="l">
-              <a:lnSpc>
-                <a:spcPct val="117000"/>
-              </a:lnSpc>
-              <a:spcBef>
-                <a:spcPts val="0"/>
-              </a:spcBef>
-              <a:spcAft>
-                <a:spcPts val="0"/>
-              </a:spcAft>
-              <a:buNone/>
-              <a:defRPr sz="1200" b="0">
-                <a:solidFill>
-                  <a:srgbClr val="303437"/>
-                </a:solidFill>
-                <a:latin typeface="Noto Sans"/>
-              </a:defRPr>
-            </a:pPr>
-            <a:r>
-              <a:rPr sz="1200" b="0" lang="ja-JP" altLang="en-US">
-                <a:solidFill>
-                  <a:srgbClr val="626669"/>
-                </a:solidFill>
-                <a:latin typeface="Noto Sans"/>
-                <a:ea typeface="Noto Sans CJK JP"/>
-                <a:cs typeface="Noto Sans"/>
-              </a:rPr>
-              <a:t>日本語訳</a:t>
-            </a:r>
-          </a:p>
-        </p:txBody>
-      </p:sp>
-      <p:sp>
-        <p:nvSpPr>
-          <p:cNvPr id="5" name="実例本文0"/>
-          <p:cNvSpPr txBox="1"/>
-          <p:nvPr/>
-        </p:nvSpPr>
-        <p:spPr>
-          <a:xfrm>
-            <a:off x="594360" y="1813969"/>
-            <a:ext cx="7955279" cy="481330"/>
-          </a:xfrm>
-          <a:prstGeom prst="rect">
-            <a:avLst/>
-          </a:prstGeom>
-          <a:noFill/>
-        </p:spPr>
-        <p:txBody>
-          <a:bodyPr wrap="square" lIns="0" rIns="0" tIns="0" bIns="0">
-            <a:noAutofit/>
-          </a:bodyPr>
-          <a:lstStyle/>
-          <a:p>
-            <a:pPr algn="l">
-              <a:lnSpc>
-                <a:spcPct val="112000"/>
-              </a:lnSpc>
-              <a:spcBef>
-                <a:spcPts val="0"/>
-              </a:spcBef>
-              <a:spcAft>
-                <a:spcPts val="0"/>
-              </a:spcAft>
-              <a:buNone/>
-              <a:defRPr sz="2200" b="0">
-                <a:solidFill>
-                  <a:srgbClr val="303437"/>
-                </a:solidFill>
-                <a:latin typeface="Noto Sans"/>
-              </a:defRPr>
-            </a:pPr>
-            <a:r>
-              <a:rPr sz="2200" b="0" lang="ja-JP" altLang="en-US">
-                <a:solidFill>
-                  <a:srgbClr val="303437"/>
-                </a:solidFill>
-                <a:latin typeface="Noto Sans"/>
-                <a:ea typeface="Noto Sans CJK JP"/>
-                <a:cs typeface="Noto Sans"/>
-              </a:rPr>
-              <a:t>BBQで調味料を分けて出すには。</a:t>
-            </a:r>
-          </a:p>
-        </p:txBody>
-      </p:sp>
-      <p:sp>
-        <p:nvSpPr>
-          <p:cNvPr id="6" name="実例本文1"/>
-          <p:cNvSpPr txBox="1"/>
-          <p:nvPr/>
-        </p:nvSpPr>
-        <p:spPr>
-          <a:xfrm>
-            <a:off x="594360" y="2397631"/>
-            <a:ext cx="7955279" cy="462915"/>
-          </a:xfrm>
-          <a:prstGeom prst="rect">
-            <a:avLst/>
-          </a:prstGeom>
-          <a:noFill/>
-        </p:spPr>
-        <p:txBody>
-          <a:bodyPr wrap="square" lIns="0" rIns="0" tIns="0" bIns="0">
-            <a:noAutofit/>
-          </a:bodyPr>
-          <a:lstStyle/>
-          <a:p>
-            <a:pPr algn="l">
-              <a:lnSpc>
-                <a:spcPct val="112000"/>
-              </a:lnSpc>
-              <a:spcBef>
-                <a:spcPts val="0"/>
-              </a:spcBef>
-              <a:spcAft>
-                <a:spcPts val="0"/>
-              </a:spcAft>
-              <a:buNone/>
-              <a:defRPr sz="2100" b="0">
-                <a:solidFill>
-                  <a:srgbClr val="303437"/>
-                </a:solidFill>
-                <a:latin typeface="Noto Sans"/>
-              </a:defRPr>
-            </a:pPr>
-            <a:r>
-              <a:rPr sz="2100" b="0" lang="ja-JP" altLang="en-US">
-                <a:solidFill>
-                  <a:srgbClr val="303437"/>
-                </a:solidFill>
-                <a:latin typeface="Noto Sans"/>
-                <a:ea typeface="Noto Sans CJK JP"/>
-                <a:cs typeface="Noto Sans"/>
-              </a:rPr>
-              <a:t>A) 各種の調味料をワッフルメーカーに入れる。</a:t>
-            </a:r>
-          </a:p>
-        </p:txBody>
-      </p:sp>
-      <p:sp>
-        <p:nvSpPr>
-          <p:cNvPr id="7" name="実例本文2"/>
-          <p:cNvSpPr txBox="1"/>
-          <p:nvPr/>
-        </p:nvSpPr>
-        <p:spPr>
-          <a:xfrm>
-            <a:off x="594360" y="2963149"/>
-            <a:ext cx="7955279" cy="462915"/>
-          </a:xfrm>
-          <a:prstGeom prst="rect">
-            <a:avLst/>
-          </a:prstGeom>
-          <a:noFill/>
-        </p:spPr>
-        <p:txBody>
-          <a:bodyPr wrap="square" lIns="0" rIns="0" tIns="0" bIns="0">
-            <a:noAutofit/>
-          </a:bodyPr>
-          <a:lstStyle/>
-          <a:p>
-            <a:pPr algn="l">
-              <a:lnSpc>
-                <a:spcPct val="112000"/>
-              </a:lnSpc>
-              <a:spcBef>
-                <a:spcPts val="0"/>
-              </a:spcBef>
-              <a:spcAft>
-                <a:spcPts val="0"/>
-              </a:spcAft>
-              <a:buNone/>
-              <a:defRPr sz="2100" b="0">
-                <a:solidFill>
-                  <a:srgbClr val="303437"/>
-                </a:solidFill>
-                <a:latin typeface="Noto Sans"/>
-              </a:defRPr>
-            </a:pPr>
-            <a:r>
-              <a:rPr sz="2100" b="0" lang="ja-JP" altLang="en-US">
-                <a:solidFill>
-                  <a:srgbClr val="303437"/>
-                </a:solidFill>
-                <a:latin typeface="Noto Sans"/>
-                <a:ea typeface="Noto Sans CJK JP"/>
-                <a:cs typeface="Noto Sans"/>
-              </a:rPr>
-              <a:t>B) 各種の調味料をマフィン型に入れる。</a:t>
-            </a:r>
-          </a:p>
-        </p:txBody>
-      </p:sp>
-      <p:sp>
-        <p:nvSpPr>
-          <p:cNvPr id="8" name="実例本文3"/>
-          <p:cNvSpPr txBox="1"/>
-          <p:nvPr/>
-        </p:nvSpPr>
-        <p:spPr>
-          <a:xfrm>
-            <a:off x="594360" y="3528233"/>
-            <a:ext cx="7955279" cy="481330"/>
-          </a:xfrm>
-          <a:prstGeom prst="rect">
-            <a:avLst/>
-          </a:prstGeom>
-          <a:noFill/>
-        </p:spPr>
-        <p:txBody>
-          <a:bodyPr wrap="square" lIns="0" rIns="0" tIns="0" bIns="0">
-            <a:noAutofit/>
-          </a:bodyPr>
-          <a:lstStyle/>
-          <a:p>
-            <a:pPr algn="l">
-              <a:lnSpc>
-                <a:spcPct val="112000"/>
-              </a:lnSpc>
-              <a:spcBef>
-                <a:spcPts val="0"/>
-              </a:spcBef>
-              <a:spcAft>
-                <a:spcPts val="0"/>
-              </a:spcAft>
-              <a:buNone/>
-              <a:defRPr sz="2200" b="0">
-                <a:solidFill>
-                  <a:srgbClr val="303437"/>
-                </a:solidFill>
-                <a:latin typeface="Noto Sans"/>
-              </a:defRPr>
-            </a:pPr>
-            <a:r>
-              <a:rPr sz="2200" b="1" lang="ja-JP" altLang="en-US">
-                <a:solidFill>
-                  <a:srgbClr val="B13731"/>
-                </a:solidFill>
-                <a:latin typeface="Noto Sans"/>
-                <a:ea typeface="Noto Sans CJK JP"/>
-                <a:cs typeface="Noto Sans"/>
-              </a:rPr>
-              <a:t>配布正解：B</a:t>
-            </a:r>
-          </a:p>
-        </p:txBody>
-      </p:sp>
-      <p:sp>
-        <p:nvSpPr>
-          <p:cNvPr id="9" name="実例本文4"/>
-          <p:cNvSpPr txBox="1"/>
-          <p:nvPr/>
-        </p:nvSpPr>
-        <p:spPr>
-          <a:xfrm>
-            <a:off x="594360" y="4111679"/>
-            <a:ext cx="7955279" cy="426084"/>
-          </a:xfrm>
-          <a:prstGeom prst="rect">
-            <a:avLst/>
-          </a:prstGeom>
-          <a:noFill/>
-        </p:spPr>
-        <p:txBody>
-          <a:bodyPr wrap="square" lIns="0" rIns="0" tIns="0" bIns="0">
-            <a:noAutofit/>
-          </a:bodyPr>
-          <a:lstStyle/>
-          <a:p>
-            <a:pPr algn="l">
-              <a:lnSpc>
-                <a:spcPct val="112000"/>
-              </a:lnSpc>
-              <a:spcBef>
-                <a:spcPts val="0"/>
-              </a:spcBef>
-              <a:spcAft>
-                <a:spcPts val="0"/>
-              </a:spcAft>
-              <a:buNone/>
-              <a:defRPr sz="1900" b="0">
-                <a:solidFill>
-                  <a:srgbClr val="303437"/>
-                </a:solidFill>
-                <a:latin typeface="Noto Sans"/>
-              </a:defRPr>
-            </a:pPr>
-            <a:r>
-              <a:rPr sz="1900" b="0" lang="ja-JP" altLang="en-US">
-                <a:solidFill>
-                  <a:srgbClr val="303437"/>
-                </a:solidFill>
-                <a:latin typeface="Noto Sans"/>
-                <a:ea typeface="Noto Sans CJK JP"/>
-                <a:cs typeface="Noto Sans"/>
-              </a:rPr>
-              <a:t>一つずつくぼみが分かれたマフィン型を、調味料の容器として使う。</a:t>
-            </a:r>
-          </a:p>
-        </p:txBody>
-      </p:sp>
-      <p:sp>
-        <p:nvSpPr>
-          <p:cNvPr id="10" name="TextBox 9"/>
-          <p:cNvSpPr txBox="1"/>
-          <p:nvPr/>
-        </p:nvSpPr>
-        <p:spPr>
-          <a:xfrm>
-            <a:off x="502920" y="4690872"/>
-            <a:ext cx="8183879" cy="393192"/>
-          </a:xfrm>
-          <a:prstGeom prst="rect">
-            <a:avLst/>
-          </a:prstGeom>
-          <a:noFill/>
-        </p:spPr>
-        <p:txBody>
-          <a:bodyPr wrap="square" lIns="0" rIns="0" tIns="0" bIns="0">
-            <a:noAutofit/>
-          </a:bodyPr>
-          <a:lstStyle/>
-          <a:p>
-            <a:pPr algn="l">
-              <a:lnSpc>
-                <a:spcPct val="112000"/>
-              </a:lnSpc>
-              <a:spcBef>
-                <a:spcPts val="0"/>
-              </a:spcBef>
-              <a:spcAft>
-                <a:spcPts val="0"/>
-              </a:spcAft>
-              <a:buNone/>
-              <a:defRPr sz="810" b="0">
-                <a:solidFill>
-                  <a:srgbClr val="303437"/>
-                </a:solidFill>
-                <a:latin typeface="Noto Sans"/>
-              </a:defRPr>
-            </a:pPr>
-            <a:r>
-              <a:rPr sz="810" b="0" lang="ja-JP" altLang="en-US">
-                <a:solidFill>
-                  <a:srgbClr val="626669"/>
-                </a:solidFill>
-                <a:latin typeface="Noto Sans"/>
-                <a:ea typeface="Noto Sans CJK JP"/>
-                <a:cs typeface="Noto Sans"/>
-              </a:rPr>
-              <a:t/>
-            </a:r>
-            <a:r>
-              <a:rPr sz="810" b="0" lang="ja-JP" altLang="en-US">
-                <a:solidFill>
-                  <a:srgbClr val="626669"/>
-                </a:solidFill>
-                <a:latin typeface="Noto Sans"/>
-                <a:ea typeface="Noto Sans CJK JP"/>
-                <a:cs typeface="Noto Sans"/>
-              </a:rPr>
-              <a:t>Global PIQA v1 / nonparallel / group0123_ex000088_eng_latn_0_v1。CC BY-SA 4.0。</a:t>
-            </a:r>
-          </a:p>
-          <a:p>
-            <a:pPr>
-              <a:lnSpc>
-                <a:spcPct val="112000"/>
-              </a:lnSpc>
-              <a:buNone/>
-              <a:defRPr sz="810" b="0">
-                <a:solidFill>
-                  <a:srgbClr val="303437"/>
-                </a:solidFill>
-                <a:latin typeface="Noto Sans"/>
-              </a:defRPr>
-            </a:pPr>
-            <a:r>
-              <a:rPr sz="810" b="0" lang="ja-JP" altLang="en-US">
-                <a:solidFill>
-                  <a:srgbClr val="626669"/>
-                </a:solidFill>
-                <a:latin typeface="Noto Sans"/>
-                <a:ea typeface="Noto Sans CJK JP"/>
-                <a:cs typeface="Noto Sans"/>
-                <a:hlinkClick r:id="rId2"/>
-              </a:rPr>
-              <a:t>https://huggingface.co/datasets/mrlbenchmarks/global-piqa-nonparallel</a:t>
-            </a:r>
-          </a:p>
-        </p:txBody>
-      </p:sp>
-    </p:spTree>
-  </p:cSld>
-  <p:clrMapOvr>
-    <a:masterClrMapping/>
-  </p:clrMapOvr>
-</p:sld>
-</file>
-
 <file path=ppt/slides/slide11.xml><?xml version="1.0" encoding="utf-8"?>
 <p:sld xmlns:a="http://schemas.openxmlformats.org/drawingml/2006/main" xmlns:p="http://schemas.openxmlformats.org/presentationml/2006/main" xmlns:r="http://schemas.openxmlformats.org/officeDocument/2006/relationships">
   <p:cSld>
@@ -11768,7 +11228,7 @@
                 <a:ea typeface="Noto Sans CJK JP"/>
                 <a:cs typeface="Noto Sans"/>
               </a:rPr>
-              <a:t>原著のプロプライエタリモデル評価は、temperature 0.90、生成上限2,048トークン。GeminiとClaudeは、思考用に1,024トークンを割り当てる。</a:t>
+              <a:t>プロプライエタリモデルの評価条件は、temperature 0.90、生成上限2,048トークン。GeminiとClaudeは、思考用に1,024トークンを割り当てる。</a:t>
             </a:r>
           </a:p>
           <a:p>
@@ -18490,8 +17950,8 @@
         </p:nvSpPr>
         <p:spPr>
           <a:xfrm>
-            <a:off x="594360" y="2073151"/>
-            <a:ext cx="7955279" cy="274320"/>
+            <a:off x="548640" y="1422400"/>
+            <a:ext cx="3870960" cy="216408"/>
           </a:xfrm>
           <a:prstGeom prst="rect">
             <a:avLst/>
@@ -18506,7 +17966,7 @@
           <a:p>
             <a:pPr algn="l">
               <a:lnSpc>
-                <a:spcPct val="117000"/>
+                <a:spcPts val="1404"/>
               </a:lnSpc>
               <a:spcBef>
                 <a:spcPts val="0"/>
@@ -18544,8 +18004,8 @@
         </p:nvSpPr>
         <p:spPr>
           <a:xfrm>
-            <a:off x="594360" y="2380818"/>
-            <a:ext cx="7955279" cy="481330"/>
+            <a:off x="548640" y="1727708"/>
+            <a:ext cx="3870960" cy="320420"/>
           </a:xfrm>
           <a:prstGeom prst="rect">
             <a:avLst/>
@@ -18560,24 +18020,24 @@
           <a:p>
             <a:pPr algn="l">
               <a:lnSpc>
-                <a:spcPct val="112000"/>
-              </a:lnSpc>
-              <a:spcBef>
-                <a:spcPts val="0"/>
-              </a:spcBef>
-              <a:spcAft>
-                <a:spcPts val="0"/>
-              </a:spcAft>
-              <a:buNone/>
-              <a:defRPr sz="2200" b="0">
-                <a:solidFill>
-                  <a:srgbClr val="303437"/>
-                </a:solidFill>
-                <a:latin typeface="Noto Sans"/>
-              </a:defRPr>
-            </a:pPr>
-            <a:r>
-              <a:rPr sz="2200" b="0" lang="ja-JP" altLang="en-US">
+                <a:spcPts val="2222"/>
+              </a:lnSpc>
+              <a:spcBef>
+                <a:spcPts val="0"/>
+              </a:spcBef>
+              <a:spcAft>
+                <a:spcPts val="0"/>
+              </a:spcAft>
+              <a:buNone/>
+              <a:defRPr sz="1900" b="0">
+                <a:solidFill>
+                  <a:srgbClr val="303437"/>
+                </a:solidFill>
+                <a:latin typeface="Noto Sans"/>
+              </a:defRPr>
+            </a:pPr>
+            <a:r>
+              <a:rPr sz="1900" b="0" lang="ja-JP" altLang="en-US">
                 <a:solidFill>
                   <a:srgbClr val="303437"/>
                 </a:solidFill>
@@ -18598,8 +18058,8 @@
         </p:nvSpPr>
         <p:spPr>
           <a:xfrm>
-            <a:off x="594360" y="2940258"/>
-            <a:ext cx="7955279" cy="462915"/>
+            <a:off x="548640" y="2393950"/>
+            <a:ext cx="3870960" cy="320420"/>
           </a:xfrm>
           <a:prstGeom prst="rect">
             <a:avLst/>
@@ -18614,24 +18074,24 @@
           <a:p>
             <a:pPr algn="l">
               <a:lnSpc>
-                <a:spcPct val="112000"/>
-              </a:lnSpc>
-              <a:spcBef>
-                <a:spcPts val="0"/>
-              </a:spcBef>
-              <a:spcAft>
-                <a:spcPts val="0"/>
-              </a:spcAft>
-              <a:buNone/>
-              <a:defRPr sz="2100" b="0">
-                <a:solidFill>
-                  <a:srgbClr val="303437"/>
-                </a:solidFill>
-                <a:latin typeface="Noto Sans"/>
-              </a:defRPr>
-            </a:pPr>
-            <a:r>
-              <a:rPr sz="2100" b="0" lang="ja-JP" altLang="en-US">
+                <a:spcPts val="2222"/>
+              </a:lnSpc>
+              <a:spcBef>
+                <a:spcPts val="0"/>
+              </a:spcBef>
+              <a:spcAft>
+                <a:spcPts val="0"/>
+              </a:spcAft>
+              <a:buNone/>
+              <a:defRPr sz="1900" b="0">
+                <a:solidFill>
+                  <a:srgbClr val="303437"/>
+                </a:solidFill>
+                <a:latin typeface="Noto Sans"/>
+              </a:defRPr>
+            </a:pPr>
+            <a:r>
+              <a:rPr sz="1900" b="0" lang="ja-JP" altLang="en-US">
                 <a:solidFill>
                   <a:srgbClr val="303437"/>
                 </a:solidFill>
@@ -18652,8 +18112,8 @@
         </p:nvSpPr>
         <p:spPr>
           <a:xfrm>
-            <a:off x="594360" y="3481539"/>
-            <a:ext cx="7955279" cy="462915"/>
+            <a:off x="548640" y="3060191"/>
+            <a:ext cx="3870960" cy="320420"/>
           </a:xfrm>
           <a:prstGeom prst="rect">
             <a:avLst/>
@@ -18668,24 +18128,24 @@
           <a:p>
             <a:pPr algn="l">
               <a:lnSpc>
-                <a:spcPct val="112000"/>
-              </a:lnSpc>
-              <a:spcBef>
-                <a:spcPts val="0"/>
-              </a:spcBef>
-              <a:spcAft>
-                <a:spcPts val="0"/>
-              </a:spcAft>
-              <a:buNone/>
-              <a:defRPr sz="2100" b="0">
-                <a:solidFill>
-                  <a:srgbClr val="303437"/>
-                </a:solidFill>
-                <a:latin typeface="Noto Sans"/>
-              </a:defRPr>
-            </a:pPr>
-            <a:r>
-              <a:rPr sz="2100" b="0" lang="ja-JP" altLang="en-US">
+                <a:spcPts val="2222"/>
+              </a:lnSpc>
+              <a:spcBef>
+                <a:spcPts val="0"/>
+              </a:spcBef>
+              <a:spcAft>
+                <a:spcPts val="0"/>
+              </a:spcAft>
+              <a:buNone/>
+              <a:defRPr sz="1900" b="0">
+                <a:solidFill>
+                  <a:srgbClr val="303437"/>
+                </a:solidFill>
+                <a:latin typeface="Noto Sans"/>
+              </a:defRPr>
+            </a:pPr>
+            <a:r>
+              <a:rPr sz="1900" b="0" lang="ja-JP" altLang="en-US">
                 <a:solidFill>
                   <a:srgbClr val="303437"/>
                 </a:solidFill>
@@ -18789,130 +18249,16 @@
           </a:p>
         </p:txBody>
       </p:sp>
-    </p:spTree>
-  </p:cSld>
-  <p:clrMapOvr>
-    <a:masterClrMapping/>
-  </p:clrMapOvr>
-</p:sld>
-</file>
-
-<file path=ppt/slides/slide34.xml><?xml version="1.0" encoding="utf-8"?>
-<p:sld xmlns:a="http://schemas.openxmlformats.org/drawingml/2006/main" xmlns:p="http://schemas.openxmlformats.org/presentationml/2006/main" xmlns:r="http://schemas.openxmlformats.org/officeDocument/2006/relationships">
-  <p:cSld>
-    <p:spTree>
-      <p:nvGrpSpPr>
-        <p:cNvPr id="1" name=""/>
-        <p:cNvGrpSpPr/>
-        <p:nvPr/>
-      </p:nvGrpSpPr>
-      <p:grpSpPr/>
-      <p:sp>
-        <p:nvSpPr>
-          <p:cNvPr id="2" name="Title 1"/>
-          <p:cNvSpPr>
-            <a:spLocks noGrp="1"/>
-          </p:cNvSpPr>
-          <p:nvPr>
-            <p:ph type="title"/>
-          </p:nvPr>
-        </p:nvSpPr>
-        <p:spPr>
-          <a:xfrm>
-            <a:off x="548640" y="786384"/>
-            <a:ext cx="8046720" cy="502920"/>
-          </a:xfrm>
-        </p:spPr>
-        <p:txBody>
-          <a:bodyPr wrap="square" lIns="0" rIns="0" tIns="0" bIns="0">
-            <a:noAutofit/>
-          </a:bodyPr>
-          <a:lstStyle/>
-          <a:p>
-            <a:pPr algn="l">
-              <a:lnSpc>
-                <a:spcPct val="110000"/>
-              </a:lnSpc>
-              <a:buNone/>
-              <a:defRPr sz="2800" b="0">
-                <a:solidFill>
-                  <a:srgbClr val="303437"/>
-                </a:solidFill>
-                <a:latin typeface="Noto Sans"/>
-              </a:defRPr>
-            </a:pPr>
-            <a:r>
-              <a:rPr sz="2800" b="1" lang="ja-JP" altLang="en-US">
-                <a:solidFill>
-                  <a:srgbClr val="303437"/>
-                </a:solidFill>
-                <a:latin typeface="Noto Sans"/>
-                <a:ea typeface="Noto Sans CJK JP"/>
-                <a:cs typeface="Noto Sans"/>
-              </a:rPr>
-              <a:t>追加例1：日本語訳と解説</a:t>
-            </a:r>
-          </a:p>
-        </p:txBody>
-      </p:sp>
-      <p:sp>
-        <p:nvSpPr>
-          <p:cNvPr id="3" name="Title 2"/>
-          <p:cNvSpPr>
-            <a:spLocks noGrp="1"/>
-          </p:cNvSpPr>
-          <p:nvPr>
-            <p:ph type="title" idx="2"/>
-          </p:nvPr>
-        </p:nvSpPr>
-        <p:spPr>
-          <a:xfrm>
-            <a:off x="75895" y="0"/>
-            <a:ext cx="8115300" cy="480060"/>
-          </a:xfrm>
-        </p:spPr>
-        <p:txBody>
-          <a:bodyPr wrap="square" lIns="0" rIns="0" tIns="0" bIns="0" anchor="ctr">
-            <a:noAutofit/>
-          </a:bodyPr>
-          <a:lstStyle/>
-          <a:p>
-            <a:pPr algn="l">
-              <a:lnSpc>
-                <a:spcPct val="110000"/>
-              </a:lnSpc>
-              <a:buNone/>
-              <a:defRPr sz="1400" b="0">
-                <a:solidFill>
-                  <a:srgbClr val="303437"/>
-                </a:solidFill>
-                <a:latin typeface="Noto Sans"/>
-              </a:defRPr>
-            </a:pPr>
-            <a:r>
-              <a:rPr sz="1400" b="1" lang="ja-JP" altLang="en-US">
-                <a:solidFill>
-                  <a:srgbClr val="FFFFFF"/>
-                </a:solidFill>
-                <a:latin typeface="Noto Sans"/>
-                <a:ea typeface="Noto Sans CJK JP"/>
-                <a:cs typeface="Noto Sans"/>
-              </a:rPr>
-              <a:t>Appendix: 1. 生活場面の追加例</a:t>
-            </a:r>
-          </a:p>
-        </p:txBody>
-      </p:sp>
-      <p:sp>
-        <p:nvSpPr>
-          <p:cNvPr id="4" name="実例ラベル"/>
+      <p:sp>
+        <p:nvSpPr>
+          <p:cNvPr id="9" name="実例ラベル"/>
           <p:cNvSpPr txBox="1"/>
           <p:nvPr/>
         </p:nvSpPr>
         <p:spPr>
           <a:xfrm>
-            <a:off x="594360" y="1481628"/>
-            <a:ext cx="7955279" cy="274320"/>
+            <a:off x="4724400" y="1422400"/>
+            <a:ext cx="3870960" cy="216408"/>
           </a:xfrm>
           <a:prstGeom prst="rect">
             <a:avLst/>
@@ -18927,7 +18273,7 @@
           <a:p>
             <a:pPr algn="l">
               <a:lnSpc>
-                <a:spcPct val="117000"/>
+                <a:spcPts val="1404"/>
               </a:lnSpc>
               <a:spcBef>
                 <a:spcPts val="0"/>
@@ -18959,14 +18305,14 @@
       </p:sp>
       <p:sp>
         <p:nvSpPr>
-          <p:cNvPr id="5" name="実例本文0"/>
+          <p:cNvPr id="10" name="実例本文0"/>
           <p:cNvSpPr txBox="1"/>
           <p:nvPr/>
         </p:nvSpPr>
         <p:spPr>
           <a:xfrm>
-            <a:off x="594360" y="1814628"/>
-            <a:ext cx="7955279" cy="481330"/>
+            <a:off x="4724400" y="1727708"/>
+            <a:ext cx="3870960" cy="602741"/>
           </a:xfrm>
           <a:prstGeom prst="rect">
             <a:avLst/>
@@ -18981,24 +18327,24 @@
           <a:p>
             <a:pPr algn="l">
               <a:lnSpc>
-                <a:spcPct val="112000"/>
-              </a:lnSpc>
-              <a:spcBef>
-                <a:spcPts val="0"/>
-              </a:spcBef>
-              <a:spcAft>
-                <a:spcPts val="0"/>
-              </a:spcAft>
-              <a:buNone/>
-              <a:defRPr sz="2200" b="0">
-                <a:solidFill>
-                  <a:srgbClr val="303437"/>
-                </a:solidFill>
-                <a:latin typeface="Noto Sans"/>
-              </a:defRPr>
-            </a:pPr>
-            <a:r>
-              <a:rPr sz="2200" b="0" lang="ja-JP" altLang="en-US">
+                <a:spcPts val="2222"/>
+              </a:lnSpc>
+              <a:spcBef>
+                <a:spcPts val="0"/>
+              </a:spcBef>
+              <a:spcAft>
+                <a:spcPts val="0"/>
+              </a:spcAft>
+              <a:buNone/>
+              <a:defRPr sz="1900" b="0">
+                <a:solidFill>
+                  <a:srgbClr val="303437"/>
+                </a:solidFill>
+                <a:latin typeface="Noto Sans"/>
+              </a:defRPr>
+            </a:pPr>
+            <a:r>
+              <a:rPr sz="1900" b="0" lang="ja-JP" altLang="en-US">
                 <a:solidFill>
                   <a:srgbClr val="303437"/>
                 </a:solidFill>
@@ -19013,14 +18359,14 @@
       </p:sp>
       <p:sp>
         <p:nvSpPr>
-          <p:cNvPr id="6" name="実例本文1"/>
+          <p:cNvPr id="11" name="実例本文1"/>
           <p:cNvSpPr txBox="1"/>
           <p:nvPr/>
         </p:nvSpPr>
         <p:spPr>
           <a:xfrm>
-            <a:off x="594360" y="2396984"/>
-            <a:ext cx="7955279" cy="462915"/>
+            <a:off x="4724400" y="2393950"/>
+            <a:ext cx="3870960" cy="602741"/>
           </a:xfrm>
           <a:prstGeom prst="rect">
             <a:avLst/>
@@ -19035,24 +18381,24 @@
           <a:p>
             <a:pPr algn="l">
               <a:lnSpc>
-                <a:spcPct val="112000"/>
-              </a:lnSpc>
-              <a:spcBef>
-                <a:spcPts val="0"/>
-              </a:spcBef>
-              <a:spcAft>
-                <a:spcPts val="0"/>
-              </a:spcAft>
-              <a:buNone/>
-              <a:defRPr sz="2100" b="0">
-                <a:solidFill>
-                  <a:srgbClr val="303437"/>
-                </a:solidFill>
-                <a:latin typeface="Noto Sans"/>
-              </a:defRPr>
-            </a:pPr>
-            <a:r>
-              <a:rPr sz="2100" b="0" lang="ja-JP" altLang="en-US">
+                <a:spcPts val="2222"/>
+              </a:lnSpc>
+              <a:spcBef>
+                <a:spcPts val="0"/>
+              </a:spcBef>
+              <a:spcAft>
+                <a:spcPts val="0"/>
+              </a:spcAft>
+              <a:buNone/>
+              <a:defRPr sz="1900" b="0">
+                <a:solidFill>
+                  <a:srgbClr val="303437"/>
+                </a:solidFill>
+                <a:latin typeface="Noto Sans"/>
+              </a:defRPr>
+            </a:pPr>
+            <a:r>
+              <a:rPr sz="1900" b="0" lang="ja-JP" altLang="en-US">
                 <a:solidFill>
                   <a:srgbClr val="303437"/>
                 </a:solidFill>
@@ -19067,14 +18413,14 @@
       </p:sp>
       <p:sp>
         <p:nvSpPr>
-          <p:cNvPr id="7" name="実例本文2"/>
+          <p:cNvPr id="12" name="実例本文2"/>
           <p:cNvSpPr txBox="1"/>
           <p:nvPr/>
         </p:nvSpPr>
         <p:spPr>
           <a:xfrm>
-            <a:off x="594360" y="2962501"/>
-            <a:ext cx="7955279" cy="462915"/>
+            <a:off x="4724400" y="3060191"/>
+            <a:ext cx="3870960" cy="320420"/>
           </a:xfrm>
           <a:prstGeom prst="rect">
             <a:avLst/>
@@ -19089,24 +18435,24 @@
           <a:p>
             <a:pPr algn="l">
               <a:lnSpc>
-                <a:spcPct val="112000"/>
-              </a:lnSpc>
-              <a:spcBef>
-                <a:spcPts val="0"/>
-              </a:spcBef>
-              <a:spcAft>
-                <a:spcPts val="0"/>
-              </a:spcAft>
-              <a:buNone/>
-              <a:defRPr sz="2100" b="0">
-                <a:solidFill>
-                  <a:srgbClr val="303437"/>
-                </a:solidFill>
-                <a:latin typeface="Noto Sans"/>
-              </a:defRPr>
-            </a:pPr>
-            <a:r>
-              <a:rPr sz="2100" b="0" lang="ja-JP" altLang="en-US">
+                <a:spcPts val="2222"/>
+              </a:lnSpc>
+              <a:spcBef>
+                <a:spcPts val="0"/>
+              </a:spcBef>
+              <a:spcAft>
+                <a:spcPts val="0"/>
+              </a:spcAft>
+              <a:buNone/>
+              <a:defRPr sz="1900" b="0">
+                <a:solidFill>
+                  <a:srgbClr val="303437"/>
+                </a:solidFill>
+                <a:latin typeface="Noto Sans"/>
+              </a:defRPr>
+            </a:pPr>
+            <a:r>
+              <a:rPr sz="1900" b="0" lang="ja-JP" altLang="en-US">
                 <a:solidFill>
                   <a:srgbClr val="303437"/>
                 </a:solidFill>
@@ -19121,14 +18467,14 @@
       </p:sp>
       <p:sp>
         <p:nvSpPr>
-          <p:cNvPr id="8" name="実例本文3"/>
+          <p:cNvPr id="13" name="実例本文3"/>
           <p:cNvSpPr txBox="1"/>
           <p:nvPr/>
         </p:nvSpPr>
         <p:spPr>
           <a:xfrm>
-            <a:off x="594360" y="3527584"/>
-            <a:ext cx="7955279" cy="481330"/>
+            <a:off x="548640" y="3520313"/>
+            <a:ext cx="8046720" cy="320420"/>
           </a:xfrm>
           <a:prstGeom prst="rect">
             <a:avLst/>
@@ -19143,24 +18489,24 @@
           <a:p>
             <a:pPr algn="l">
               <a:lnSpc>
-                <a:spcPct val="112000"/>
-              </a:lnSpc>
-              <a:spcBef>
-                <a:spcPts val="0"/>
-              </a:spcBef>
-              <a:spcAft>
-                <a:spcPts val="0"/>
-              </a:spcAft>
-              <a:buNone/>
-              <a:defRPr sz="2200" b="0">
-                <a:solidFill>
-                  <a:srgbClr val="303437"/>
-                </a:solidFill>
-                <a:latin typeface="Noto Sans"/>
-              </a:defRPr>
-            </a:pPr>
-            <a:r>
-              <a:rPr sz="2200" b="1" lang="ja-JP" altLang="en-US">
+                <a:spcPts val="2222"/>
+              </a:lnSpc>
+              <a:spcBef>
+                <a:spcPts val="0"/>
+              </a:spcBef>
+              <a:spcAft>
+                <a:spcPts val="0"/>
+              </a:spcAft>
+              <a:buNone/>
+              <a:defRPr sz="1900" b="0">
+                <a:solidFill>
+                  <a:srgbClr val="303437"/>
+                </a:solidFill>
+                <a:latin typeface="Noto Sans"/>
+              </a:defRPr>
+            </a:pPr>
+            <a:r>
+              <a:rPr sz="1900" b="1" lang="ja-JP" altLang="en-US">
                 <a:solidFill>
                   <a:srgbClr val="B13731"/>
                 </a:solidFill>
@@ -19175,14 +18521,14 @@
       </p:sp>
       <p:sp>
         <p:nvSpPr>
-          <p:cNvPr id="9" name="実例本文4"/>
+          <p:cNvPr id="14" name="実例本文4"/>
           <p:cNvSpPr txBox="1"/>
           <p:nvPr/>
         </p:nvSpPr>
         <p:spPr>
           <a:xfrm>
-            <a:off x="594360" y="4111018"/>
-            <a:ext cx="7955279" cy="426084"/>
+            <a:off x="548640" y="3904233"/>
+            <a:ext cx="8046720" cy="320420"/>
           </a:xfrm>
           <a:prstGeom prst="rect">
             <a:avLst/>
@@ -19197,7 +18543,7 @@
           <a:p>
             <a:pPr algn="l">
               <a:lnSpc>
-                <a:spcPct val="112000"/>
+                <a:spcPts val="2222"/>
               </a:lnSpc>
               <a:spcBef>
                 <a:spcPts val="0"/>
@@ -19223,97 +18569,6 @@
                 <a:cs typeface="Noto Sans"/>
               </a:rPr>
               <a:t>カタルーニャの菓子と、その地域の飲み物の組み合わせを問う。</a:t>
-            </a:r>
-          </a:p>
-        </p:txBody>
-      </p:sp>
-      <p:sp>
-        <p:nvSpPr>
-          <p:cNvPr id="10" name="TextBox 9"/>
-          <p:cNvSpPr txBox="1"/>
-          <p:nvPr/>
-        </p:nvSpPr>
-        <p:spPr>
-          <a:xfrm>
-            <a:off x="502920" y="4690872"/>
-            <a:ext cx="8183879" cy="393192"/>
-          </a:xfrm>
-          <a:prstGeom prst="rect">
-            <a:avLst/>
-          </a:prstGeom>
-          <a:noFill/>
-        </p:spPr>
-        <p:txBody>
-          <a:bodyPr wrap="square" lIns="0" rIns="0" tIns="0" bIns="0">
-            <a:noAutofit/>
-          </a:bodyPr>
-          <a:lstStyle/>
-          <a:p>
-            <a:pPr algn="l">
-              <a:lnSpc>
-                <a:spcPct val="112000"/>
-              </a:lnSpc>
-              <a:spcBef>
-                <a:spcPts val="0"/>
-              </a:spcBef>
-              <a:spcAft>
-                <a:spcPts val="0"/>
-              </a:spcAft>
-              <a:buNone/>
-              <a:defRPr sz="810" b="0">
-                <a:solidFill>
-                  <a:srgbClr val="303437"/>
-                </a:solidFill>
-                <a:latin typeface="Noto Sans"/>
-              </a:defRPr>
-            </a:pPr>
-            <a:r>
-              <a:rPr sz="810" b="0" lang="ja-JP" altLang="en-US">
-                <a:solidFill>
-                  <a:srgbClr val="626669"/>
-                </a:solidFill>
-                <a:latin typeface="Noto Sans"/>
-                <a:ea typeface="Noto Sans CJK JP"/>
-                <a:cs typeface="Noto Sans"/>
-              </a:rPr>
-              <a:t/>
-            </a:r>
-            <a:r>
-              <a:rPr sz="810" b="0" lang="ja-JP" altLang="en-US">
-                <a:solidFill>
-                  <a:srgbClr val="626669"/>
-                </a:solidFill>
-                <a:latin typeface="Noto Sans"/>
-                <a:ea typeface="Noto Sans CJK JP"/>
-                <a:cs typeface="Noto Sans"/>
-              </a:rPr>
-              <a:t>Global PIQA v1 / nonparallel / group0042_ex000020_spa_latn_spai_0_v1。CC BY-SA 4.0。</a:t>
-            </a:r>
-          </a:p>
-          <a:p>
-            <a:pPr>
-              <a:lnSpc>
-                <a:spcPct val="112000"/>
-              </a:lnSpc>
-              <a:buNone/>
-              <a:defRPr sz="810" b="0">
-                <a:solidFill>
-                  <a:srgbClr val="303437"/>
-                </a:solidFill>
-                <a:latin typeface="Noto Sans"/>
-              </a:defRPr>
-            </a:pPr>
-            <a:r>
-              <a:rPr sz="810" b="0" lang="ja-JP" altLang="en-US">
-                <a:solidFill>
-                  <a:srgbClr val="626669"/>
-                </a:solidFill>
-                <a:latin typeface="Noto Sans"/>
-                <a:ea typeface="Noto Sans CJK JP"/>
-                <a:cs typeface="Noto Sans"/>
-                <a:hlinkClick r:id="rId2"/>
-              </a:rPr>
-              <a:t>https://huggingface.co/datasets/mrlbenchmarks/global-piqa-nonparallel</a:t>
             </a:r>
           </a:p>
         </p:txBody>
@@ -19440,8 +18695,8 @@
         </p:nvSpPr>
         <p:spPr>
           <a:xfrm>
-            <a:off x="594360" y="2073151"/>
-            <a:ext cx="7955279" cy="274320"/>
+            <a:off x="548640" y="1422400"/>
+            <a:ext cx="3870960" cy="216408"/>
           </a:xfrm>
           <a:prstGeom prst="rect">
             <a:avLst/>
@@ -19456,7 +18711,7 @@
           <a:p>
             <a:pPr algn="l">
               <a:lnSpc>
-                <a:spcPct val="117000"/>
+                <a:spcPts val="1404"/>
               </a:lnSpc>
               <a:spcBef>
                 <a:spcPts val="0"/>
@@ -19494,8 +18749,8 @@
         </p:nvSpPr>
         <p:spPr>
           <a:xfrm>
-            <a:off x="594360" y="2380818"/>
-            <a:ext cx="7955279" cy="481330"/>
+            <a:off x="548640" y="1727708"/>
+            <a:ext cx="3870960" cy="602741"/>
           </a:xfrm>
           <a:prstGeom prst="rect">
             <a:avLst/>
@@ -19510,24 +18765,24 @@
           <a:p>
             <a:pPr algn="l">
               <a:lnSpc>
-                <a:spcPct val="112000"/>
-              </a:lnSpc>
-              <a:spcBef>
-                <a:spcPts val="0"/>
-              </a:spcBef>
-              <a:spcAft>
-                <a:spcPts val="0"/>
-              </a:spcAft>
-              <a:buNone/>
-              <a:defRPr sz="2200" b="0">
-                <a:solidFill>
-                  <a:srgbClr val="303437"/>
-                </a:solidFill>
-                <a:latin typeface="Noto Sans"/>
-              </a:defRPr>
-            </a:pPr>
-            <a:r>
-              <a:rPr sz="2200" b="0" lang="ja-JP" altLang="en-US">
+                <a:spcPts val="2222"/>
+              </a:lnSpc>
+              <a:spcBef>
+                <a:spcPts val="0"/>
+              </a:spcBef>
+              <a:spcAft>
+                <a:spcPts val="0"/>
+              </a:spcAft>
+              <a:buNone/>
+              <a:defRPr sz="1900" b="0">
+                <a:solidFill>
+                  <a:srgbClr val="303437"/>
+                </a:solidFill>
+                <a:latin typeface="Noto Sans"/>
+              </a:defRPr>
+            </a:pPr>
+            <a:r>
+              <a:rPr sz="1900" b="0" lang="ja-JP" altLang="en-US">
                 <a:solidFill>
                   <a:srgbClr val="303437"/>
                 </a:solidFill>
@@ -19548,8 +18803,8 @@
         </p:nvSpPr>
         <p:spPr>
           <a:xfrm>
-            <a:off x="594360" y="2940258"/>
-            <a:ext cx="7955279" cy="462915"/>
+            <a:off x="548640" y="2393950"/>
+            <a:ext cx="3870960" cy="320420"/>
           </a:xfrm>
           <a:prstGeom prst="rect">
             <a:avLst/>
@@ -19564,24 +18819,24 @@
           <a:p>
             <a:pPr algn="l">
               <a:lnSpc>
-                <a:spcPct val="112000"/>
-              </a:lnSpc>
-              <a:spcBef>
-                <a:spcPts val="0"/>
-              </a:spcBef>
-              <a:spcAft>
-                <a:spcPts val="0"/>
-              </a:spcAft>
-              <a:buNone/>
-              <a:defRPr sz="2100" b="0">
-                <a:solidFill>
-                  <a:srgbClr val="303437"/>
-                </a:solidFill>
-                <a:latin typeface="Noto Sans"/>
-              </a:defRPr>
-            </a:pPr>
-            <a:r>
-              <a:rPr sz="2100" b="0" lang="ja-JP" altLang="en-US">
+                <a:spcPts val="2222"/>
+              </a:lnSpc>
+              <a:spcBef>
+                <a:spcPts val="0"/>
+              </a:spcBef>
+              <a:spcAft>
+                <a:spcPts val="0"/>
+              </a:spcAft>
+              <a:buNone/>
+              <a:defRPr sz="1900" b="0">
+                <a:solidFill>
+                  <a:srgbClr val="303437"/>
+                </a:solidFill>
+                <a:latin typeface="Noto Sans"/>
+              </a:defRPr>
+            </a:pPr>
+            <a:r>
+              <a:rPr sz="1900" b="0" lang="ja-JP" altLang="en-US">
                 <a:solidFill>
                   <a:srgbClr val="303437"/>
                 </a:solidFill>
@@ -19602,8 +18857,8 @@
         </p:nvSpPr>
         <p:spPr>
           <a:xfrm>
-            <a:off x="594360" y="3481539"/>
-            <a:ext cx="7955279" cy="462915"/>
+            <a:off x="548640" y="2777871"/>
+            <a:ext cx="3870960" cy="320420"/>
           </a:xfrm>
           <a:prstGeom prst="rect">
             <a:avLst/>
@@ -19618,24 +18873,24 @@
           <a:p>
             <a:pPr algn="l">
               <a:lnSpc>
-                <a:spcPct val="112000"/>
-              </a:lnSpc>
-              <a:spcBef>
-                <a:spcPts val="0"/>
-              </a:spcBef>
-              <a:spcAft>
-                <a:spcPts val="0"/>
-              </a:spcAft>
-              <a:buNone/>
-              <a:defRPr sz="2100" b="0">
-                <a:solidFill>
-                  <a:srgbClr val="303437"/>
-                </a:solidFill>
-                <a:latin typeface="Noto Sans"/>
-              </a:defRPr>
-            </a:pPr>
-            <a:r>
-              <a:rPr sz="2100" b="0" lang="ja-JP" altLang="en-US">
+                <a:spcPts val="2222"/>
+              </a:lnSpc>
+              <a:spcBef>
+                <a:spcPts val="0"/>
+              </a:spcBef>
+              <a:spcAft>
+                <a:spcPts val="0"/>
+              </a:spcAft>
+              <a:buNone/>
+              <a:defRPr sz="1900" b="0">
+                <a:solidFill>
+                  <a:srgbClr val="303437"/>
+                </a:solidFill>
+                <a:latin typeface="Noto Sans"/>
+              </a:defRPr>
+            </a:pPr>
+            <a:r>
+              <a:rPr sz="1900" b="0" lang="ja-JP" altLang="en-US">
                 <a:solidFill>
                   <a:srgbClr val="303437"/>
                 </a:solidFill>
@@ -19739,130 +18994,16 @@
           </a:p>
         </p:txBody>
       </p:sp>
-    </p:spTree>
-  </p:cSld>
-  <p:clrMapOvr>
-    <a:masterClrMapping/>
-  </p:clrMapOvr>
-</p:sld>
-</file>
-
-<file path=ppt/slides/slide36.xml><?xml version="1.0" encoding="utf-8"?>
-<p:sld xmlns:a="http://schemas.openxmlformats.org/drawingml/2006/main" xmlns:p="http://schemas.openxmlformats.org/presentationml/2006/main" xmlns:r="http://schemas.openxmlformats.org/officeDocument/2006/relationships">
-  <p:cSld>
-    <p:spTree>
-      <p:nvGrpSpPr>
-        <p:cNvPr id="1" name=""/>
-        <p:cNvGrpSpPr/>
-        <p:nvPr/>
-      </p:nvGrpSpPr>
-      <p:grpSpPr/>
-      <p:sp>
-        <p:nvSpPr>
-          <p:cNvPr id="2" name="Title 1"/>
-          <p:cNvSpPr>
-            <a:spLocks noGrp="1"/>
-          </p:cNvSpPr>
-          <p:nvPr>
-            <p:ph type="title"/>
-          </p:nvPr>
-        </p:nvSpPr>
-        <p:spPr>
-          <a:xfrm>
-            <a:off x="548640" y="786384"/>
-            <a:ext cx="8046720" cy="502920"/>
-          </a:xfrm>
-        </p:spPr>
-        <p:txBody>
-          <a:bodyPr wrap="square" lIns="0" rIns="0" tIns="0" bIns="0">
-            <a:noAutofit/>
-          </a:bodyPr>
-          <a:lstStyle/>
-          <a:p>
-            <a:pPr algn="l">
-              <a:lnSpc>
-                <a:spcPct val="110000"/>
-              </a:lnSpc>
-              <a:buNone/>
-              <a:defRPr sz="2800" b="0">
-                <a:solidFill>
-                  <a:srgbClr val="303437"/>
-                </a:solidFill>
-                <a:latin typeface="Noto Sans"/>
-              </a:defRPr>
-            </a:pPr>
-            <a:r>
-              <a:rPr sz="2800" b="1" lang="ja-JP" altLang="en-US">
-                <a:solidFill>
-                  <a:srgbClr val="303437"/>
-                </a:solidFill>
-                <a:latin typeface="Noto Sans"/>
-                <a:ea typeface="Noto Sans CJK JP"/>
-                <a:cs typeface="Noto Sans"/>
-              </a:rPr>
-              <a:t>追加例2：日本語訳と解説</a:t>
-            </a:r>
-          </a:p>
-        </p:txBody>
-      </p:sp>
-      <p:sp>
-        <p:nvSpPr>
-          <p:cNvPr id="3" name="Title 2"/>
-          <p:cNvSpPr>
-            <a:spLocks noGrp="1"/>
-          </p:cNvSpPr>
-          <p:nvPr>
-            <p:ph type="title" idx="2"/>
-          </p:nvPr>
-        </p:nvSpPr>
-        <p:spPr>
-          <a:xfrm>
-            <a:off x="75895" y="0"/>
-            <a:ext cx="8115300" cy="480060"/>
-          </a:xfrm>
-        </p:spPr>
-        <p:txBody>
-          <a:bodyPr wrap="square" lIns="0" rIns="0" tIns="0" bIns="0" anchor="ctr">
-            <a:noAutofit/>
-          </a:bodyPr>
-          <a:lstStyle/>
-          <a:p>
-            <a:pPr algn="l">
-              <a:lnSpc>
-                <a:spcPct val="110000"/>
-              </a:lnSpc>
-              <a:buNone/>
-              <a:defRPr sz="1400" b="0">
-                <a:solidFill>
-                  <a:srgbClr val="303437"/>
-                </a:solidFill>
-                <a:latin typeface="Noto Sans"/>
-              </a:defRPr>
-            </a:pPr>
-            <a:r>
-              <a:rPr sz="1400" b="1" lang="ja-JP" altLang="en-US">
-                <a:solidFill>
-                  <a:srgbClr val="FFFFFF"/>
-                </a:solidFill>
-                <a:latin typeface="Noto Sans"/>
-                <a:ea typeface="Noto Sans CJK JP"/>
-                <a:cs typeface="Noto Sans"/>
-              </a:rPr>
-              <a:t>Appendix: 1. 生活場面の追加例</a:t>
-            </a:r>
-          </a:p>
-        </p:txBody>
-      </p:sp>
-      <p:sp>
-        <p:nvSpPr>
-          <p:cNvPr id="4" name="実例ラベル"/>
+      <p:sp>
+        <p:nvSpPr>
+          <p:cNvPr id="9" name="実例ラベル"/>
           <p:cNvSpPr txBox="1"/>
           <p:nvPr/>
         </p:nvSpPr>
         <p:spPr>
           <a:xfrm>
-            <a:off x="594360" y="1481628"/>
-            <a:ext cx="7955279" cy="274320"/>
+            <a:off x="4724400" y="1422400"/>
+            <a:ext cx="3870960" cy="216408"/>
           </a:xfrm>
           <a:prstGeom prst="rect">
             <a:avLst/>
@@ -19877,7 +19018,7 @@
           <a:p>
             <a:pPr algn="l">
               <a:lnSpc>
-                <a:spcPct val="117000"/>
+                <a:spcPts val="1404"/>
               </a:lnSpc>
               <a:spcBef>
                 <a:spcPts val="0"/>
@@ -19909,14 +19050,14 @@
       </p:sp>
       <p:sp>
         <p:nvSpPr>
-          <p:cNvPr id="5" name="実例本文0"/>
+          <p:cNvPr id="10" name="実例本文0"/>
           <p:cNvSpPr txBox="1"/>
           <p:nvPr/>
         </p:nvSpPr>
         <p:spPr>
           <a:xfrm>
-            <a:off x="594360" y="1814628"/>
-            <a:ext cx="7955279" cy="481330"/>
+            <a:off x="4724400" y="1727708"/>
+            <a:ext cx="3870960" cy="602741"/>
           </a:xfrm>
           <a:prstGeom prst="rect">
             <a:avLst/>
@@ -19931,24 +19072,24 @@
           <a:p>
             <a:pPr algn="l">
               <a:lnSpc>
-                <a:spcPct val="112000"/>
-              </a:lnSpc>
-              <a:spcBef>
-                <a:spcPts val="0"/>
-              </a:spcBef>
-              <a:spcAft>
-                <a:spcPts val="0"/>
-              </a:spcAft>
-              <a:buNone/>
-              <a:defRPr sz="2200" b="0">
-                <a:solidFill>
-                  <a:srgbClr val="303437"/>
-                </a:solidFill>
-                <a:latin typeface="Noto Sans"/>
-              </a:defRPr>
-            </a:pPr>
-            <a:r>
-              <a:rPr sz="2200" b="0" lang="ja-JP" altLang="en-US">
+                <a:spcPts val="2222"/>
+              </a:lnSpc>
+              <a:spcBef>
+                <a:spcPts val="0"/>
+              </a:spcBef>
+              <a:spcAft>
+                <a:spcPts val="0"/>
+              </a:spcAft>
+              <a:buNone/>
+              <a:defRPr sz="1900" b="0">
+                <a:solidFill>
+                  <a:srgbClr val="303437"/>
+                </a:solidFill>
+                <a:latin typeface="Noto Sans"/>
+              </a:defRPr>
+            </a:pPr>
+            <a:r>
+              <a:rPr sz="1900" b="0" lang="ja-JP" altLang="en-US">
                 <a:solidFill>
                   <a:srgbClr val="303437"/>
                 </a:solidFill>
@@ -19963,14 +19104,14 @@
       </p:sp>
       <p:sp>
         <p:nvSpPr>
-          <p:cNvPr id="6" name="実例本文1"/>
+          <p:cNvPr id="11" name="実例本文1"/>
           <p:cNvSpPr txBox="1"/>
           <p:nvPr/>
         </p:nvSpPr>
         <p:spPr>
           <a:xfrm>
-            <a:off x="594360" y="2396984"/>
-            <a:ext cx="7955279" cy="462915"/>
+            <a:off x="4724400" y="2393950"/>
+            <a:ext cx="3870960" cy="320420"/>
           </a:xfrm>
           <a:prstGeom prst="rect">
             <a:avLst/>
@@ -19985,24 +19126,24 @@
           <a:p>
             <a:pPr algn="l">
               <a:lnSpc>
-                <a:spcPct val="112000"/>
-              </a:lnSpc>
-              <a:spcBef>
-                <a:spcPts val="0"/>
-              </a:spcBef>
-              <a:spcAft>
-                <a:spcPts val="0"/>
-              </a:spcAft>
-              <a:buNone/>
-              <a:defRPr sz="2100" b="0">
-                <a:solidFill>
-                  <a:srgbClr val="303437"/>
-                </a:solidFill>
-                <a:latin typeface="Noto Sans"/>
-              </a:defRPr>
-            </a:pPr>
-            <a:r>
-              <a:rPr sz="2100" b="0" lang="ja-JP" altLang="en-US">
+                <a:spcPts val="2222"/>
+              </a:lnSpc>
+              <a:spcBef>
+                <a:spcPts val="0"/>
+              </a:spcBef>
+              <a:spcAft>
+                <a:spcPts val="0"/>
+              </a:spcAft>
+              <a:buNone/>
+              <a:defRPr sz="1900" b="0">
+                <a:solidFill>
+                  <a:srgbClr val="303437"/>
+                </a:solidFill>
+                <a:latin typeface="Noto Sans"/>
+              </a:defRPr>
+            </a:pPr>
+            <a:r>
+              <a:rPr sz="1900" b="0" lang="ja-JP" altLang="en-US">
                 <a:solidFill>
                   <a:srgbClr val="303437"/>
                 </a:solidFill>
@@ -20017,14 +19158,14 @@
       </p:sp>
       <p:sp>
         <p:nvSpPr>
-          <p:cNvPr id="7" name="実例本文2"/>
+          <p:cNvPr id="12" name="実例本文2"/>
           <p:cNvSpPr txBox="1"/>
           <p:nvPr/>
         </p:nvSpPr>
         <p:spPr>
           <a:xfrm>
-            <a:off x="594360" y="2962501"/>
-            <a:ext cx="7955279" cy="462915"/>
+            <a:off x="4724400" y="2777871"/>
+            <a:ext cx="3870960" cy="602741"/>
           </a:xfrm>
           <a:prstGeom prst="rect">
             <a:avLst/>
@@ -20039,24 +19180,24 @@
           <a:p>
             <a:pPr algn="l">
               <a:lnSpc>
-                <a:spcPct val="112000"/>
-              </a:lnSpc>
-              <a:spcBef>
-                <a:spcPts val="0"/>
-              </a:spcBef>
-              <a:spcAft>
-                <a:spcPts val="0"/>
-              </a:spcAft>
-              <a:buNone/>
-              <a:defRPr sz="2100" b="0">
-                <a:solidFill>
-                  <a:srgbClr val="303437"/>
-                </a:solidFill>
-                <a:latin typeface="Noto Sans"/>
-              </a:defRPr>
-            </a:pPr>
-            <a:r>
-              <a:rPr sz="2100" b="0" lang="ja-JP" altLang="en-US">
+                <a:spcPts val="2222"/>
+              </a:lnSpc>
+              <a:spcBef>
+                <a:spcPts val="0"/>
+              </a:spcBef>
+              <a:spcAft>
+                <a:spcPts val="0"/>
+              </a:spcAft>
+              <a:buNone/>
+              <a:defRPr sz="1900" b="0">
+                <a:solidFill>
+                  <a:srgbClr val="303437"/>
+                </a:solidFill>
+                <a:latin typeface="Noto Sans"/>
+              </a:defRPr>
+            </a:pPr>
+            <a:r>
+              <a:rPr sz="1900" b="0" lang="ja-JP" altLang="en-US">
                 <a:solidFill>
                   <a:srgbClr val="303437"/>
                 </a:solidFill>
@@ -20071,14 +19212,14 @@
       </p:sp>
       <p:sp>
         <p:nvSpPr>
-          <p:cNvPr id="8" name="実例本文3"/>
+          <p:cNvPr id="13" name="実例本文3"/>
           <p:cNvSpPr txBox="1"/>
           <p:nvPr/>
         </p:nvSpPr>
         <p:spPr>
           <a:xfrm>
-            <a:off x="594360" y="3527584"/>
-            <a:ext cx="7955279" cy="481330"/>
+            <a:off x="548640" y="3520313"/>
+            <a:ext cx="8046720" cy="320420"/>
           </a:xfrm>
           <a:prstGeom prst="rect">
             <a:avLst/>
@@ -20093,24 +19234,24 @@
           <a:p>
             <a:pPr algn="l">
               <a:lnSpc>
-                <a:spcPct val="112000"/>
-              </a:lnSpc>
-              <a:spcBef>
-                <a:spcPts val="0"/>
-              </a:spcBef>
-              <a:spcAft>
-                <a:spcPts val="0"/>
-              </a:spcAft>
-              <a:buNone/>
-              <a:defRPr sz="2200" b="0">
-                <a:solidFill>
-                  <a:srgbClr val="303437"/>
-                </a:solidFill>
-                <a:latin typeface="Noto Sans"/>
-              </a:defRPr>
-            </a:pPr>
-            <a:r>
-              <a:rPr sz="2200" b="1" lang="ja-JP" altLang="en-US">
+                <a:spcPts val="2222"/>
+              </a:lnSpc>
+              <a:spcBef>
+                <a:spcPts val="0"/>
+              </a:spcBef>
+              <a:spcAft>
+                <a:spcPts val="0"/>
+              </a:spcAft>
+              <a:buNone/>
+              <a:defRPr sz="1900" b="0">
+                <a:solidFill>
+                  <a:srgbClr val="303437"/>
+                </a:solidFill>
+                <a:latin typeface="Noto Sans"/>
+              </a:defRPr>
+            </a:pPr>
+            <a:r>
+              <a:rPr sz="1900" b="1" lang="ja-JP" altLang="en-US">
                 <a:solidFill>
                   <a:srgbClr val="B13731"/>
                 </a:solidFill>
@@ -20125,14 +19266,14 @@
       </p:sp>
       <p:sp>
         <p:nvSpPr>
-          <p:cNvPr id="9" name="実例本文4"/>
+          <p:cNvPr id="14" name="実例本文4"/>
           <p:cNvSpPr txBox="1"/>
           <p:nvPr/>
         </p:nvSpPr>
         <p:spPr>
           <a:xfrm>
-            <a:off x="594360" y="4111018"/>
-            <a:ext cx="7955279" cy="426084"/>
+            <a:off x="548640" y="3904233"/>
+            <a:ext cx="8046720" cy="320420"/>
           </a:xfrm>
           <a:prstGeom prst="rect">
             <a:avLst/>
@@ -20147,7 +19288,7 @@
           <a:p>
             <a:pPr algn="l">
               <a:lnSpc>
-                <a:spcPct val="112000"/>
+                <a:spcPts val="2222"/>
               </a:lnSpc>
               <a:spcBef>
                 <a:spcPts val="0"/>
@@ -20173,97 +19314,6 @@
                 <a:cs typeface="Noto Sans"/>
               </a:rPr>
               <a:t>地域の調理器具の名前を知り、用途と結び付ける。</a:t>
-            </a:r>
-          </a:p>
-        </p:txBody>
-      </p:sp>
-      <p:sp>
-        <p:nvSpPr>
-          <p:cNvPr id="10" name="TextBox 9"/>
-          <p:cNvSpPr txBox="1"/>
-          <p:nvPr/>
-        </p:nvSpPr>
-        <p:spPr>
-          <a:xfrm>
-            <a:off x="502920" y="4690872"/>
-            <a:ext cx="8183879" cy="393192"/>
-          </a:xfrm>
-          <a:prstGeom prst="rect">
-            <a:avLst/>
-          </a:prstGeom>
-          <a:noFill/>
-        </p:spPr>
-        <p:txBody>
-          <a:bodyPr wrap="square" lIns="0" rIns="0" tIns="0" bIns="0">
-            <a:noAutofit/>
-          </a:bodyPr>
-          <a:lstStyle/>
-          <a:p>
-            <a:pPr algn="l">
-              <a:lnSpc>
-                <a:spcPct val="112000"/>
-              </a:lnSpc>
-              <a:spcBef>
-                <a:spcPts val="0"/>
-              </a:spcBef>
-              <a:spcAft>
-                <a:spcPts val="0"/>
-              </a:spcAft>
-              <a:buNone/>
-              <a:defRPr sz="810" b="0">
-                <a:solidFill>
-                  <a:srgbClr val="303437"/>
-                </a:solidFill>
-                <a:latin typeface="Noto Sans"/>
-              </a:defRPr>
-            </a:pPr>
-            <a:r>
-              <a:rPr sz="810" b="0" lang="ja-JP" altLang="en-US">
-                <a:solidFill>
-                  <a:srgbClr val="626669"/>
-                </a:solidFill>
-                <a:latin typeface="Noto Sans"/>
-                <a:ea typeface="Noto Sans CJK JP"/>
-                <a:cs typeface="Noto Sans"/>
-              </a:rPr>
-              <a:t/>
-            </a:r>
-            <a:r>
-              <a:rPr sz="810" b="0" lang="ja-JP" altLang="en-US">
-                <a:solidFill>
-                  <a:srgbClr val="626669"/>
-                </a:solidFill>
-                <a:latin typeface="Noto Sans"/>
-                <a:ea typeface="Noto Sans CJK JP"/>
-                <a:cs typeface="Noto Sans"/>
-              </a:rPr>
-              <a:t>Global PIQA v1 / nonparallel / group0004_ex000001_fra_latn_fran_0_v1。CC BY-SA 4.0。</a:t>
-            </a:r>
-          </a:p>
-          <a:p>
-            <a:pPr>
-              <a:lnSpc>
-                <a:spcPct val="112000"/>
-              </a:lnSpc>
-              <a:buNone/>
-              <a:defRPr sz="810" b="0">
-                <a:solidFill>
-                  <a:srgbClr val="303437"/>
-                </a:solidFill>
-                <a:latin typeface="Noto Sans"/>
-              </a:defRPr>
-            </a:pPr>
-            <a:r>
-              <a:rPr sz="810" b="0" lang="ja-JP" altLang="en-US">
-                <a:solidFill>
-                  <a:srgbClr val="626669"/>
-                </a:solidFill>
-                <a:latin typeface="Noto Sans"/>
-                <a:ea typeface="Noto Sans CJK JP"/>
-                <a:cs typeface="Noto Sans"/>
-                <a:hlinkClick r:id="rId2"/>
-              </a:rPr>
-              <a:t>https://huggingface.co/datasets/mrlbenchmarks/global-piqa-nonparallel</a:t>
             </a:r>
           </a:p>
         </p:txBody>
@@ -20390,8 +19440,8 @@
         </p:nvSpPr>
         <p:spPr>
           <a:xfrm>
-            <a:off x="594360" y="1885590"/>
-            <a:ext cx="7955279" cy="274320"/>
+            <a:off x="548640" y="1422400"/>
+            <a:ext cx="3870960" cy="216408"/>
           </a:xfrm>
           <a:prstGeom prst="rect">
             <a:avLst/>
@@ -20406,7 +19456,7 @@
           <a:p>
             <a:pPr algn="l">
               <a:lnSpc>
-                <a:spcPct val="117000"/>
+                <a:spcPts val="1404"/>
               </a:lnSpc>
               <a:spcBef>
                 <a:spcPts val="0"/>
@@ -20444,8 +19494,8 @@
         </p:nvSpPr>
         <p:spPr>
           <a:xfrm>
-            <a:off x="594360" y="2193613"/>
-            <a:ext cx="7955279" cy="886460"/>
+            <a:off x="548640" y="1727708"/>
+            <a:ext cx="3870960" cy="885063"/>
           </a:xfrm>
           <a:prstGeom prst="rect">
             <a:avLst/>
@@ -20460,24 +19510,24 @@
           <a:p>
             <a:pPr algn="l">
               <a:lnSpc>
-                <a:spcPct val="112000"/>
-              </a:lnSpc>
-              <a:spcBef>
-                <a:spcPts val="0"/>
-              </a:spcBef>
-              <a:spcAft>
-                <a:spcPts val="0"/>
-              </a:spcAft>
-              <a:buNone/>
-              <a:defRPr sz="2200" b="0">
-                <a:solidFill>
-                  <a:srgbClr val="303437"/>
-                </a:solidFill>
-                <a:latin typeface="Noto Sans"/>
-              </a:defRPr>
-            </a:pPr>
-            <a:r>
-              <a:rPr sz="2200" b="0" lang="ja-JP" altLang="en-US">
+                <a:spcPts val="2222"/>
+              </a:lnSpc>
+              <a:spcBef>
+                <a:spcPts val="0"/>
+              </a:spcBef>
+              <a:spcAft>
+                <a:spcPts val="0"/>
+              </a:spcAft>
+              <a:buNone/>
+              <a:defRPr sz="1900" b="0">
+                <a:solidFill>
+                  <a:srgbClr val="303437"/>
+                </a:solidFill>
+                <a:latin typeface="Noto Sans"/>
+              </a:defRPr>
+            </a:pPr>
+            <a:r>
+              <a:rPr sz="1900" b="0" lang="ja-JP" altLang="en-US">
                 <a:solidFill>
                   <a:srgbClr val="303437"/>
                 </a:solidFill>
@@ -20498,8 +19548,8 @@
         </p:nvSpPr>
         <p:spPr>
           <a:xfrm>
-            <a:off x="594360" y="3127958"/>
-            <a:ext cx="7955279" cy="462915"/>
+            <a:off x="548640" y="2676271"/>
+            <a:ext cx="3870960" cy="320420"/>
           </a:xfrm>
           <a:prstGeom prst="rect">
             <a:avLst/>
@@ -20514,24 +19564,24 @@
           <a:p>
             <a:pPr algn="l">
               <a:lnSpc>
-                <a:spcPct val="112000"/>
-              </a:lnSpc>
-              <a:spcBef>
-                <a:spcPts val="0"/>
-              </a:spcBef>
-              <a:spcAft>
-                <a:spcPts val="0"/>
-              </a:spcAft>
-              <a:buNone/>
-              <a:defRPr sz="2100" b="0">
-                <a:solidFill>
-                  <a:srgbClr val="303437"/>
-                </a:solidFill>
-                <a:latin typeface="Noto Sans"/>
-              </a:defRPr>
-            </a:pPr>
-            <a:r>
-              <a:rPr sz="2100" b="0" lang="ja-JP" altLang="en-US">
+                <a:spcPts val="2222"/>
+              </a:lnSpc>
+              <a:spcBef>
+                <a:spcPts val="0"/>
+              </a:spcBef>
+              <a:spcAft>
+                <a:spcPts val="0"/>
+              </a:spcAft>
+              <a:buNone/>
+              <a:defRPr sz="1900" b="0">
+                <a:solidFill>
+                  <a:srgbClr val="303437"/>
+                </a:solidFill>
+                <a:latin typeface="Noto Sans"/>
+              </a:defRPr>
+            </a:pPr>
+            <a:r>
+              <a:rPr sz="1900" b="0" lang="ja-JP" altLang="en-US">
                 <a:solidFill>
                   <a:srgbClr val="303437"/>
                 </a:solidFill>
@@ -20552,8 +19602,8 @@
         </p:nvSpPr>
         <p:spPr>
           <a:xfrm>
-            <a:off x="594360" y="3669237"/>
-            <a:ext cx="7955279" cy="462915"/>
+            <a:off x="548640" y="3060191"/>
+            <a:ext cx="3870960" cy="320420"/>
           </a:xfrm>
           <a:prstGeom prst="rect">
             <a:avLst/>
@@ -20568,24 +19618,24 @@
           <a:p>
             <a:pPr algn="l">
               <a:lnSpc>
-                <a:spcPct val="112000"/>
-              </a:lnSpc>
-              <a:spcBef>
-                <a:spcPts val="0"/>
-              </a:spcBef>
-              <a:spcAft>
-                <a:spcPts val="0"/>
-              </a:spcAft>
-              <a:buNone/>
-              <a:defRPr sz="2100" b="0">
-                <a:solidFill>
-                  <a:srgbClr val="303437"/>
-                </a:solidFill>
-                <a:latin typeface="Noto Sans"/>
-              </a:defRPr>
-            </a:pPr>
-            <a:r>
-              <a:rPr sz="2100" b="0" lang="ja-JP" altLang="en-US">
+                <a:spcPts val="2222"/>
+              </a:lnSpc>
+              <a:spcBef>
+                <a:spcPts val="0"/>
+              </a:spcBef>
+              <a:spcAft>
+                <a:spcPts val="0"/>
+              </a:spcAft>
+              <a:buNone/>
+              <a:defRPr sz="1900" b="0">
+                <a:solidFill>
+                  <a:srgbClr val="303437"/>
+                </a:solidFill>
+                <a:latin typeface="Noto Sans"/>
+              </a:defRPr>
+            </a:pPr>
+            <a:r>
+              <a:rPr sz="1900" b="0" lang="ja-JP" altLang="en-US">
                 <a:solidFill>
                   <a:srgbClr val="303437"/>
                 </a:solidFill>
@@ -20689,130 +19739,16 @@
           </a:p>
         </p:txBody>
       </p:sp>
-    </p:spTree>
-  </p:cSld>
-  <p:clrMapOvr>
-    <a:masterClrMapping/>
-  </p:clrMapOvr>
-</p:sld>
-</file>
-
-<file path=ppt/slides/slide38.xml><?xml version="1.0" encoding="utf-8"?>
-<p:sld xmlns:a="http://schemas.openxmlformats.org/drawingml/2006/main" xmlns:p="http://schemas.openxmlformats.org/presentationml/2006/main" xmlns:r="http://schemas.openxmlformats.org/officeDocument/2006/relationships">
-  <p:cSld>
-    <p:spTree>
-      <p:nvGrpSpPr>
-        <p:cNvPr id="1" name=""/>
-        <p:cNvGrpSpPr/>
-        <p:nvPr/>
-      </p:nvGrpSpPr>
-      <p:grpSpPr/>
-      <p:sp>
-        <p:nvSpPr>
-          <p:cNvPr id="2" name="Title 1"/>
-          <p:cNvSpPr>
-            <a:spLocks noGrp="1"/>
-          </p:cNvSpPr>
-          <p:nvPr>
-            <p:ph type="title"/>
-          </p:nvPr>
-        </p:nvSpPr>
-        <p:spPr>
-          <a:xfrm>
-            <a:off x="548640" y="786384"/>
-            <a:ext cx="8046720" cy="502920"/>
-          </a:xfrm>
-        </p:spPr>
-        <p:txBody>
-          <a:bodyPr wrap="square" lIns="0" rIns="0" tIns="0" bIns="0">
-            <a:noAutofit/>
-          </a:bodyPr>
-          <a:lstStyle/>
-          <a:p>
-            <a:pPr algn="l">
-              <a:lnSpc>
-                <a:spcPct val="110000"/>
-              </a:lnSpc>
-              <a:buNone/>
-              <a:defRPr sz="2800" b="0">
-                <a:solidFill>
-                  <a:srgbClr val="303437"/>
-                </a:solidFill>
-                <a:latin typeface="Noto Sans"/>
-              </a:defRPr>
-            </a:pPr>
-            <a:r>
-              <a:rPr sz="2800" b="1" lang="ja-JP" altLang="en-US">
-                <a:solidFill>
-                  <a:srgbClr val="303437"/>
-                </a:solidFill>
-                <a:latin typeface="Noto Sans"/>
-                <a:ea typeface="Noto Sans CJK JP"/>
-                <a:cs typeface="Noto Sans"/>
-              </a:rPr>
-              <a:t>追加例3：日本語訳と解説</a:t>
-            </a:r>
-          </a:p>
-        </p:txBody>
-      </p:sp>
-      <p:sp>
-        <p:nvSpPr>
-          <p:cNvPr id="3" name="Title 2"/>
-          <p:cNvSpPr>
-            <a:spLocks noGrp="1"/>
-          </p:cNvSpPr>
-          <p:nvPr>
-            <p:ph type="title" idx="2"/>
-          </p:nvPr>
-        </p:nvSpPr>
-        <p:spPr>
-          <a:xfrm>
-            <a:off x="75895" y="0"/>
-            <a:ext cx="8115300" cy="480060"/>
-          </a:xfrm>
-        </p:spPr>
-        <p:txBody>
-          <a:bodyPr wrap="square" lIns="0" rIns="0" tIns="0" bIns="0" anchor="ctr">
-            <a:noAutofit/>
-          </a:bodyPr>
-          <a:lstStyle/>
-          <a:p>
-            <a:pPr algn="l">
-              <a:lnSpc>
-                <a:spcPct val="110000"/>
-              </a:lnSpc>
-              <a:buNone/>
-              <a:defRPr sz="1400" b="0">
-                <a:solidFill>
-                  <a:srgbClr val="303437"/>
-                </a:solidFill>
-                <a:latin typeface="Noto Sans"/>
-              </a:defRPr>
-            </a:pPr>
-            <a:r>
-              <a:rPr sz="1400" b="1" lang="ja-JP" altLang="en-US">
-                <a:solidFill>
-                  <a:srgbClr val="FFFFFF"/>
-                </a:solidFill>
-                <a:latin typeface="Noto Sans"/>
-                <a:ea typeface="Noto Sans CJK JP"/>
-                <a:cs typeface="Noto Sans"/>
-              </a:rPr>
-              <a:t>Appendix: 1. 生活場面の追加例</a:t>
-            </a:r>
-          </a:p>
-        </p:txBody>
-      </p:sp>
-      <p:sp>
-        <p:nvSpPr>
-          <p:cNvPr id="4" name="実例ラベル"/>
+      <p:sp>
+        <p:nvSpPr>
+          <p:cNvPr id="9" name="実例ラベル"/>
           <p:cNvSpPr txBox="1"/>
           <p:nvPr/>
         </p:nvSpPr>
         <p:spPr>
           <a:xfrm>
-            <a:off x="594360" y="1407562"/>
-            <a:ext cx="7955279" cy="274320"/>
+            <a:off x="4724400" y="1422400"/>
+            <a:ext cx="3870960" cy="216408"/>
           </a:xfrm>
           <a:prstGeom prst="rect">
             <a:avLst/>
@@ -20827,7 +19763,7 @@
           <a:p>
             <a:pPr algn="l">
               <a:lnSpc>
-                <a:spcPct val="117000"/>
+                <a:spcPts val="1404"/>
               </a:lnSpc>
               <a:spcBef>
                 <a:spcPts val="0"/>
@@ -20859,14 +19795,14 @@
       </p:sp>
       <p:sp>
         <p:nvSpPr>
-          <p:cNvPr id="5" name="実例本文0"/>
+          <p:cNvPr id="10" name="実例本文0"/>
           <p:cNvSpPr txBox="1"/>
           <p:nvPr/>
         </p:nvSpPr>
         <p:spPr>
           <a:xfrm>
-            <a:off x="594360" y="1715595"/>
-            <a:ext cx="7955279" cy="886460"/>
+            <a:off x="4724400" y="1727708"/>
+            <a:ext cx="3870960" cy="885063"/>
           </a:xfrm>
           <a:prstGeom prst="rect">
             <a:avLst/>
@@ -20881,24 +19817,24 @@
           <a:p>
             <a:pPr algn="l">
               <a:lnSpc>
-                <a:spcPct val="112000"/>
-              </a:lnSpc>
-              <a:spcBef>
-                <a:spcPts val="0"/>
-              </a:spcBef>
-              <a:spcAft>
-                <a:spcPts val="0"/>
-              </a:spcAft>
-              <a:buNone/>
-              <a:defRPr sz="2200" b="0">
-                <a:solidFill>
-                  <a:srgbClr val="303437"/>
-                </a:solidFill>
-                <a:latin typeface="Noto Sans"/>
-              </a:defRPr>
-            </a:pPr>
-            <a:r>
-              <a:rPr sz="2200" b="0" lang="ja-JP" altLang="en-US">
+                <a:spcPts val="2222"/>
+              </a:lnSpc>
+              <a:spcBef>
+                <a:spcPts val="0"/>
+              </a:spcBef>
+              <a:spcAft>
+                <a:spcPts val="0"/>
+              </a:spcAft>
+              <a:buNone/>
+              <a:defRPr sz="1900" b="0">
+                <a:solidFill>
+                  <a:srgbClr val="303437"/>
+                </a:solidFill>
+                <a:latin typeface="Noto Sans"/>
+              </a:defRPr>
+            </a:pPr>
+            <a:r>
+              <a:rPr sz="1900" b="0" lang="ja-JP" altLang="en-US">
                 <a:solidFill>
                   <a:srgbClr val="303437"/>
                 </a:solidFill>
@@ -20913,14 +19849,14 @@
       </p:sp>
       <p:sp>
         <p:nvSpPr>
-          <p:cNvPr id="6" name="実例本文1"/>
+          <p:cNvPr id="11" name="実例本文1"/>
           <p:cNvSpPr txBox="1"/>
           <p:nvPr/>
         </p:nvSpPr>
         <p:spPr>
           <a:xfrm>
-            <a:off x="594360" y="2621928"/>
-            <a:ext cx="7955279" cy="462915"/>
+            <a:off x="4724400" y="2676271"/>
+            <a:ext cx="3870960" cy="320420"/>
           </a:xfrm>
           <a:prstGeom prst="rect">
             <a:avLst/>
@@ -20935,24 +19871,24 @@
           <a:p>
             <a:pPr algn="l">
               <a:lnSpc>
-                <a:spcPct val="112000"/>
-              </a:lnSpc>
-              <a:spcBef>
-                <a:spcPts val="0"/>
-              </a:spcBef>
-              <a:spcAft>
-                <a:spcPts val="0"/>
-              </a:spcAft>
-              <a:buNone/>
-              <a:defRPr sz="2100" b="0">
-                <a:solidFill>
-                  <a:srgbClr val="303437"/>
-                </a:solidFill>
-                <a:latin typeface="Noto Sans"/>
-              </a:defRPr>
-            </a:pPr>
-            <a:r>
-              <a:rPr sz="2100" b="0" lang="ja-JP" altLang="en-US">
+                <a:spcPts val="2222"/>
+              </a:lnSpc>
+              <a:spcBef>
+                <a:spcPts val="0"/>
+              </a:spcBef>
+              <a:spcAft>
+                <a:spcPts val="0"/>
+              </a:spcAft>
+              <a:buNone/>
+              <a:defRPr sz="1900" b="0">
+                <a:solidFill>
+                  <a:srgbClr val="303437"/>
+                </a:solidFill>
+                <a:latin typeface="Noto Sans"/>
+              </a:defRPr>
+            </a:pPr>
+            <a:r>
+              <a:rPr sz="1900" b="0" lang="ja-JP" altLang="en-US">
                 <a:solidFill>
                   <a:srgbClr val="303437"/>
                 </a:solidFill>
@@ -20967,14 +19903,14 @@
       </p:sp>
       <p:sp>
         <p:nvSpPr>
-          <p:cNvPr id="7" name="実例本文2"/>
+          <p:cNvPr id="12" name="実例本文2"/>
           <p:cNvSpPr txBox="1"/>
           <p:nvPr/>
         </p:nvSpPr>
         <p:spPr>
           <a:xfrm>
-            <a:off x="594360" y="3136555"/>
-            <a:ext cx="7955279" cy="462915"/>
+            <a:off x="4724400" y="3060191"/>
+            <a:ext cx="3870960" cy="320420"/>
           </a:xfrm>
           <a:prstGeom prst="rect">
             <a:avLst/>
@@ -20989,24 +19925,24 @@
           <a:p>
             <a:pPr algn="l">
               <a:lnSpc>
-                <a:spcPct val="112000"/>
-              </a:lnSpc>
-              <a:spcBef>
-                <a:spcPts val="0"/>
-              </a:spcBef>
-              <a:spcAft>
-                <a:spcPts val="0"/>
-              </a:spcAft>
-              <a:buNone/>
-              <a:defRPr sz="2100" b="0">
-                <a:solidFill>
-                  <a:srgbClr val="303437"/>
-                </a:solidFill>
-                <a:latin typeface="Noto Sans"/>
-              </a:defRPr>
-            </a:pPr>
-            <a:r>
-              <a:rPr sz="2100" b="0" lang="ja-JP" altLang="en-US">
+                <a:spcPts val="2222"/>
+              </a:lnSpc>
+              <a:spcBef>
+                <a:spcPts val="0"/>
+              </a:spcBef>
+              <a:spcAft>
+                <a:spcPts val="0"/>
+              </a:spcAft>
+              <a:buNone/>
+              <a:defRPr sz="1900" b="0">
+                <a:solidFill>
+                  <a:srgbClr val="303437"/>
+                </a:solidFill>
+                <a:latin typeface="Noto Sans"/>
+              </a:defRPr>
+            </a:pPr>
+            <a:r>
+              <a:rPr sz="1900" b="0" lang="ja-JP" altLang="en-US">
                 <a:solidFill>
                   <a:srgbClr val="303437"/>
                 </a:solidFill>
@@ -21021,14 +19957,14 @@
       </p:sp>
       <p:sp>
         <p:nvSpPr>
-          <p:cNvPr id="8" name="実例本文3"/>
+          <p:cNvPr id="13" name="実例本文3"/>
           <p:cNvSpPr txBox="1"/>
           <p:nvPr/>
         </p:nvSpPr>
         <p:spPr>
           <a:xfrm>
-            <a:off x="594360" y="3651118"/>
-            <a:ext cx="7955279" cy="481330"/>
+            <a:off x="548640" y="3520313"/>
+            <a:ext cx="8046720" cy="320420"/>
           </a:xfrm>
           <a:prstGeom prst="rect">
             <a:avLst/>
@@ -21043,24 +19979,24 @@
           <a:p>
             <a:pPr algn="l">
               <a:lnSpc>
-                <a:spcPct val="112000"/>
-              </a:lnSpc>
-              <a:spcBef>
-                <a:spcPts val="0"/>
-              </a:spcBef>
-              <a:spcAft>
-                <a:spcPts val="0"/>
-              </a:spcAft>
-              <a:buNone/>
-              <a:defRPr sz="2200" b="0">
-                <a:solidFill>
-                  <a:srgbClr val="303437"/>
-                </a:solidFill>
-                <a:latin typeface="Noto Sans"/>
-              </a:defRPr>
-            </a:pPr>
-            <a:r>
-              <a:rPr sz="2200" b="1" lang="ja-JP" altLang="en-US">
+                <a:spcPts val="2222"/>
+              </a:lnSpc>
+              <a:spcBef>
+                <a:spcPts val="0"/>
+              </a:spcBef>
+              <a:spcAft>
+                <a:spcPts val="0"/>
+              </a:spcAft>
+              <a:buNone/>
+              <a:defRPr sz="1900" b="0">
+                <a:solidFill>
+                  <a:srgbClr val="303437"/>
+                </a:solidFill>
+                <a:latin typeface="Noto Sans"/>
+              </a:defRPr>
+            </a:pPr>
+            <a:r>
+              <a:rPr sz="1900" b="1" lang="ja-JP" altLang="en-US">
                 <a:solidFill>
                   <a:srgbClr val="B13731"/>
                 </a:solidFill>
@@ -21075,14 +20011,14 @@
       </p:sp>
       <p:sp>
         <p:nvSpPr>
-          <p:cNvPr id="9" name="実例本文4"/>
+          <p:cNvPr id="14" name="実例本文4"/>
           <p:cNvSpPr txBox="1"/>
           <p:nvPr/>
         </p:nvSpPr>
         <p:spPr>
           <a:xfrm>
-            <a:off x="594360" y="4183675"/>
-            <a:ext cx="7955279" cy="426084"/>
+            <a:off x="548640" y="3904233"/>
+            <a:ext cx="8046720" cy="320420"/>
           </a:xfrm>
           <a:prstGeom prst="rect">
             <a:avLst/>
@@ -21097,7 +20033,7 @@
           <a:p>
             <a:pPr algn="l">
               <a:lnSpc>
-                <a:spcPct val="112000"/>
+                <a:spcPts val="2222"/>
               </a:lnSpc>
               <a:spcBef>
                 <a:spcPts val="0"/>
@@ -21123,97 +20059,6 @@
                 <a:cs typeface="Noto Sans"/>
               </a:rPr>
               <a:t>Bienenstichは「蜂の一刺し」と、同じ名前の菓子の両方を指す。</a:t>
-            </a:r>
-          </a:p>
-        </p:txBody>
-      </p:sp>
-      <p:sp>
-        <p:nvSpPr>
-          <p:cNvPr id="10" name="TextBox 9"/>
-          <p:cNvSpPr txBox="1"/>
-          <p:nvPr/>
-        </p:nvSpPr>
-        <p:spPr>
-          <a:xfrm>
-            <a:off x="502920" y="4690872"/>
-            <a:ext cx="8183879" cy="393192"/>
-          </a:xfrm>
-          <a:prstGeom prst="rect">
-            <a:avLst/>
-          </a:prstGeom>
-          <a:noFill/>
-        </p:spPr>
-        <p:txBody>
-          <a:bodyPr wrap="square" lIns="0" rIns="0" tIns="0" bIns="0">
-            <a:noAutofit/>
-          </a:bodyPr>
-          <a:lstStyle/>
-          <a:p>
-            <a:pPr algn="l">
-              <a:lnSpc>
-                <a:spcPct val="112000"/>
-              </a:lnSpc>
-              <a:spcBef>
-                <a:spcPts val="0"/>
-              </a:spcBef>
-              <a:spcAft>
-                <a:spcPts val="0"/>
-              </a:spcAft>
-              <a:buNone/>
-              <a:defRPr sz="810" b="0">
-                <a:solidFill>
-                  <a:srgbClr val="303437"/>
-                </a:solidFill>
-                <a:latin typeface="Noto Sans"/>
-              </a:defRPr>
-            </a:pPr>
-            <a:r>
-              <a:rPr sz="810" b="0" lang="ja-JP" altLang="en-US">
-                <a:solidFill>
-                  <a:srgbClr val="626669"/>
-                </a:solidFill>
-                <a:latin typeface="Noto Sans"/>
-                <a:ea typeface="Noto Sans CJK JP"/>
-                <a:cs typeface="Noto Sans"/>
-              </a:rPr>
-              <a:t/>
-            </a:r>
-            <a:r>
-              <a:rPr sz="810" b="0" lang="ja-JP" altLang="en-US">
-                <a:solidFill>
-                  <a:srgbClr val="626669"/>
-                </a:solidFill>
-                <a:latin typeface="Noto Sans"/>
-                <a:ea typeface="Noto Sans CJK JP"/>
-                <a:cs typeface="Noto Sans"/>
-              </a:rPr>
-              <a:t>Global PIQA v1 / nonparallel / group0121_ex000066_deu_latn_0_v1。CC BY-SA 4.0。</a:t>
-            </a:r>
-          </a:p>
-          <a:p>
-            <a:pPr>
-              <a:lnSpc>
-                <a:spcPct val="112000"/>
-              </a:lnSpc>
-              <a:buNone/>
-              <a:defRPr sz="810" b="0">
-                <a:solidFill>
-                  <a:srgbClr val="303437"/>
-                </a:solidFill>
-                <a:latin typeface="Noto Sans"/>
-              </a:defRPr>
-            </a:pPr>
-            <a:r>
-              <a:rPr sz="810" b="0" lang="ja-JP" altLang="en-US">
-                <a:solidFill>
-                  <a:srgbClr val="626669"/>
-                </a:solidFill>
-                <a:latin typeface="Noto Sans"/>
-                <a:ea typeface="Noto Sans CJK JP"/>
-                <a:cs typeface="Noto Sans"/>
-                <a:hlinkClick r:id="rId2"/>
-              </a:rPr>
-              <a:t>https://huggingface.co/datasets/mrlbenchmarks/global-piqa-nonparallel</a:t>
             </a:r>
           </a:p>
         </p:txBody>
@@ -21340,8 +20185,8 @@
         </p:nvSpPr>
         <p:spPr>
           <a:xfrm>
-            <a:off x="594360" y="2073151"/>
-            <a:ext cx="7955279" cy="274320"/>
+            <a:off x="548640" y="1422400"/>
+            <a:ext cx="3870960" cy="216408"/>
           </a:xfrm>
           <a:prstGeom prst="rect">
             <a:avLst/>
@@ -21356,7 +20201,7 @@
           <a:p>
             <a:pPr algn="l">
               <a:lnSpc>
-                <a:spcPct val="117000"/>
+                <a:spcPts val="1404"/>
               </a:lnSpc>
               <a:spcBef>
                 <a:spcPts val="0"/>
@@ -21394,8 +20239,8 @@
         </p:nvSpPr>
         <p:spPr>
           <a:xfrm>
-            <a:off x="594360" y="2380818"/>
-            <a:ext cx="7955279" cy="481330"/>
+            <a:off x="548640" y="1727708"/>
+            <a:ext cx="3870960" cy="602741"/>
           </a:xfrm>
           <a:prstGeom prst="rect">
             <a:avLst/>
@@ -21410,24 +20255,24 @@
           <a:p>
             <a:pPr algn="l">
               <a:lnSpc>
-                <a:spcPct val="112000"/>
-              </a:lnSpc>
-              <a:spcBef>
-                <a:spcPts val="0"/>
-              </a:spcBef>
-              <a:spcAft>
-                <a:spcPts val="0"/>
-              </a:spcAft>
-              <a:buNone/>
-              <a:defRPr sz="2200" b="0">
-                <a:solidFill>
-                  <a:srgbClr val="303437"/>
-                </a:solidFill>
-                <a:latin typeface="Noto Sans"/>
-              </a:defRPr>
-            </a:pPr>
-            <a:r>
-              <a:rPr sz="2200" b="0" lang="ja-JP" altLang="en-US">
+                <a:spcPts val="2222"/>
+              </a:lnSpc>
+              <a:spcBef>
+                <a:spcPts val="0"/>
+              </a:spcBef>
+              <a:spcAft>
+                <a:spcPts val="0"/>
+              </a:spcAft>
+              <a:buNone/>
+              <a:defRPr sz="1900" b="0">
+                <a:solidFill>
+                  <a:srgbClr val="303437"/>
+                </a:solidFill>
+                <a:latin typeface="Noto Sans"/>
+              </a:defRPr>
+            </a:pPr>
+            <a:r>
+              <a:rPr sz="1900" b="0" lang="ja-JP" altLang="en-US">
                 <a:solidFill>
                   <a:srgbClr val="303437"/>
                 </a:solidFill>
@@ -21448,8 +20293,8 @@
         </p:nvSpPr>
         <p:spPr>
           <a:xfrm>
-            <a:off x="594360" y="2940258"/>
-            <a:ext cx="7955279" cy="462915"/>
+            <a:off x="548640" y="2393950"/>
+            <a:ext cx="3870960" cy="320420"/>
           </a:xfrm>
           <a:prstGeom prst="rect">
             <a:avLst/>
@@ -21464,24 +20309,24 @@
           <a:p>
             <a:pPr algn="l">
               <a:lnSpc>
-                <a:spcPct val="112000"/>
-              </a:lnSpc>
-              <a:spcBef>
-                <a:spcPts val="0"/>
-              </a:spcBef>
-              <a:spcAft>
-                <a:spcPts val="0"/>
-              </a:spcAft>
-              <a:buNone/>
-              <a:defRPr sz="2100" b="0">
-                <a:solidFill>
-                  <a:srgbClr val="303437"/>
-                </a:solidFill>
-                <a:latin typeface="Noto Sans"/>
-              </a:defRPr>
-            </a:pPr>
-            <a:r>
-              <a:rPr sz="2100" b="0" lang="ja-JP" altLang="en-US">
+                <a:spcPts val="2222"/>
+              </a:lnSpc>
+              <a:spcBef>
+                <a:spcPts val="0"/>
+              </a:spcBef>
+              <a:spcAft>
+                <a:spcPts val="0"/>
+              </a:spcAft>
+              <a:buNone/>
+              <a:defRPr sz="1900" b="0">
+                <a:solidFill>
+                  <a:srgbClr val="303437"/>
+                </a:solidFill>
+                <a:latin typeface="Noto Sans"/>
+              </a:defRPr>
+            </a:pPr>
+            <a:r>
+              <a:rPr sz="1900" b="0" lang="ja-JP" altLang="en-US">
                 <a:solidFill>
                   <a:srgbClr val="303437"/>
                 </a:solidFill>
@@ -21502,8 +20347,8 @@
         </p:nvSpPr>
         <p:spPr>
           <a:xfrm>
-            <a:off x="594360" y="3481539"/>
-            <a:ext cx="7955279" cy="462915"/>
+            <a:off x="548640" y="2777871"/>
+            <a:ext cx="3870960" cy="320420"/>
           </a:xfrm>
           <a:prstGeom prst="rect">
             <a:avLst/>
@@ -21518,24 +20363,24 @@
           <a:p>
             <a:pPr algn="l">
               <a:lnSpc>
-                <a:spcPct val="112000"/>
-              </a:lnSpc>
-              <a:spcBef>
-                <a:spcPts val="0"/>
-              </a:spcBef>
-              <a:spcAft>
-                <a:spcPts val="0"/>
-              </a:spcAft>
-              <a:buNone/>
-              <a:defRPr sz="2100" b="0">
-                <a:solidFill>
-                  <a:srgbClr val="303437"/>
-                </a:solidFill>
-                <a:latin typeface="Noto Sans"/>
-              </a:defRPr>
-            </a:pPr>
-            <a:r>
-              <a:rPr sz="2100" b="0" lang="ja-JP" altLang="en-US">
+                <a:spcPts val="2222"/>
+              </a:lnSpc>
+              <a:spcBef>
+                <a:spcPts val="0"/>
+              </a:spcBef>
+              <a:spcAft>
+                <a:spcPts val="0"/>
+              </a:spcAft>
+              <a:buNone/>
+              <a:defRPr sz="1900" b="0">
+                <a:solidFill>
+                  <a:srgbClr val="303437"/>
+                </a:solidFill>
+                <a:latin typeface="Noto Sans"/>
+              </a:defRPr>
+            </a:pPr>
+            <a:r>
+              <a:rPr sz="1900" b="0" lang="ja-JP" altLang="en-US">
                 <a:solidFill>
                   <a:srgbClr val="303437"/>
                 </a:solidFill>
@@ -21635,6 +20480,330 @@
                 <a:hlinkClick r:id="rId2"/>
               </a:rPr>
               <a:t>https://huggingface.co/datasets/mrlbenchmarks/global-piqa-nonparallel</a:t>
+            </a:r>
+          </a:p>
+        </p:txBody>
+      </p:sp>
+      <p:sp>
+        <p:nvSpPr>
+          <p:cNvPr id="9" name="実例ラベル"/>
+          <p:cNvSpPr txBox="1"/>
+          <p:nvPr/>
+        </p:nvSpPr>
+        <p:spPr>
+          <a:xfrm>
+            <a:off x="4724400" y="1422400"/>
+            <a:ext cx="3870960" cy="216408"/>
+          </a:xfrm>
+          <a:prstGeom prst="rect">
+            <a:avLst/>
+          </a:prstGeom>
+          <a:noFill/>
+        </p:spPr>
+        <p:txBody>
+          <a:bodyPr wrap="square" lIns="0" rIns="0" tIns="0" bIns="0">
+            <a:noAutofit/>
+          </a:bodyPr>
+          <a:lstStyle/>
+          <a:p>
+            <a:pPr algn="l">
+              <a:lnSpc>
+                <a:spcPts val="1404"/>
+              </a:lnSpc>
+              <a:spcBef>
+                <a:spcPts val="0"/>
+              </a:spcBef>
+              <a:spcAft>
+                <a:spcPts val="0"/>
+              </a:spcAft>
+              <a:buNone/>
+              <a:defRPr sz="1200" b="0">
+                <a:solidFill>
+                  <a:srgbClr val="303437"/>
+                </a:solidFill>
+                <a:latin typeface="Noto Sans"/>
+              </a:defRPr>
+            </a:pPr>
+            <a:r>
+              <a:rPr sz="1200" b="0" lang="ja-JP" altLang="en-US">
+                <a:solidFill>
+                  <a:srgbClr val="626669"/>
+                </a:solidFill>
+                <a:latin typeface="Noto Sans"/>
+                <a:ea typeface="Noto Sans CJK JP"/>
+                <a:cs typeface="Noto Sans"/>
+              </a:rPr>
+              <a:t>日本語訳</a:t>
+            </a:r>
+          </a:p>
+        </p:txBody>
+      </p:sp>
+      <p:sp>
+        <p:nvSpPr>
+          <p:cNvPr id="10" name="実例本文0"/>
+          <p:cNvSpPr txBox="1"/>
+          <p:nvPr/>
+        </p:nvSpPr>
+        <p:spPr>
+          <a:xfrm>
+            <a:off x="4724400" y="1727708"/>
+            <a:ext cx="3870960" cy="602741"/>
+          </a:xfrm>
+          <a:prstGeom prst="rect">
+            <a:avLst/>
+          </a:prstGeom>
+          <a:noFill/>
+        </p:spPr>
+        <p:txBody>
+          <a:bodyPr wrap="square" lIns="0" rIns="0" tIns="0" bIns="0">
+            <a:noAutofit/>
+          </a:bodyPr>
+          <a:lstStyle/>
+          <a:p>
+            <a:pPr algn="l">
+              <a:lnSpc>
+                <a:spcPts val="2222"/>
+              </a:lnSpc>
+              <a:spcBef>
+                <a:spcPts val="0"/>
+              </a:spcBef>
+              <a:spcAft>
+                <a:spcPts val="0"/>
+              </a:spcAft>
+              <a:buNone/>
+              <a:defRPr sz="1900" b="0">
+                <a:solidFill>
+                  <a:srgbClr val="303437"/>
+                </a:solidFill>
+                <a:latin typeface="Noto Sans"/>
+              </a:defRPr>
+            </a:pPr>
+            <a:r>
+              <a:rPr sz="1900" b="0" lang="ja-JP" altLang="en-US">
+                <a:solidFill>
+                  <a:srgbClr val="303437"/>
+                </a:solidFill>
+                <a:latin typeface="Noto Sans"/>
+                <a:ea typeface="Noto Sans CJK JP"/>
+                <a:cs typeface="Noto Sans"/>
+              </a:rPr>
+              <a:t>デング熱を媒介する蚊が繁殖しやすい水は。</a:t>
+            </a:r>
+          </a:p>
+        </p:txBody>
+      </p:sp>
+      <p:sp>
+        <p:nvSpPr>
+          <p:cNvPr id="11" name="実例本文1"/>
+          <p:cNvSpPr txBox="1"/>
+          <p:nvPr/>
+        </p:nvSpPr>
+        <p:spPr>
+          <a:xfrm>
+            <a:off x="4724400" y="2393950"/>
+            <a:ext cx="3870960" cy="320420"/>
+          </a:xfrm>
+          <a:prstGeom prst="rect">
+            <a:avLst/>
+          </a:prstGeom>
+          <a:noFill/>
+        </p:spPr>
+        <p:txBody>
+          <a:bodyPr wrap="square" lIns="0" rIns="0" tIns="0" bIns="0">
+            <a:noAutofit/>
+          </a:bodyPr>
+          <a:lstStyle/>
+          <a:p>
+            <a:pPr algn="l">
+              <a:lnSpc>
+                <a:spcPts val="2222"/>
+              </a:lnSpc>
+              <a:spcBef>
+                <a:spcPts val="0"/>
+              </a:spcBef>
+              <a:spcAft>
+                <a:spcPts val="0"/>
+              </a:spcAft>
+              <a:buNone/>
+              <a:defRPr sz="1900" b="0">
+                <a:solidFill>
+                  <a:srgbClr val="303437"/>
+                </a:solidFill>
+                <a:latin typeface="Noto Sans"/>
+              </a:defRPr>
+            </a:pPr>
+            <a:r>
+              <a:rPr sz="1900" b="0" lang="ja-JP" altLang="en-US">
+                <a:solidFill>
+                  <a:srgbClr val="303437"/>
+                </a:solidFill>
+                <a:latin typeface="Noto Sans"/>
+                <a:ea typeface="Noto Sans CJK JP"/>
+                <a:cs typeface="Noto Sans"/>
+              </a:rPr>
+              <a:t>A) たまった水。</a:t>
+            </a:r>
+          </a:p>
+        </p:txBody>
+      </p:sp>
+      <p:sp>
+        <p:nvSpPr>
+          <p:cNvPr id="12" name="実例本文2"/>
+          <p:cNvSpPr txBox="1"/>
+          <p:nvPr/>
+        </p:nvSpPr>
+        <p:spPr>
+          <a:xfrm>
+            <a:off x="4724400" y="2777871"/>
+            <a:ext cx="3870960" cy="320420"/>
+          </a:xfrm>
+          <a:prstGeom prst="rect">
+            <a:avLst/>
+          </a:prstGeom>
+          <a:noFill/>
+        </p:spPr>
+        <p:txBody>
+          <a:bodyPr wrap="square" lIns="0" rIns="0" tIns="0" bIns="0">
+            <a:noAutofit/>
+          </a:bodyPr>
+          <a:lstStyle/>
+          <a:p>
+            <a:pPr algn="l">
+              <a:lnSpc>
+                <a:spcPts val="2222"/>
+              </a:lnSpc>
+              <a:spcBef>
+                <a:spcPts val="0"/>
+              </a:spcBef>
+              <a:spcAft>
+                <a:spcPts val="0"/>
+              </a:spcAft>
+              <a:buNone/>
+              <a:defRPr sz="1900" b="0">
+                <a:solidFill>
+                  <a:srgbClr val="303437"/>
+                </a:solidFill>
+                <a:latin typeface="Noto Sans"/>
+              </a:defRPr>
+            </a:pPr>
+            <a:r>
+              <a:rPr sz="1900" b="0" lang="ja-JP" altLang="en-US">
+                <a:solidFill>
+                  <a:srgbClr val="303437"/>
+                </a:solidFill>
+                <a:latin typeface="Noto Sans"/>
+                <a:ea typeface="Noto Sans CJK JP"/>
+                <a:cs typeface="Noto Sans"/>
+              </a:rPr>
+              <a:t>B) 流れる水。</a:t>
+            </a:r>
+          </a:p>
+        </p:txBody>
+      </p:sp>
+      <p:sp>
+        <p:nvSpPr>
+          <p:cNvPr id="13" name="実例本文3"/>
+          <p:cNvSpPr txBox="1"/>
+          <p:nvPr/>
+        </p:nvSpPr>
+        <p:spPr>
+          <a:xfrm>
+            <a:off x="548640" y="3237991"/>
+            <a:ext cx="8046720" cy="320420"/>
+          </a:xfrm>
+          <a:prstGeom prst="rect">
+            <a:avLst/>
+          </a:prstGeom>
+          <a:noFill/>
+        </p:spPr>
+        <p:txBody>
+          <a:bodyPr wrap="square" lIns="0" rIns="0" tIns="0" bIns="0">
+            <a:noAutofit/>
+          </a:bodyPr>
+          <a:lstStyle/>
+          <a:p>
+            <a:pPr algn="l">
+              <a:lnSpc>
+                <a:spcPts val="2222"/>
+              </a:lnSpc>
+              <a:spcBef>
+                <a:spcPts val="0"/>
+              </a:spcBef>
+              <a:spcAft>
+                <a:spcPts val="0"/>
+              </a:spcAft>
+              <a:buNone/>
+              <a:defRPr sz="1900" b="0">
+                <a:solidFill>
+                  <a:srgbClr val="303437"/>
+                </a:solidFill>
+                <a:latin typeface="Noto Sans"/>
+              </a:defRPr>
+            </a:pPr>
+            <a:r>
+              <a:rPr sz="1900" b="1" lang="ja-JP" altLang="en-US">
+                <a:solidFill>
+                  <a:srgbClr val="B13731"/>
+                </a:solidFill>
+                <a:latin typeface="Noto Sans"/>
+                <a:ea typeface="Noto Sans CJK JP"/>
+                <a:cs typeface="Noto Sans"/>
+              </a:rPr>
+              <a:t>配布正解：A</a:t>
+            </a:r>
+          </a:p>
+        </p:txBody>
+      </p:sp>
+      <p:sp>
+        <p:nvSpPr>
+          <p:cNvPr id="14" name="実例本文4"/>
+          <p:cNvSpPr txBox="1"/>
+          <p:nvPr/>
+        </p:nvSpPr>
+        <p:spPr>
+          <a:xfrm>
+            <a:off x="548640" y="3621911"/>
+            <a:ext cx="8046720" cy="320420"/>
+          </a:xfrm>
+          <a:prstGeom prst="rect">
+            <a:avLst/>
+          </a:prstGeom>
+          <a:noFill/>
+        </p:spPr>
+        <p:txBody>
+          <a:bodyPr wrap="square" lIns="0" rIns="0" tIns="0" bIns="0">
+            <a:noAutofit/>
+          </a:bodyPr>
+          <a:lstStyle/>
+          <a:p>
+            <a:pPr algn="l">
+              <a:lnSpc>
+                <a:spcPts val="2222"/>
+              </a:lnSpc>
+              <a:spcBef>
+                <a:spcPts val="0"/>
+              </a:spcBef>
+              <a:spcAft>
+                <a:spcPts val="0"/>
+              </a:spcAft>
+              <a:buNone/>
+              <a:defRPr sz="1900" b="0">
+                <a:solidFill>
+                  <a:srgbClr val="303437"/>
+                </a:solidFill>
+                <a:latin typeface="Noto Sans"/>
+              </a:defRPr>
+            </a:pPr>
+            <a:r>
+              <a:rPr sz="1900" b="0" lang="ja-JP" altLang="en-US">
+                <a:solidFill>
+                  <a:srgbClr val="303437"/>
+                </a:solidFill>
+                <a:latin typeface="Noto Sans"/>
+                <a:ea typeface="Noto Sans CJK JP"/>
+                <a:cs typeface="Noto Sans"/>
+              </a:rPr>
+              <a:t>地域の生活に関わる衛生知識を、二つの水の状態から選ぶ。</a:t>
             </a:r>
           </a:p>
         </p:txBody>
@@ -21761,535 +20930,6 @@
 </p:sld>
 </file>
 
-<file path=ppt/slides/slide40.xml><?xml version="1.0" encoding="utf-8"?>
-<p:sld xmlns:a="http://schemas.openxmlformats.org/drawingml/2006/main" xmlns:p="http://schemas.openxmlformats.org/presentationml/2006/main" xmlns:r="http://schemas.openxmlformats.org/officeDocument/2006/relationships">
-  <p:cSld>
-    <p:spTree>
-      <p:nvGrpSpPr>
-        <p:cNvPr id="1" name=""/>
-        <p:cNvGrpSpPr/>
-        <p:nvPr/>
-      </p:nvGrpSpPr>
-      <p:grpSpPr/>
-      <p:sp>
-        <p:nvSpPr>
-          <p:cNvPr id="2" name="Title 1"/>
-          <p:cNvSpPr>
-            <a:spLocks noGrp="1"/>
-          </p:cNvSpPr>
-          <p:nvPr>
-            <p:ph type="title"/>
-          </p:nvPr>
-        </p:nvSpPr>
-        <p:spPr>
-          <a:xfrm>
-            <a:off x="548640" y="786384"/>
-            <a:ext cx="8046720" cy="502920"/>
-          </a:xfrm>
-        </p:spPr>
-        <p:txBody>
-          <a:bodyPr wrap="square" lIns="0" rIns="0" tIns="0" bIns="0">
-            <a:noAutofit/>
-          </a:bodyPr>
-          <a:lstStyle/>
-          <a:p>
-            <a:pPr algn="l">
-              <a:lnSpc>
-                <a:spcPct val="110000"/>
-              </a:lnSpc>
-              <a:buNone/>
-              <a:defRPr sz="2800" b="0">
-                <a:solidFill>
-                  <a:srgbClr val="303437"/>
-                </a:solidFill>
-                <a:latin typeface="Noto Sans"/>
-              </a:defRPr>
-            </a:pPr>
-            <a:r>
-              <a:rPr sz="2800" b="1" lang="ja-JP" altLang="en-US">
-                <a:solidFill>
-                  <a:srgbClr val="303437"/>
-                </a:solidFill>
-                <a:latin typeface="Noto Sans"/>
-                <a:ea typeface="Noto Sans CJK JP"/>
-                <a:cs typeface="Noto Sans"/>
-              </a:rPr>
-              <a:t>追加例4：日本語訳と解説</a:t>
-            </a:r>
-          </a:p>
-        </p:txBody>
-      </p:sp>
-      <p:sp>
-        <p:nvSpPr>
-          <p:cNvPr id="3" name="Title 2"/>
-          <p:cNvSpPr>
-            <a:spLocks noGrp="1"/>
-          </p:cNvSpPr>
-          <p:nvPr>
-            <p:ph type="title" idx="2"/>
-          </p:nvPr>
-        </p:nvSpPr>
-        <p:spPr>
-          <a:xfrm>
-            <a:off x="75895" y="0"/>
-            <a:ext cx="8115300" cy="480060"/>
-          </a:xfrm>
-        </p:spPr>
-        <p:txBody>
-          <a:bodyPr wrap="square" lIns="0" rIns="0" tIns="0" bIns="0" anchor="ctr">
-            <a:noAutofit/>
-          </a:bodyPr>
-          <a:lstStyle/>
-          <a:p>
-            <a:pPr algn="l">
-              <a:lnSpc>
-                <a:spcPct val="110000"/>
-              </a:lnSpc>
-              <a:buNone/>
-              <a:defRPr sz="1400" b="0">
-                <a:solidFill>
-                  <a:srgbClr val="303437"/>
-                </a:solidFill>
-                <a:latin typeface="Noto Sans"/>
-              </a:defRPr>
-            </a:pPr>
-            <a:r>
-              <a:rPr sz="1400" b="1" lang="ja-JP" altLang="en-US">
-                <a:solidFill>
-                  <a:srgbClr val="FFFFFF"/>
-                </a:solidFill>
-                <a:latin typeface="Noto Sans"/>
-                <a:ea typeface="Noto Sans CJK JP"/>
-                <a:cs typeface="Noto Sans"/>
-              </a:rPr>
-              <a:t>Appendix: 1. 生活場面の追加例</a:t>
-            </a:r>
-          </a:p>
-        </p:txBody>
-      </p:sp>
-      <p:sp>
-        <p:nvSpPr>
-          <p:cNvPr id="4" name="実例ラベル"/>
-          <p:cNvSpPr txBox="1"/>
-          <p:nvPr/>
-        </p:nvSpPr>
-        <p:spPr>
-          <a:xfrm>
-            <a:off x="594360" y="1481628"/>
-            <a:ext cx="7955279" cy="274320"/>
-          </a:xfrm>
-          <a:prstGeom prst="rect">
-            <a:avLst/>
-          </a:prstGeom>
-          <a:noFill/>
-        </p:spPr>
-        <p:txBody>
-          <a:bodyPr wrap="square" lIns="0" rIns="0" tIns="0" bIns="0">
-            <a:noAutofit/>
-          </a:bodyPr>
-          <a:lstStyle/>
-          <a:p>
-            <a:pPr algn="l">
-              <a:lnSpc>
-                <a:spcPct val="117000"/>
-              </a:lnSpc>
-              <a:spcBef>
-                <a:spcPts val="0"/>
-              </a:spcBef>
-              <a:spcAft>
-                <a:spcPts val="0"/>
-              </a:spcAft>
-              <a:buNone/>
-              <a:defRPr sz="1200" b="0">
-                <a:solidFill>
-                  <a:srgbClr val="303437"/>
-                </a:solidFill>
-                <a:latin typeface="Noto Sans"/>
-              </a:defRPr>
-            </a:pPr>
-            <a:r>
-              <a:rPr sz="1200" b="0" lang="ja-JP" altLang="en-US">
-                <a:solidFill>
-                  <a:srgbClr val="626669"/>
-                </a:solidFill>
-                <a:latin typeface="Noto Sans"/>
-                <a:ea typeface="Noto Sans CJK JP"/>
-                <a:cs typeface="Noto Sans"/>
-              </a:rPr>
-              <a:t>日本語訳</a:t>
-            </a:r>
-          </a:p>
-        </p:txBody>
-      </p:sp>
-      <p:sp>
-        <p:nvSpPr>
-          <p:cNvPr id="5" name="実例本文0"/>
-          <p:cNvSpPr txBox="1"/>
-          <p:nvPr/>
-        </p:nvSpPr>
-        <p:spPr>
-          <a:xfrm>
-            <a:off x="594360" y="1814628"/>
-            <a:ext cx="7955279" cy="481330"/>
-          </a:xfrm>
-          <a:prstGeom prst="rect">
-            <a:avLst/>
-          </a:prstGeom>
-          <a:noFill/>
-        </p:spPr>
-        <p:txBody>
-          <a:bodyPr wrap="square" lIns="0" rIns="0" tIns="0" bIns="0">
-            <a:noAutofit/>
-          </a:bodyPr>
-          <a:lstStyle/>
-          <a:p>
-            <a:pPr algn="l">
-              <a:lnSpc>
-                <a:spcPct val="112000"/>
-              </a:lnSpc>
-              <a:spcBef>
-                <a:spcPts val="0"/>
-              </a:spcBef>
-              <a:spcAft>
-                <a:spcPts val="0"/>
-              </a:spcAft>
-              <a:buNone/>
-              <a:defRPr sz="2200" b="0">
-                <a:solidFill>
-                  <a:srgbClr val="303437"/>
-                </a:solidFill>
-                <a:latin typeface="Noto Sans"/>
-              </a:defRPr>
-            </a:pPr>
-            <a:r>
-              <a:rPr sz="2200" b="0" lang="ja-JP" altLang="en-US">
-                <a:solidFill>
-                  <a:srgbClr val="303437"/>
-                </a:solidFill>
-                <a:latin typeface="Noto Sans"/>
-                <a:ea typeface="Noto Sans CJK JP"/>
-                <a:cs typeface="Noto Sans"/>
-              </a:rPr>
-              <a:t>デング熱を媒介する蚊が繁殖しやすい水は。</a:t>
-            </a:r>
-          </a:p>
-        </p:txBody>
-      </p:sp>
-      <p:sp>
-        <p:nvSpPr>
-          <p:cNvPr id="6" name="実例本文1"/>
-          <p:cNvSpPr txBox="1"/>
-          <p:nvPr/>
-        </p:nvSpPr>
-        <p:spPr>
-          <a:xfrm>
-            <a:off x="594360" y="2396984"/>
-            <a:ext cx="7955279" cy="462915"/>
-          </a:xfrm>
-          <a:prstGeom prst="rect">
-            <a:avLst/>
-          </a:prstGeom>
-          <a:noFill/>
-        </p:spPr>
-        <p:txBody>
-          <a:bodyPr wrap="square" lIns="0" rIns="0" tIns="0" bIns="0">
-            <a:noAutofit/>
-          </a:bodyPr>
-          <a:lstStyle/>
-          <a:p>
-            <a:pPr algn="l">
-              <a:lnSpc>
-                <a:spcPct val="112000"/>
-              </a:lnSpc>
-              <a:spcBef>
-                <a:spcPts val="0"/>
-              </a:spcBef>
-              <a:spcAft>
-                <a:spcPts val="0"/>
-              </a:spcAft>
-              <a:buNone/>
-              <a:defRPr sz="2100" b="0">
-                <a:solidFill>
-                  <a:srgbClr val="303437"/>
-                </a:solidFill>
-                <a:latin typeface="Noto Sans"/>
-              </a:defRPr>
-            </a:pPr>
-            <a:r>
-              <a:rPr sz="2100" b="0" lang="ja-JP" altLang="en-US">
-                <a:solidFill>
-                  <a:srgbClr val="303437"/>
-                </a:solidFill>
-                <a:latin typeface="Noto Sans"/>
-                <a:ea typeface="Noto Sans CJK JP"/>
-                <a:cs typeface="Noto Sans"/>
-              </a:rPr>
-              <a:t>A) たまった水。</a:t>
-            </a:r>
-          </a:p>
-        </p:txBody>
-      </p:sp>
-      <p:sp>
-        <p:nvSpPr>
-          <p:cNvPr id="7" name="実例本文2"/>
-          <p:cNvSpPr txBox="1"/>
-          <p:nvPr/>
-        </p:nvSpPr>
-        <p:spPr>
-          <a:xfrm>
-            <a:off x="594360" y="2962501"/>
-            <a:ext cx="7955279" cy="462915"/>
-          </a:xfrm>
-          <a:prstGeom prst="rect">
-            <a:avLst/>
-          </a:prstGeom>
-          <a:noFill/>
-        </p:spPr>
-        <p:txBody>
-          <a:bodyPr wrap="square" lIns="0" rIns="0" tIns="0" bIns="0">
-            <a:noAutofit/>
-          </a:bodyPr>
-          <a:lstStyle/>
-          <a:p>
-            <a:pPr algn="l">
-              <a:lnSpc>
-                <a:spcPct val="112000"/>
-              </a:lnSpc>
-              <a:spcBef>
-                <a:spcPts val="0"/>
-              </a:spcBef>
-              <a:spcAft>
-                <a:spcPts val="0"/>
-              </a:spcAft>
-              <a:buNone/>
-              <a:defRPr sz="2100" b="0">
-                <a:solidFill>
-                  <a:srgbClr val="303437"/>
-                </a:solidFill>
-                <a:latin typeface="Noto Sans"/>
-              </a:defRPr>
-            </a:pPr>
-            <a:r>
-              <a:rPr sz="2100" b="0" lang="ja-JP" altLang="en-US">
-                <a:solidFill>
-                  <a:srgbClr val="303437"/>
-                </a:solidFill>
-                <a:latin typeface="Noto Sans"/>
-                <a:ea typeface="Noto Sans CJK JP"/>
-                <a:cs typeface="Noto Sans"/>
-              </a:rPr>
-              <a:t>B) 流れる水。</a:t>
-            </a:r>
-          </a:p>
-        </p:txBody>
-      </p:sp>
-      <p:sp>
-        <p:nvSpPr>
-          <p:cNvPr id="8" name="実例本文3"/>
-          <p:cNvSpPr txBox="1"/>
-          <p:nvPr/>
-        </p:nvSpPr>
-        <p:spPr>
-          <a:xfrm>
-            <a:off x="594360" y="3527584"/>
-            <a:ext cx="7955279" cy="481330"/>
-          </a:xfrm>
-          <a:prstGeom prst="rect">
-            <a:avLst/>
-          </a:prstGeom>
-          <a:noFill/>
-        </p:spPr>
-        <p:txBody>
-          <a:bodyPr wrap="square" lIns="0" rIns="0" tIns="0" bIns="0">
-            <a:noAutofit/>
-          </a:bodyPr>
-          <a:lstStyle/>
-          <a:p>
-            <a:pPr algn="l">
-              <a:lnSpc>
-                <a:spcPct val="112000"/>
-              </a:lnSpc>
-              <a:spcBef>
-                <a:spcPts val="0"/>
-              </a:spcBef>
-              <a:spcAft>
-                <a:spcPts val="0"/>
-              </a:spcAft>
-              <a:buNone/>
-              <a:defRPr sz="2200" b="0">
-                <a:solidFill>
-                  <a:srgbClr val="303437"/>
-                </a:solidFill>
-                <a:latin typeface="Noto Sans"/>
-              </a:defRPr>
-            </a:pPr>
-            <a:r>
-              <a:rPr sz="2200" b="1" lang="ja-JP" altLang="en-US">
-                <a:solidFill>
-                  <a:srgbClr val="B13731"/>
-                </a:solidFill>
-                <a:latin typeface="Noto Sans"/>
-                <a:ea typeface="Noto Sans CJK JP"/>
-                <a:cs typeface="Noto Sans"/>
-              </a:rPr>
-              <a:t>配布正解：A</a:t>
-            </a:r>
-          </a:p>
-        </p:txBody>
-      </p:sp>
-      <p:sp>
-        <p:nvSpPr>
-          <p:cNvPr id="9" name="実例本文4"/>
-          <p:cNvSpPr txBox="1"/>
-          <p:nvPr/>
-        </p:nvSpPr>
-        <p:spPr>
-          <a:xfrm>
-            <a:off x="594360" y="4111018"/>
-            <a:ext cx="7955279" cy="426084"/>
-          </a:xfrm>
-          <a:prstGeom prst="rect">
-            <a:avLst/>
-          </a:prstGeom>
-          <a:noFill/>
-        </p:spPr>
-        <p:txBody>
-          <a:bodyPr wrap="square" lIns="0" rIns="0" tIns="0" bIns="0">
-            <a:noAutofit/>
-          </a:bodyPr>
-          <a:lstStyle/>
-          <a:p>
-            <a:pPr algn="l">
-              <a:lnSpc>
-                <a:spcPct val="112000"/>
-              </a:lnSpc>
-              <a:spcBef>
-                <a:spcPts val="0"/>
-              </a:spcBef>
-              <a:spcAft>
-                <a:spcPts val="0"/>
-              </a:spcAft>
-              <a:buNone/>
-              <a:defRPr sz="1900" b="0">
-                <a:solidFill>
-                  <a:srgbClr val="303437"/>
-                </a:solidFill>
-                <a:latin typeface="Noto Sans"/>
-              </a:defRPr>
-            </a:pPr>
-            <a:r>
-              <a:rPr sz="1900" b="0" lang="ja-JP" altLang="en-US">
-                <a:solidFill>
-                  <a:srgbClr val="303437"/>
-                </a:solidFill>
-                <a:latin typeface="Noto Sans"/>
-                <a:ea typeface="Noto Sans CJK JP"/>
-                <a:cs typeface="Noto Sans"/>
-              </a:rPr>
-              <a:t>地域の生活に関わる衛生知識を、二つの水の状態から選ぶ。</a:t>
-            </a:r>
-          </a:p>
-        </p:txBody>
-      </p:sp>
-      <p:sp>
-        <p:nvSpPr>
-          <p:cNvPr id="10" name="TextBox 9"/>
-          <p:cNvSpPr txBox="1"/>
-          <p:nvPr/>
-        </p:nvSpPr>
-        <p:spPr>
-          <a:xfrm>
-            <a:off x="502920" y="4690872"/>
-            <a:ext cx="8183879" cy="393192"/>
-          </a:xfrm>
-          <a:prstGeom prst="rect">
-            <a:avLst/>
-          </a:prstGeom>
-          <a:noFill/>
-        </p:spPr>
-        <p:txBody>
-          <a:bodyPr wrap="square" lIns="0" rIns="0" tIns="0" bIns="0">
-            <a:noAutofit/>
-          </a:bodyPr>
-          <a:lstStyle/>
-          <a:p>
-            <a:pPr algn="l">
-              <a:lnSpc>
-                <a:spcPct val="112000"/>
-              </a:lnSpc>
-              <a:spcBef>
-                <a:spcPts val="0"/>
-              </a:spcBef>
-              <a:spcAft>
-                <a:spcPts val="0"/>
-              </a:spcAft>
-              <a:buNone/>
-              <a:defRPr sz="810" b="0">
-                <a:solidFill>
-                  <a:srgbClr val="303437"/>
-                </a:solidFill>
-                <a:latin typeface="Noto Sans"/>
-              </a:defRPr>
-            </a:pPr>
-            <a:r>
-              <a:rPr sz="810" b="0" lang="ja-JP" altLang="en-US">
-                <a:solidFill>
-                  <a:srgbClr val="626669"/>
-                </a:solidFill>
-                <a:latin typeface="Noto Sans"/>
-                <a:ea typeface="Noto Sans CJK JP"/>
-                <a:cs typeface="Noto Sans"/>
-              </a:rPr>
-              <a:t/>
-            </a:r>
-            <a:r>
-              <a:rPr sz="810" b="0" lang="ja-JP" altLang="en-US">
-                <a:solidFill>
-                  <a:srgbClr val="626669"/>
-                </a:solidFill>
-                <a:latin typeface="Noto Sans"/>
-                <a:ea typeface="Noto Sans CJK JP"/>
-                <a:cs typeface="Noto Sans"/>
-              </a:rPr>
-              <a:t>Global PIQA v1 / nonparallel / group0013_ex000094_por_latn_braz_0_v1。CC BY-SA 4.0。</a:t>
-            </a:r>
-          </a:p>
-          <a:p>
-            <a:pPr>
-              <a:lnSpc>
-                <a:spcPct val="112000"/>
-              </a:lnSpc>
-              <a:buNone/>
-              <a:defRPr sz="810" b="0">
-                <a:solidFill>
-                  <a:srgbClr val="303437"/>
-                </a:solidFill>
-                <a:latin typeface="Noto Sans"/>
-              </a:defRPr>
-            </a:pPr>
-            <a:r>
-              <a:rPr sz="810" b="0" lang="ja-JP" altLang="en-US">
-                <a:solidFill>
-                  <a:srgbClr val="626669"/>
-                </a:solidFill>
-                <a:latin typeface="Noto Sans"/>
-                <a:ea typeface="Noto Sans CJK JP"/>
-                <a:cs typeface="Noto Sans"/>
-                <a:hlinkClick r:id="rId2"/>
-              </a:rPr>
-              <a:t>https://huggingface.co/datasets/mrlbenchmarks/global-piqa-nonparallel</a:t>
-            </a:r>
-          </a:p>
-        </p:txBody>
-      </p:sp>
-    </p:spTree>
-  </p:cSld>
-  <p:clrMapOvr>
-    <a:masterClrMapping/>
-  </p:clrMapOvr>
-</p:sld>
-</file>
-
 <file path=ppt/slides/slide41.xml><?xml version="1.0" encoding="utf-8"?>
 <p:sld xmlns:a="http://schemas.openxmlformats.org/drawingml/2006/main" xmlns:p="http://schemas.openxmlformats.org/presentationml/2006/main" xmlns:r="http://schemas.openxmlformats.org/officeDocument/2006/relationships">
   <p:cSld>
@@ -22404,8 +21044,8 @@
         </p:nvSpPr>
         <p:spPr>
           <a:xfrm>
-            <a:off x="594360" y="2073151"/>
-            <a:ext cx="7955279" cy="274320"/>
+            <a:off x="548640" y="1422400"/>
+            <a:ext cx="3870960" cy="216408"/>
           </a:xfrm>
           <a:prstGeom prst="rect">
             <a:avLst/>
@@ -22420,7 +21060,7 @@
           <a:p>
             <a:pPr algn="l">
               <a:lnSpc>
-                <a:spcPct val="117000"/>
+                <a:spcPts val="1404"/>
               </a:lnSpc>
               <a:spcBef>
                 <a:spcPts val="0"/>
@@ -22458,8 +21098,8 @@
         </p:nvSpPr>
         <p:spPr>
           <a:xfrm>
-            <a:off x="594360" y="2380818"/>
-            <a:ext cx="7955279" cy="481330"/>
+            <a:off x="548640" y="1727708"/>
+            <a:ext cx="3870960" cy="602741"/>
           </a:xfrm>
           <a:prstGeom prst="rect">
             <a:avLst/>
@@ -22474,24 +21114,24 @@
           <a:p>
             <a:pPr algn="l">
               <a:lnSpc>
-                <a:spcPct val="112000"/>
-              </a:lnSpc>
-              <a:spcBef>
-                <a:spcPts val="0"/>
-              </a:spcBef>
-              <a:spcAft>
-                <a:spcPts val="0"/>
-              </a:spcAft>
-              <a:buNone/>
-              <a:defRPr sz="2200" b="0">
-                <a:solidFill>
-                  <a:srgbClr val="303437"/>
-                </a:solidFill>
-                <a:latin typeface="Noto Sans"/>
-              </a:defRPr>
-            </a:pPr>
-            <a:r>
-              <a:rPr sz="2200" b="0" lang="ja-JP" altLang="en-US">
+                <a:spcPts val="2222"/>
+              </a:lnSpc>
+              <a:spcBef>
+                <a:spcPts val="0"/>
+              </a:spcBef>
+              <a:spcAft>
+                <a:spcPts val="0"/>
+              </a:spcAft>
+              <a:buNone/>
+              <a:defRPr sz="1900" b="0">
+                <a:solidFill>
+                  <a:srgbClr val="303437"/>
+                </a:solidFill>
+                <a:latin typeface="Noto Sans"/>
+              </a:defRPr>
+            </a:pPr>
+            <a:r>
+              <a:rPr sz="1900" b="0" lang="ja-JP" altLang="en-US">
                 <a:solidFill>
                   <a:srgbClr val="303437"/>
                 </a:solidFill>
@@ -22512,8 +21152,8 @@
         </p:nvSpPr>
         <p:spPr>
           <a:xfrm>
-            <a:off x="594360" y="2940258"/>
-            <a:ext cx="7955279" cy="462915"/>
+            <a:off x="548640" y="2393950"/>
+            <a:ext cx="3870960" cy="320420"/>
           </a:xfrm>
           <a:prstGeom prst="rect">
             <a:avLst/>
@@ -22528,24 +21168,24 @@
           <a:p>
             <a:pPr algn="l">
               <a:lnSpc>
-                <a:spcPct val="112000"/>
-              </a:lnSpc>
-              <a:spcBef>
-                <a:spcPts val="0"/>
-              </a:spcBef>
-              <a:spcAft>
-                <a:spcPts val="0"/>
-              </a:spcAft>
-              <a:buNone/>
-              <a:defRPr sz="2100" b="0">
-                <a:solidFill>
-                  <a:srgbClr val="303437"/>
-                </a:solidFill>
-                <a:latin typeface="Noto Sans"/>
-              </a:defRPr>
-            </a:pPr>
-            <a:r>
-              <a:rPr sz="2100" b="0" lang="ja-JP" altLang="en-US">
+                <a:spcPts val="2222"/>
+              </a:lnSpc>
+              <a:spcBef>
+                <a:spcPts val="0"/>
+              </a:spcBef>
+              <a:spcAft>
+                <a:spcPts val="0"/>
+              </a:spcAft>
+              <a:buNone/>
+              <a:defRPr sz="1900" b="0">
+                <a:solidFill>
+                  <a:srgbClr val="303437"/>
+                </a:solidFill>
+                <a:latin typeface="Noto Sans"/>
+              </a:defRPr>
+            </a:pPr>
+            <a:r>
+              <a:rPr sz="1900" b="0" lang="ja-JP" altLang="en-US">
                 <a:solidFill>
                   <a:srgbClr val="303437"/>
                 </a:solidFill>
@@ -22566,8 +21206,8 @@
         </p:nvSpPr>
         <p:spPr>
           <a:xfrm>
-            <a:off x="594360" y="3481539"/>
-            <a:ext cx="7955279" cy="462915"/>
+            <a:off x="548640" y="2777871"/>
+            <a:ext cx="3870960" cy="320420"/>
           </a:xfrm>
           <a:prstGeom prst="rect">
             <a:avLst/>
@@ -22582,24 +21222,24 @@
           <a:p>
             <a:pPr algn="l">
               <a:lnSpc>
-                <a:spcPct val="112000"/>
-              </a:lnSpc>
-              <a:spcBef>
-                <a:spcPts val="0"/>
-              </a:spcBef>
-              <a:spcAft>
-                <a:spcPts val="0"/>
-              </a:spcAft>
-              <a:buNone/>
-              <a:defRPr sz="2100" b="0">
-                <a:solidFill>
-                  <a:srgbClr val="303437"/>
-                </a:solidFill>
-                <a:latin typeface="Noto Sans"/>
-              </a:defRPr>
-            </a:pPr>
-            <a:r>
-              <a:rPr sz="2100" b="0" lang="ja-JP" altLang="en-US">
+                <a:spcPts val="2222"/>
+              </a:lnSpc>
+              <a:spcBef>
+                <a:spcPts val="0"/>
+              </a:spcBef>
+              <a:spcAft>
+                <a:spcPts val="0"/>
+              </a:spcAft>
+              <a:buNone/>
+              <a:defRPr sz="1900" b="0">
+                <a:solidFill>
+                  <a:srgbClr val="303437"/>
+                </a:solidFill>
+                <a:latin typeface="Noto Sans"/>
+              </a:defRPr>
+            </a:pPr>
+            <a:r>
+              <a:rPr sz="1900" b="0" lang="ja-JP" altLang="en-US">
                 <a:solidFill>
                   <a:srgbClr val="303437"/>
                 </a:solidFill>
@@ -22703,130 +21343,16 @@
           </a:p>
         </p:txBody>
       </p:sp>
-    </p:spTree>
-  </p:cSld>
-  <p:clrMapOvr>
-    <a:masterClrMapping/>
-  </p:clrMapOvr>
-</p:sld>
-</file>
-
-<file path=ppt/slides/slide42.xml><?xml version="1.0" encoding="utf-8"?>
-<p:sld xmlns:a="http://schemas.openxmlformats.org/drawingml/2006/main" xmlns:p="http://schemas.openxmlformats.org/presentationml/2006/main" xmlns:r="http://schemas.openxmlformats.org/officeDocument/2006/relationships">
-  <p:cSld>
-    <p:spTree>
-      <p:nvGrpSpPr>
-        <p:cNvPr id="1" name=""/>
-        <p:cNvGrpSpPr/>
-        <p:nvPr/>
-      </p:nvGrpSpPr>
-      <p:grpSpPr/>
-      <p:sp>
-        <p:nvSpPr>
-          <p:cNvPr id="2" name="Title 1"/>
-          <p:cNvSpPr>
-            <a:spLocks noGrp="1"/>
-          </p:cNvSpPr>
-          <p:nvPr>
-            <p:ph type="title"/>
-          </p:nvPr>
-        </p:nvSpPr>
-        <p:spPr>
-          <a:xfrm>
-            <a:off x="548640" y="786384"/>
-            <a:ext cx="8046720" cy="502920"/>
-          </a:xfrm>
-        </p:spPr>
-        <p:txBody>
-          <a:bodyPr wrap="square" lIns="0" rIns="0" tIns="0" bIns="0">
-            <a:noAutofit/>
-          </a:bodyPr>
-          <a:lstStyle/>
-          <a:p>
-            <a:pPr algn="l">
-              <a:lnSpc>
-                <a:spcPct val="110000"/>
-              </a:lnSpc>
-              <a:buNone/>
-              <a:defRPr sz="2800" b="0">
-                <a:solidFill>
-                  <a:srgbClr val="303437"/>
-                </a:solidFill>
-                <a:latin typeface="Noto Sans"/>
-              </a:defRPr>
-            </a:pPr>
-            <a:r>
-              <a:rPr sz="2800" b="1" lang="ja-JP" altLang="en-US">
-                <a:solidFill>
-                  <a:srgbClr val="303437"/>
-                </a:solidFill>
-                <a:latin typeface="Noto Sans"/>
-                <a:ea typeface="Noto Sans CJK JP"/>
-                <a:cs typeface="Noto Sans"/>
-              </a:rPr>
-              <a:t>追加例5：日本語訳と解説</a:t>
-            </a:r>
-          </a:p>
-        </p:txBody>
-      </p:sp>
-      <p:sp>
-        <p:nvSpPr>
-          <p:cNvPr id="3" name="Title 2"/>
-          <p:cNvSpPr>
-            <a:spLocks noGrp="1"/>
-          </p:cNvSpPr>
-          <p:nvPr>
-            <p:ph type="title" idx="2"/>
-          </p:nvPr>
-        </p:nvSpPr>
-        <p:spPr>
-          <a:xfrm>
-            <a:off x="75895" y="0"/>
-            <a:ext cx="8115300" cy="480060"/>
-          </a:xfrm>
-        </p:spPr>
-        <p:txBody>
-          <a:bodyPr wrap="square" lIns="0" rIns="0" tIns="0" bIns="0" anchor="ctr">
-            <a:noAutofit/>
-          </a:bodyPr>
-          <a:lstStyle/>
-          <a:p>
-            <a:pPr algn="l">
-              <a:lnSpc>
-                <a:spcPct val="110000"/>
-              </a:lnSpc>
-              <a:buNone/>
-              <a:defRPr sz="1400" b="0">
-                <a:solidFill>
-                  <a:srgbClr val="303437"/>
-                </a:solidFill>
-                <a:latin typeface="Noto Sans"/>
-              </a:defRPr>
-            </a:pPr>
-            <a:r>
-              <a:rPr sz="1400" b="1" lang="ja-JP" altLang="en-US">
-                <a:solidFill>
-                  <a:srgbClr val="FFFFFF"/>
-                </a:solidFill>
-                <a:latin typeface="Noto Sans"/>
-                <a:ea typeface="Noto Sans CJK JP"/>
-                <a:cs typeface="Noto Sans"/>
-              </a:rPr>
-              <a:t>Appendix: 1. 生活場面の追加例</a:t>
-            </a:r>
-          </a:p>
-        </p:txBody>
-      </p:sp>
-      <p:sp>
-        <p:nvSpPr>
-          <p:cNvPr id="4" name="実例ラベル"/>
+      <p:sp>
+        <p:nvSpPr>
+          <p:cNvPr id="9" name="実例ラベル"/>
           <p:cNvSpPr txBox="1"/>
           <p:nvPr/>
         </p:nvSpPr>
         <p:spPr>
           <a:xfrm>
-            <a:off x="594360" y="1408279"/>
-            <a:ext cx="7955279" cy="274320"/>
+            <a:off x="4724400" y="1422400"/>
+            <a:ext cx="3870960" cy="216408"/>
           </a:xfrm>
           <a:prstGeom prst="rect">
             <a:avLst/>
@@ -22841,7 +21367,7 @@
           <a:p>
             <a:pPr algn="l">
               <a:lnSpc>
-                <a:spcPct val="117000"/>
+                <a:spcPts val="1404"/>
               </a:lnSpc>
               <a:spcBef>
                 <a:spcPts val="0"/>
@@ -22873,14 +21399,14 @@
       </p:sp>
       <p:sp>
         <p:nvSpPr>
-          <p:cNvPr id="5" name="実例本文0"/>
+          <p:cNvPr id="10" name="実例本文0"/>
           <p:cNvSpPr txBox="1"/>
           <p:nvPr/>
         </p:nvSpPr>
         <p:spPr>
           <a:xfrm>
-            <a:off x="594360" y="1716324"/>
-            <a:ext cx="7955279" cy="886460"/>
+            <a:off x="4724400" y="1727708"/>
+            <a:ext cx="3870960" cy="602741"/>
           </a:xfrm>
           <a:prstGeom prst="rect">
             <a:avLst/>
@@ -22895,24 +21421,24 @@
           <a:p>
             <a:pPr algn="l">
               <a:lnSpc>
-                <a:spcPct val="112000"/>
-              </a:lnSpc>
-              <a:spcBef>
-                <a:spcPts val="0"/>
-              </a:spcBef>
-              <a:spcAft>
-                <a:spcPts val="0"/>
-              </a:spcAft>
-              <a:buNone/>
-              <a:defRPr sz="2200" b="0">
-                <a:solidFill>
-                  <a:srgbClr val="303437"/>
-                </a:solidFill>
-                <a:latin typeface="Noto Sans"/>
-              </a:defRPr>
-            </a:pPr>
-            <a:r>
-              <a:rPr sz="2200" b="0" lang="ja-JP" altLang="en-US">
+                <a:spcPts val="2222"/>
+              </a:lnSpc>
+              <a:spcBef>
+                <a:spcPts val="0"/>
+              </a:spcBef>
+              <a:spcAft>
+                <a:spcPts val="0"/>
+              </a:spcAft>
+              <a:buNone/>
+              <a:defRPr sz="1900" b="0">
+                <a:solidFill>
+                  <a:srgbClr val="303437"/>
+                </a:solidFill>
+                <a:latin typeface="Noto Sans"/>
+              </a:defRPr>
+            </a:pPr>
+            <a:r>
+              <a:rPr sz="1900" b="0" lang="ja-JP" altLang="en-US">
                 <a:solidFill>
                   <a:srgbClr val="303437"/>
                 </a:solidFill>
@@ -22927,14 +21453,14 @@
       </p:sp>
       <p:sp>
         <p:nvSpPr>
-          <p:cNvPr id="6" name="実例本文1"/>
+          <p:cNvPr id="11" name="実例本文1"/>
           <p:cNvSpPr txBox="1"/>
           <p:nvPr/>
         </p:nvSpPr>
         <p:spPr>
           <a:xfrm>
-            <a:off x="594360" y="2622656"/>
-            <a:ext cx="7955279" cy="462915"/>
+            <a:off x="4724400" y="2393950"/>
+            <a:ext cx="3870960" cy="320420"/>
           </a:xfrm>
           <a:prstGeom prst="rect">
             <a:avLst/>
@@ -22949,24 +21475,24 @@
           <a:p>
             <a:pPr algn="l">
               <a:lnSpc>
-                <a:spcPct val="112000"/>
-              </a:lnSpc>
-              <a:spcBef>
-                <a:spcPts val="0"/>
-              </a:spcBef>
-              <a:spcAft>
-                <a:spcPts val="0"/>
-              </a:spcAft>
-              <a:buNone/>
-              <a:defRPr sz="2100" b="0">
-                <a:solidFill>
-                  <a:srgbClr val="303437"/>
-                </a:solidFill>
-                <a:latin typeface="Noto Sans"/>
-              </a:defRPr>
-            </a:pPr>
-            <a:r>
-              <a:rPr sz="2100" b="0" lang="ja-JP" altLang="en-US">
+                <a:spcPts val="2222"/>
+              </a:lnSpc>
+              <a:spcBef>
+                <a:spcPts val="0"/>
+              </a:spcBef>
+              <a:spcAft>
+                <a:spcPts val="0"/>
+              </a:spcAft>
+              <a:buNone/>
+              <a:defRPr sz="1900" b="0">
+                <a:solidFill>
+                  <a:srgbClr val="303437"/>
+                </a:solidFill>
+                <a:latin typeface="Noto Sans"/>
+              </a:defRPr>
+            </a:pPr>
+            <a:r>
+              <a:rPr sz="1900" b="0" lang="ja-JP" altLang="en-US">
                 <a:solidFill>
                   <a:srgbClr val="303437"/>
                 </a:solidFill>
@@ -22981,14 +21507,14 @@
       </p:sp>
       <p:sp>
         <p:nvSpPr>
-          <p:cNvPr id="7" name="実例本文2"/>
+          <p:cNvPr id="12" name="実例本文2"/>
           <p:cNvSpPr txBox="1"/>
           <p:nvPr/>
         </p:nvSpPr>
         <p:spPr>
           <a:xfrm>
-            <a:off x="594360" y="3137296"/>
-            <a:ext cx="7955279" cy="462915"/>
+            <a:off x="4724400" y="2777871"/>
+            <a:ext cx="3870960" cy="320420"/>
           </a:xfrm>
           <a:prstGeom prst="rect">
             <a:avLst/>
@@ -23003,24 +21529,24 @@
           <a:p>
             <a:pPr algn="l">
               <a:lnSpc>
-                <a:spcPct val="112000"/>
-              </a:lnSpc>
-              <a:spcBef>
-                <a:spcPts val="0"/>
-              </a:spcBef>
-              <a:spcAft>
-                <a:spcPts val="0"/>
-              </a:spcAft>
-              <a:buNone/>
-              <a:defRPr sz="2100" b="0">
-                <a:solidFill>
-                  <a:srgbClr val="303437"/>
-                </a:solidFill>
-                <a:latin typeface="Noto Sans"/>
-              </a:defRPr>
-            </a:pPr>
-            <a:r>
-              <a:rPr sz="2100" b="0" lang="ja-JP" altLang="en-US">
+                <a:spcPts val="2222"/>
+              </a:lnSpc>
+              <a:spcBef>
+                <a:spcPts val="0"/>
+              </a:spcBef>
+              <a:spcAft>
+                <a:spcPts val="0"/>
+              </a:spcAft>
+              <a:buNone/>
+              <a:defRPr sz="1900" b="0">
+                <a:solidFill>
+                  <a:srgbClr val="303437"/>
+                </a:solidFill>
+                <a:latin typeface="Noto Sans"/>
+              </a:defRPr>
+            </a:pPr>
+            <a:r>
+              <a:rPr sz="1900" b="0" lang="ja-JP" altLang="en-US">
                 <a:solidFill>
                   <a:srgbClr val="303437"/>
                 </a:solidFill>
@@ -23035,14 +21561,14 @@
       </p:sp>
       <p:sp>
         <p:nvSpPr>
-          <p:cNvPr id="8" name="実例本文3"/>
+          <p:cNvPr id="13" name="実例本文3"/>
           <p:cNvSpPr txBox="1"/>
           <p:nvPr/>
         </p:nvSpPr>
         <p:spPr>
           <a:xfrm>
-            <a:off x="594360" y="3651849"/>
-            <a:ext cx="7955279" cy="481330"/>
+            <a:off x="548640" y="3237991"/>
+            <a:ext cx="8046720" cy="320420"/>
           </a:xfrm>
           <a:prstGeom prst="rect">
             <a:avLst/>
@@ -23057,24 +21583,24 @@
           <a:p>
             <a:pPr algn="l">
               <a:lnSpc>
-                <a:spcPct val="112000"/>
-              </a:lnSpc>
-              <a:spcBef>
-                <a:spcPts val="0"/>
-              </a:spcBef>
-              <a:spcAft>
-                <a:spcPts val="0"/>
-              </a:spcAft>
-              <a:buNone/>
-              <a:defRPr sz="2200" b="0">
-                <a:solidFill>
-                  <a:srgbClr val="303437"/>
-                </a:solidFill>
-                <a:latin typeface="Noto Sans"/>
-              </a:defRPr>
-            </a:pPr>
-            <a:r>
-              <a:rPr sz="2200" b="1" lang="ja-JP" altLang="en-US">
+                <a:spcPts val="2222"/>
+              </a:lnSpc>
+              <a:spcBef>
+                <a:spcPts val="0"/>
+              </a:spcBef>
+              <a:spcAft>
+                <a:spcPts val="0"/>
+              </a:spcAft>
+              <a:buNone/>
+              <a:defRPr sz="1900" b="0">
+                <a:solidFill>
+                  <a:srgbClr val="303437"/>
+                </a:solidFill>
+                <a:latin typeface="Noto Sans"/>
+              </a:defRPr>
+            </a:pPr>
+            <a:r>
+              <a:rPr sz="1900" b="1" lang="ja-JP" altLang="en-US">
                 <a:solidFill>
                   <a:srgbClr val="B13731"/>
                 </a:solidFill>
@@ -23089,14 +21615,14 @@
       </p:sp>
       <p:sp>
         <p:nvSpPr>
-          <p:cNvPr id="9" name="実例本文4"/>
+          <p:cNvPr id="14" name="実例本文4"/>
           <p:cNvSpPr txBox="1"/>
           <p:nvPr/>
         </p:nvSpPr>
         <p:spPr>
           <a:xfrm>
-            <a:off x="594360" y="4184404"/>
-            <a:ext cx="7955279" cy="426084"/>
+            <a:off x="548640" y="3621911"/>
+            <a:ext cx="8046720" cy="320420"/>
           </a:xfrm>
           <a:prstGeom prst="rect">
             <a:avLst/>
@@ -23111,7 +21637,7 @@
           <a:p>
             <a:pPr algn="l">
               <a:lnSpc>
-                <a:spcPct val="112000"/>
+                <a:spcPts val="2222"/>
               </a:lnSpc>
               <a:spcBef>
                 <a:spcPts val="0"/>
@@ -23137,97 +21663,6 @@
                 <a:cs typeface="Noto Sans"/>
               </a:rPr>
               <a:t>サンバルは辛味調味料。すり鉢に合う道具を選ぶ。</a:t>
-            </a:r>
-          </a:p>
-        </p:txBody>
-      </p:sp>
-      <p:sp>
-        <p:nvSpPr>
-          <p:cNvPr id="10" name="TextBox 9"/>
-          <p:cNvSpPr txBox="1"/>
-          <p:nvPr/>
-        </p:nvSpPr>
-        <p:spPr>
-          <a:xfrm>
-            <a:off x="502920" y="4690872"/>
-            <a:ext cx="8183879" cy="393192"/>
-          </a:xfrm>
-          <a:prstGeom prst="rect">
-            <a:avLst/>
-          </a:prstGeom>
-          <a:noFill/>
-        </p:spPr>
-        <p:txBody>
-          <a:bodyPr wrap="square" lIns="0" rIns="0" tIns="0" bIns="0">
-            <a:noAutofit/>
-          </a:bodyPr>
-          <a:lstStyle/>
-          <a:p>
-            <a:pPr algn="l">
-              <a:lnSpc>
-                <a:spcPct val="112000"/>
-              </a:lnSpc>
-              <a:spcBef>
-                <a:spcPts val="0"/>
-              </a:spcBef>
-              <a:spcAft>
-                <a:spcPts val="0"/>
-              </a:spcAft>
-              <a:buNone/>
-              <a:defRPr sz="810" b="0">
-                <a:solidFill>
-                  <a:srgbClr val="303437"/>
-                </a:solidFill>
-                <a:latin typeface="Noto Sans"/>
-              </a:defRPr>
-            </a:pPr>
-            <a:r>
-              <a:rPr sz="810" b="0" lang="ja-JP" altLang="en-US">
-                <a:solidFill>
-                  <a:srgbClr val="626669"/>
-                </a:solidFill>
-                <a:latin typeface="Noto Sans"/>
-                <a:ea typeface="Noto Sans CJK JP"/>
-                <a:cs typeface="Noto Sans"/>
-              </a:rPr>
-              <a:t/>
-            </a:r>
-            <a:r>
-              <a:rPr sz="810" b="0" lang="ja-JP" altLang="en-US">
-                <a:solidFill>
-                  <a:srgbClr val="626669"/>
-                </a:solidFill>
-                <a:latin typeface="Noto Sans"/>
-                <a:ea typeface="Noto Sans CJK JP"/>
-                <a:cs typeface="Noto Sans"/>
-              </a:rPr>
-              <a:t>Global PIQA v1 / nonparallel / group0010_ex000244_ind_latn_0_v1。CC BY-SA 4.0。</a:t>
-            </a:r>
-          </a:p>
-          <a:p>
-            <a:pPr>
-              <a:lnSpc>
-                <a:spcPct val="112000"/>
-              </a:lnSpc>
-              <a:buNone/>
-              <a:defRPr sz="810" b="0">
-                <a:solidFill>
-                  <a:srgbClr val="303437"/>
-                </a:solidFill>
-                <a:latin typeface="Noto Sans"/>
-              </a:defRPr>
-            </a:pPr>
-            <a:r>
-              <a:rPr sz="810" b="0" lang="ja-JP" altLang="en-US">
-                <a:solidFill>
-                  <a:srgbClr val="626669"/>
-                </a:solidFill>
-                <a:latin typeface="Noto Sans"/>
-                <a:ea typeface="Noto Sans CJK JP"/>
-                <a:cs typeface="Noto Sans"/>
-                <a:hlinkClick r:id="rId2"/>
-              </a:rPr>
-              <a:t>https://huggingface.co/datasets/mrlbenchmarks/global-piqa-nonparallel</a:t>
             </a:r>
           </a:p>
         </p:txBody>
@@ -23354,8 +21789,8 @@
         </p:nvSpPr>
         <p:spPr>
           <a:xfrm>
-            <a:off x="594360" y="2073151"/>
-            <a:ext cx="7955279" cy="274320"/>
+            <a:off x="548640" y="1422400"/>
+            <a:ext cx="3870960" cy="216408"/>
           </a:xfrm>
           <a:prstGeom prst="rect">
             <a:avLst/>
@@ -23370,7 +21805,7 @@
           <a:p>
             <a:pPr algn="l">
               <a:lnSpc>
-                <a:spcPct val="117000"/>
+                <a:spcPts val="1404"/>
               </a:lnSpc>
               <a:spcBef>
                 <a:spcPts val="0"/>
@@ -23408,8 +21843,8 @@
         </p:nvSpPr>
         <p:spPr>
           <a:xfrm>
-            <a:off x="594360" y="2380818"/>
-            <a:ext cx="7955279" cy="481330"/>
+            <a:off x="548640" y="1727708"/>
+            <a:ext cx="3870960" cy="320420"/>
           </a:xfrm>
           <a:prstGeom prst="rect">
             <a:avLst/>
@@ -23424,24 +21859,24 @@
           <a:p>
             <a:pPr algn="l">
               <a:lnSpc>
-                <a:spcPct val="112000"/>
-              </a:lnSpc>
-              <a:spcBef>
-                <a:spcPts val="0"/>
-              </a:spcBef>
-              <a:spcAft>
-                <a:spcPts val="0"/>
-              </a:spcAft>
-              <a:buNone/>
-              <a:defRPr sz="2200" b="0">
-                <a:solidFill>
-                  <a:srgbClr val="303437"/>
-                </a:solidFill>
-                <a:latin typeface="Noto Sans"/>
-              </a:defRPr>
-            </a:pPr>
-            <a:r>
-              <a:rPr sz="2200" b="0" lang="ja-JP" altLang="en-US">
+                <a:spcPts val="2222"/>
+              </a:lnSpc>
+              <a:spcBef>
+                <a:spcPts val="0"/>
+              </a:spcBef>
+              <a:spcAft>
+                <a:spcPts val="0"/>
+              </a:spcAft>
+              <a:buNone/>
+              <a:defRPr sz="1900" b="0">
+                <a:solidFill>
+                  <a:srgbClr val="303437"/>
+                </a:solidFill>
+                <a:latin typeface="Noto Sans"/>
+              </a:defRPr>
+            </a:pPr>
+            <a:r>
+              <a:rPr sz="1900" b="0" lang="ja-JP" altLang="en-US">
                 <a:solidFill>
                   <a:srgbClr val="303437"/>
                 </a:solidFill>
@@ -23462,8 +21897,8 @@
         </p:nvSpPr>
         <p:spPr>
           <a:xfrm>
-            <a:off x="594360" y="2940258"/>
-            <a:ext cx="7955279" cy="462915"/>
+            <a:off x="548640" y="2111629"/>
+            <a:ext cx="3870960" cy="320420"/>
           </a:xfrm>
           <a:prstGeom prst="rect">
             <a:avLst/>
@@ -23478,24 +21913,24 @@
           <a:p>
             <a:pPr algn="l">
               <a:lnSpc>
-                <a:spcPct val="112000"/>
-              </a:lnSpc>
-              <a:spcBef>
-                <a:spcPts val="0"/>
-              </a:spcBef>
-              <a:spcAft>
-                <a:spcPts val="0"/>
-              </a:spcAft>
-              <a:buNone/>
-              <a:defRPr sz="2100" b="0">
-                <a:solidFill>
-                  <a:srgbClr val="303437"/>
-                </a:solidFill>
-                <a:latin typeface="Noto Sans"/>
-              </a:defRPr>
-            </a:pPr>
-            <a:r>
-              <a:rPr sz="2100" b="0" lang="ja-JP" altLang="en-US">
+                <a:spcPts val="2222"/>
+              </a:lnSpc>
+              <a:spcBef>
+                <a:spcPts val="0"/>
+              </a:spcBef>
+              <a:spcAft>
+                <a:spcPts val="0"/>
+              </a:spcAft>
+              <a:buNone/>
+              <a:defRPr sz="1900" b="0">
+                <a:solidFill>
+                  <a:srgbClr val="303437"/>
+                </a:solidFill>
+                <a:latin typeface="Noto Sans"/>
+              </a:defRPr>
+            </a:pPr>
+            <a:r>
+              <a:rPr sz="1900" b="0" lang="ja-JP" altLang="en-US">
                 <a:solidFill>
                   <a:srgbClr val="303437"/>
                 </a:solidFill>
@@ -23516,8 +21951,8 @@
         </p:nvSpPr>
         <p:spPr>
           <a:xfrm>
-            <a:off x="594360" y="3481539"/>
-            <a:ext cx="7955279" cy="462915"/>
+            <a:off x="548640" y="2495549"/>
+            <a:ext cx="3870960" cy="320420"/>
           </a:xfrm>
           <a:prstGeom prst="rect">
             <a:avLst/>
@@ -23532,24 +21967,24 @@
           <a:p>
             <a:pPr algn="l">
               <a:lnSpc>
-                <a:spcPct val="112000"/>
-              </a:lnSpc>
-              <a:spcBef>
-                <a:spcPts val="0"/>
-              </a:spcBef>
-              <a:spcAft>
-                <a:spcPts val="0"/>
-              </a:spcAft>
-              <a:buNone/>
-              <a:defRPr sz="2100" b="0">
-                <a:solidFill>
-                  <a:srgbClr val="303437"/>
-                </a:solidFill>
-                <a:latin typeface="Noto Sans"/>
-              </a:defRPr>
-            </a:pPr>
-            <a:r>
-              <a:rPr sz="2100" b="0" lang="ja-JP" altLang="en-US">
+                <a:spcPts val="2222"/>
+              </a:lnSpc>
+              <a:spcBef>
+                <a:spcPts val="0"/>
+              </a:spcBef>
+              <a:spcAft>
+                <a:spcPts val="0"/>
+              </a:spcAft>
+              <a:buNone/>
+              <a:defRPr sz="1900" b="0">
+                <a:solidFill>
+                  <a:srgbClr val="303437"/>
+                </a:solidFill>
+                <a:latin typeface="Noto Sans"/>
+              </a:defRPr>
+            </a:pPr>
+            <a:r>
+              <a:rPr sz="1900" b="0" lang="ja-JP" altLang="en-US">
                 <a:solidFill>
                   <a:srgbClr val="303437"/>
                 </a:solidFill>
@@ -23653,130 +22088,16 @@
           </a:p>
         </p:txBody>
       </p:sp>
-    </p:spTree>
-  </p:cSld>
-  <p:clrMapOvr>
-    <a:masterClrMapping/>
-  </p:clrMapOvr>
-</p:sld>
-</file>
-
-<file path=ppt/slides/slide44.xml><?xml version="1.0" encoding="utf-8"?>
-<p:sld xmlns:a="http://schemas.openxmlformats.org/drawingml/2006/main" xmlns:p="http://schemas.openxmlformats.org/presentationml/2006/main" xmlns:r="http://schemas.openxmlformats.org/officeDocument/2006/relationships">
-  <p:cSld>
-    <p:spTree>
-      <p:nvGrpSpPr>
-        <p:cNvPr id="1" name=""/>
-        <p:cNvGrpSpPr/>
-        <p:nvPr/>
-      </p:nvGrpSpPr>
-      <p:grpSpPr/>
-      <p:sp>
-        <p:nvSpPr>
-          <p:cNvPr id="2" name="Title 1"/>
-          <p:cNvSpPr>
-            <a:spLocks noGrp="1"/>
-          </p:cNvSpPr>
-          <p:nvPr>
-            <p:ph type="title"/>
-          </p:nvPr>
-        </p:nvSpPr>
-        <p:spPr>
-          <a:xfrm>
-            <a:off x="548640" y="786384"/>
-            <a:ext cx="8046720" cy="502920"/>
-          </a:xfrm>
-        </p:spPr>
-        <p:txBody>
-          <a:bodyPr wrap="square" lIns="0" rIns="0" tIns="0" bIns="0">
-            <a:noAutofit/>
-          </a:bodyPr>
-          <a:lstStyle/>
-          <a:p>
-            <a:pPr algn="l">
-              <a:lnSpc>
-                <a:spcPct val="110000"/>
-              </a:lnSpc>
-              <a:buNone/>
-              <a:defRPr sz="2800" b="0">
-                <a:solidFill>
-                  <a:srgbClr val="303437"/>
-                </a:solidFill>
-                <a:latin typeface="Noto Sans"/>
-              </a:defRPr>
-            </a:pPr>
-            <a:r>
-              <a:rPr sz="2800" b="1" lang="ja-JP" altLang="en-US">
-                <a:solidFill>
-                  <a:srgbClr val="303437"/>
-                </a:solidFill>
-                <a:latin typeface="Noto Sans"/>
-                <a:ea typeface="Noto Sans CJK JP"/>
-                <a:cs typeface="Noto Sans"/>
-              </a:rPr>
-              <a:t>追加例6：日本語訳と解説</a:t>
-            </a:r>
-          </a:p>
-        </p:txBody>
-      </p:sp>
-      <p:sp>
-        <p:nvSpPr>
-          <p:cNvPr id="3" name="Title 2"/>
-          <p:cNvSpPr>
-            <a:spLocks noGrp="1"/>
-          </p:cNvSpPr>
-          <p:nvPr>
-            <p:ph type="title" idx="2"/>
-          </p:nvPr>
-        </p:nvSpPr>
-        <p:spPr>
-          <a:xfrm>
-            <a:off x="75895" y="0"/>
-            <a:ext cx="8115300" cy="480060"/>
-          </a:xfrm>
-        </p:spPr>
-        <p:txBody>
-          <a:bodyPr wrap="square" lIns="0" rIns="0" tIns="0" bIns="0" anchor="ctr">
-            <a:noAutofit/>
-          </a:bodyPr>
-          <a:lstStyle/>
-          <a:p>
-            <a:pPr algn="l">
-              <a:lnSpc>
-                <a:spcPct val="110000"/>
-              </a:lnSpc>
-              <a:buNone/>
-              <a:defRPr sz="1400" b="0">
-                <a:solidFill>
-                  <a:srgbClr val="303437"/>
-                </a:solidFill>
-                <a:latin typeface="Noto Sans"/>
-              </a:defRPr>
-            </a:pPr>
-            <a:r>
-              <a:rPr sz="1400" b="1" lang="ja-JP" altLang="en-US">
-                <a:solidFill>
-                  <a:srgbClr val="FFFFFF"/>
-                </a:solidFill>
-                <a:latin typeface="Noto Sans"/>
-                <a:ea typeface="Noto Sans CJK JP"/>
-                <a:cs typeface="Noto Sans"/>
-              </a:rPr>
-              <a:t>Appendix: 1. 生活場面の追加例</a:t>
-            </a:r>
-          </a:p>
-        </p:txBody>
-      </p:sp>
-      <p:sp>
-        <p:nvSpPr>
-          <p:cNvPr id="4" name="実例ラベル"/>
+      <p:sp>
+        <p:nvSpPr>
+          <p:cNvPr id="9" name="実例ラベル"/>
           <p:cNvSpPr txBox="1"/>
           <p:nvPr/>
         </p:nvSpPr>
         <p:spPr>
           <a:xfrm>
-            <a:off x="594360" y="1481628"/>
-            <a:ext cx="7955279" cy="274320"/>
+            <a:off x="4724400" y="1422400"/>
+            <a:ext cx="3870960" cy="216408"/>
           </a:xfrm>
           <a:prstGeom prst="rect">
             <a:avLst/>
@@ -23791,7 +22112,7 @@
           <a:p>
             <a:pPr algn="l">
               <a:lnSpc>
-                <a:spcPct val="117000"/>
+                <a:spcPts val="1404"/>
               </a:lnSpc>
               <a:spcBef>
                 <a:spcPts val="0"/>
@@ -23823,14 +22144,14 @@
       </p:sp>
       <p:sp>
         <p:nvSpPr>
-          <p:cNvPr id="5" name="実例本文0"/>
+          <p:cNvPr id="10" name="実例本文0"/>
           <p:cNvSpPr txBox="1"/>
           <p:nvPr/>
         </p:nvSpPr>
         <p:spPr>
           <a:xfrm>
-            <a:off x="594360" y="1814628"/>
-            <a:ext cx="7955279" cy="481330"/>
+            <a:off x="4724400" y="1727708"/>
+            <a:ext cx="3870960" cy="320420"/>
           </a:xfrm>
           <a:prstGeom prst="rect">
             <a:avLst/>
@@ -23845,24 +22166,24 @@
           <a:p>
             <a:pPr algn="l">
               <a:lnSpc>
-                <a:spcPct val="112000"/>
-              </a:lnSpc>
-              <a:spcBef>
-                <a:spcPts val="0"/>
-              </a:spcBef>
-              <a:spcAft>
-                <a:spcPts val="0"/>
-              </a:spcAft>
-              <a:buNone/>
-              <a:defRPr sz="2200" b="0">
-                <a:solidFill>
-                  <a:srgbClr val="303437"/>
-                </a:solidFill>
-                <a:latin typeface="Noto Sans"/>
-              </a:defRPr>
-            </a:pPr>
-            <a:r>
-              <a:rPr sz="2200" b="0" lang="ja-JP" altLang="en-US">
+                <a:spcPts val="2222"/>
+              </a:lnSpc>
+              <a:spcBef>
+                <a:spcPts val="0"/>
+              </a:spcBef>
+              <a:spcAft>
+                <a:spcPts val="0"/>
+              </a:spcAft>
+              <a:buNone/>
+              <a:defRPr sz="1900" b="0">
+                <a:solidFill>
+                  <a:srgbClr val="303437"/>
+                </a:solidFill>
+                <a:latin typeface="Noto Sans"/>
+              </a:defRPr>
+            </a:pPr>
+            <a:r>
+              <a:rPr sz="1900" b="0" lang="ja-JP" altLang="en-US">
                 <a:solidFill>
                   <a:srgbClr val="303437"/>
                 </a:solidFill>
@@ -23877,14 +22198,14 @@
       </p:sp>
       <p:sp>
         <p:nvSpPr>
-          <p:cNvPr id="6" name="実例本文1"/>
+          <p:cNvPr id="11" name="実例本文1"/>
           <p:cNvSpPr txBox="1"/>
           <p:nvPr/>
         </p:nvSpPr>
         <p:spPr>
           <a:xfrm>
-            <a:off x="594360" y="2396984"/>
-            <a:ext cx="7955279" cy="462915"/>
+            <a:off x="4724400" y="2111629"/>
+            <a:ext cx="3870960" cy="320420"/>
           </a:xfrm>
           <a:prstGeom prst="rect">
             <a:avLst/>
@@ -23899,24 +22220,24 @@
           <a:p>
             <a:pPr algn="l">
               <a:lnSpc>
-                <a:spcPct val="112000"/>
-              </a:lnSpc>
-              <a:spcBef>
-                <a:spcPts val="0"/>
-              </a:spcBef>
-              <a:spcAft>
-                <a:spcPts val="0"/>
-              </a:spcAft>
-              <a:buNone/>
-              <a:defRPr sz="2100" b="0">
-                <a:solidFill>
-                  <a:srgbClr val="303437"/>
-                </a:solidFill>
-                <a:latin typeface="Noto Sans"/>
-              </a:defRPr>
-            </a:pPr>
-            <a:r>
-              <a:rPr sz="2100" b="0" lang="ja-JP" altLang="en-US">
+                <a:spcPts val="2222"/>
+              </a:lnSpc>
+              <a:spcBef>
+                <a:spcPts val="0"/>
+              </a:spcBef>
+              <a:spcAft>
+                <a:spcPts val="0"/>
+              </a:spcAft>
+              <a:buNone/>
+              <a:defRPr sz="1900" b="0">
+                <a:solidFill>
+                  <a:srgbClr val="303437"/>
+                </a:solidFill>
+                <a:latin typeface="Noto Sans"/>
+              </a:defRPr>
+            </a:pPr>
+            <a:r>
+              <a:rPr sz="1900" b="0" lang="ja-JP" altLang="en-US">
                 <a:solidFill>
                   <a:srgbClr val="303437"/>
                 </a:solidFill>
@@ -23931,14 +22252,14 @@
       </p:sp>
       <p:sp>
         <p:nvSpPr>
-          <p:cNvPr id="7" name="実例本文2"/>
+          <p:cNvPr id="12" name="実例本文2"/>
           <p:cNvSpPr txBox="1"/>
           <p:nvPr/>
         </p:nvSpPr>
         <p:spPr>
           <a:xfrm>
-            <a:off x="594360" y="2962501"/>
-            <a:ext cx="7955279" cy="462915"/>
+            <a:off x="4724400" y="2495549"/>
+            <a:ext cx="3870960" cy="320420"/>
           </a:xfrm>
           <a:prstGeom prst="rect">
             <a:avLst/>
@@ -23953,24 +22274,24 @@
           <a:p>
             <a:pPr algn="l">
               <a:lnSpc>
-                <a:spcPct val="112000"/>
-              </a:lnSpc>
-              <a:spcBef>
-                <a:spcPts val="0"/>
-              </a:spcBef>
-              <a:spcAft>
-                <a:spcPts val="0"/>
-              </a:spcAft>
-              <a:buNone/>
-              <a:defRPr sz="2100" b="0">
-                <a:solidFill>
-                  <a:srgbClr val="303437"/>
-                </a:solidFill>
-                <a:latin typeface="Noto Sans"/>
-              </a:defRPr>
-            </a:pPr>
-            <a:r>
-              <a:rPr sz="2100" b="0" lang="ja-JP" altLang="en-US">
+                <a:spcPts val="2222"/>
+              </a:lnSpc>
+              <a:spcBef>
+                <a:spcPts val="0"/>
+              </a:spcBef>
+              <a:spcAft>
+                <a:spcPts val="0"/>
+              </a:spcAft>
+              <a:buNone/>
+              <a:defRPr sz="1900" b="0">
+                <a:solidFill>
+                  <a:srgbClr val="303437"/>
+                </a:solidFill>
+                <a:latin typeface="Noto Sans"/>
+              </a:defRPr>
+            </a:pPr>
+            <a:r>
+              <a:rPr sz="1900" b="0" lang="ja-JP" altLang="en-US">
                 <a:solidFill>
                   <a:srgbClr val="303437"/>
                 </a:solidFill>
@@ -23985,14 +22306,14 @@
       </p:sp>
       <p:sp>
         <p:nvSpPr>
-          <p:cNvPr id="8" name="実例本文3"/>
+          <p:cNvPr id="13" name="実例本文3"/>
           <p:cNvSpPr txBox="1"/>
           <p:nvPr/>
         </p:nvSpPr>
         <p:spPr>
           <a:xfrm>
-            <a:off x="594360" y="3527584"/>
-            <a:ext cx="7955279" cy="481330"/>
+            <a:off x="548640" y="2955670"/>
+            <a:ext cx="8046720" cy="320420"/>
           </a:xfrm>
           <a:prstGeom prst="rect">
             <a:avLst/>
@@ -24007,24 +22328,24 @@
           <a:p>
             <a:pPr algn="l">
               <a:lnSpc>
-                <a:spcPct val="112000"/>
-              </a:lnSpc>
-              <a:spcBef>
-                <a:spcPts val="0"/>
-              </a:spcBef>
-              <a:spcAft>
-                <a:spcPts val="0"/>
-              </a:spcAft>
-              <a:buNone/>
-              <a:defRPr sz="2200" b="0">
-                <a:solidFill>
-                  <a:srgbClr val="303437"/>
-                </a:solidFill>
-                <a:latin typeface="Noto Sans"/>
-              </a:defRPr>
-            </a:pPr>
-            <a:r>
-              <a:rPr sz="2200" b="1" lang="ja-JP" altLang="en-US">
+                <a:spcPts val="2222"/>
+              </a:lnSpc>
+              <a:spcBef>
+                <a:spcPts val="0"/>
+              </a:spcBef>
+              <a:spcAft>
+                <a:spcPts val="0"/>
+              </a:spcAft>
+              <a:buNone/>
+              <a:defRPr sz="1900" b="0">
+                <a:solidFill>
+                  <a:srgbClr val="303437"/>
+                </a:solidFill>
+                <a:latin typeface="Noto Sans"/>
+              </a:defRPr>
+            </a:pPr>
+            <a:r>
+              <a:rPr sz="1900" b="1" lang="ja-JP" altLang="en-US">
                 <a:solidFill>
                   <a:srgbClr val="B13731"/>
                 </a:solidFill>
@@ -24039,14 +22360,14 @@
       </p:sp>
       <p:sp>
         <p:nvSpPr>
-          <p:cNvPr id="9" name="実例本文4"/>
+          <p:cNvPr id="14" name="実例本文4"/>
           <p:cNvSpPr txBox="1"/>
           <p:nvPr/>
         </p:nvSpPr>
         <p:spPr>
           <a:xfrm>
-            <a:off x="594360" y="4111018"/>
-            <a:ext cx="7955279" cy="426084"/>
+            <a:off x="548640" y="3339590"/>
+            <a:ext cx="8046720" cy="320420"/>
           </a:xfrm>
           <a:prstGeom prst="rect">
             <a:avLst/>
@@ -24061,7 +22382,7 @@
           <a:p>
             <a:pPr algn="l">
               <a:lnSpc>
-                <a:spcPct val="112000"/>
+                <a:spcPts val="2222"/>
               </a:lnSpc>
               <a:spcBef>
                 <a:spcPts val="0"/>
@@ -24087,97 +22408,6 @@
                 <a:cs typeface="Noto Sans"/>
               </a:rPr>
               <a:t>農具の名前から、その道具で行う作業を選ぶ問題。</a:t>
-            </a:r>
-          </a:p>
-        </p:txBody>
-      </p:sp>
-      <p:sp>
-        <p:nvSpPr>
-          <p:cNvPr id="10" name="TextBox 9"/>
-          <p:cNvSpPr txBox="1"/>
-          <p:nvPr/>
-        </p:nvSpPr>
-        <p:spPr>
-          <a:xfrm>
-            <a:off x="502920" y="4690872"/>
-            <a:ext cx="8183879" cy="393192"/>
-          </a:xfrm>
-          <a:prstGeom prst="rect">
-            <a:avLst/>
-          </a:prstGeom>
-          <a:noFill/>
-        </p:spPr>
-        <p:txBody>
-          <a:bodyPr wrap="square" lIns="0" rIns="0" tIns="0" bIns="0">
-            <a:noAutofit/>
-          </a:bodyPr>
-          <a:lstStyle/>
-          <a:p>
-            <a:pPr algn="l">
-              <a:lnSpc>
-                <a:spcPct val="112000"/>
-              </a:lnSpc>
-              <a:spcBef>
-                <a:spcPts val="0"/>
-              </a:spcBef>
-              <a:spcAft>
-                <a:spcPts val="0"/>
-              </a:spcAft>
-              <a:buNone/>
-              <a:defRPr sz="810" b="0">
-                <a:solidFill>
-                  <a:srgbClr val="303437"/>
-                </a:solidFill>
-                <a:latin typeface="Noto Sans"/>
-              </a:defRPr>
-            </a:pPr>
-            <a:r>
-              <a:rPr sz="810" b="0" lang="ja-JP" altLang="en-US">
-                <a:solidFill>
-                  <a:srgbClr val="626669"/>
-                </a:solidFill>
-                <a:latin typeface="Noto Sans"/>
-                <a:ea typeface="Noto Sans CJK JP"/>
-                <a:cs typeface="Noto Sans"/>
-              </a:rPr>
-              <a:t/>
-            </a:r>
-            <a:r>
-              <a:rPr sz="810" b="0" lang="ja-JP" altLang="en-US">
-                <a:solidFill>
-                  <a:srgbClr val="626669"/>
-                </a:solidFill>
-                <a:latin typeface="Noto Sans"/>
-                <a:ea typeface="Noto Sans CJK JP"/>
-                <a:cs typeface="Noto Sans"/>
-              </a:rPr>
-              <a:t>Global PIQA v1 / nonparallel / group0062_ex000182_swh_latn_0_v1。CC BY-SA 4.0。</a:t>
-            </a:r>
-          </a:p>
-          <a:p>
-            <a:pPr>
-              <a:lnSpc>
-                <a:spcPct val="112000"/>
-              </a:lnSpc>
-              <a:buNone/>
-              <a:defRPr sz="810" b="0">
-                <a:solidFill>
-                  <a:srgbClr val="303437"/>
-                </a:solidFill>
-                <a:latin typeface="Noto Sans"/>
-              </a:defRPr>
-            </a:pPr>
-            <a:r>
-              <a:rPr sz="810" b="0" lang="ja-JP" altLang="en-US">
-                <a:solidFill>
-                  <a:srgbClr val="626669"/>
-                </a:solidFill>
-                <a:latin typeface="Noto Sans"/>
-                <a:ea typeface="Noto Sans CJK JP"/>
-                <a:cs typeface="Noto Sans"/>
-                <a:hlinkClick r:id="rId2"/>
-              </a:rPr>
-              <a:t>https://huggingface.co/datasets/mrlbenchmarks/global-piqa-nonparallel</a:t>
             </a:r>
           </a:p>
         </p:txBody>
@@ -24304,8 +22534,8 @@
         </p:nvSpPr>
         <p:spPr>
           <a:xfrm>
-            <a:off x="594360" y="1768170"/>
-            <a:ext cx="7955279" cy="274320"/>
+            <a:off x="548640" y="1422400"/>
+            <a:ext cx="3870960" cy="216408"/>
           </a:xfrm>
           <a:prstGeom prst="rect">
             <a:avLst/>
@@ -24320,7 +22550,7 @@
           <a:p>
             <a:pPr algn="l">
               <a:lnSpc>
-                <a:spcPct val="117000"/>
+                <a:spcPts val="1404"/>
               </a:lnSpc>
               <a:spcBef>
                 <a:spcPts val="0"/>
@@ -24358,8 +22588,8 @@
         </p:nvSpPr>
         <p:spPr>
           <a:xfrm>
-            <a:off x="594360" y="2161272"/>
-            <a:ext cx="7955279" cy="481330"/>
+            <a:off x="548640" y="1727708"/>
+            <a:ext cx="3870960" cy="320420"/>
           </a:xfrm>
           <a:prstGeom prst="rect">
             <a:avLst/>
@@ -24374,24 +22604,24 @@
           <a:p>
             <a:pPr algn="r" rtl="1">
               <a:lnSpc>
-                <a:spcPct val="112000"/>
-              </a:lnSpc>
-              <a:spcBef>
-                <a:spcPts val="0"/>
-              </a:spcBef>
-              <a:spcAft>
-                <a:spcPts val="0"/>
-              </a:spcAft>
-              <a:buNone/>
-              <a:defRPr sz="2200" b="0">
-                <a:solidFill>
-                  <a:srgbClr val="303437"/>
-                </a:solidFill>
-                <a:latin typeface="Noto Sans"/>
-              </a:defRPr>
-            </a:pPr>
-            <a:r>
-              <a:rPr sz="2200" b="0" lang="ar-SA" altLang="en-US">
+                <a:spcPts val="2222"/>
+              </a:lnSpc>
+              <a:spcBef>
+                <a:spcPts val="0"/>
+              </a:spcBef>
+              <a:spcAft>
+                <a:spcPts val="0"/>
+              </a:spcAft>
+              <a:buNone/>
+              <a:defRPr sz="1900" b="0">
+                <a:solidFill>
+                  <a:srgbClr val="303437"/>
+                </a:solidFill>
+                <a:latin typeface="Noto Sans"/>
+              </a:defRPr>
+            </a:pPr>
+            <a:r>
+              <a:rPr sz="1900" b="0" lang="ar-SA" altLang="en-US">
                 <a:solidFill>
                   <a:srgbClr val="303437"/>
                 </a:solidFill>
@@ -24412,8 +22642,8 @@
         </p:nvSpPr>
         <p:spPr>
           <a:xfrm>
-            <a:off x="8183879" y="2926358"/>
-            <a:ext cx="365760" cy="411480"/>
+            <a:off x="548640" y="2111629"/>
+            <a:ext cx="3870960" cy="320420"/>
           </a:xfrm>
           <a:prstGeom prst="rect">
             <a:avLst/>
@@ -24428,24 +22658,24 @@
           <a:p>
             <a:pPr algn="l">
               <a:lnSpc>
-                <a:spcPct val="117000"/>
-              </a:lnSpc>
-              <a:spcBef>
-                <a:spcPts val="0"/>
-              </a:spcBef>
-              <a:spcAft>
-                <a:spcPts val="0"/>
-              </a:spcAft>
-              <a:buNone/>
-              <a:defRPr sz="2100" b="0">
-                <a:solidFill>
-                  <a:srgbClr val="303437"/>
-                </a:solidFill>
-                <a:latin typeface="Noto Sans"/>
-              </a:defRPr>
-            </a:pPr>
-            <a:r>
-              <a:rPr sz="2100" b="0" lang="ja-JP" altLang="en-US">
+                <a:spcPts val="2222"/>
+              </a:lnSpc>
+              <a:spcBef>
+                <a:spcPts val="0"/>
+              </a:spcBef>
+              <a:spcAft>
+                <a:spcPts val="0"/>
+              </a:spcAft>
+              <a:buNone/>
+              <a:defRPr sz="1900" b="0">
+                <a:solidFill>
+                  <a:srgbClr val="303437"/>
+                </a:solidFill>
+                <a:latin typeface="Noto Sans"/>
+              </a:defRPr>
+            </a:pPr>
+            <a:r>
+              <a:rPr sz="1900" b="0" lang="ja-JP" altLang="en-US">
                 <a:solidFill>
                   <a:srgbClr val="303437"/>
                 </a:solidFill>
@@ -24466,8 +22696,8 @@
         </p:nvSpPr>
         <p:spPr>
           <a:xfrm>
-            <a:off x="594360" y="2926358"/>
-            <a:ext cx="7452360" cy="462915"/>
+            <a:off x="993140" y="2111629"/>
+            <a:ext cx="3426460" cy="320420"/>
           </a:xfrm>
           <a:prstGeom prst="rect">
             <a:avLst/>
@@ -24482,24 +22712,24 @@
           <a:p>
             <a:pPr algn="r" rtl="1">
               <a:lnSpc>
-                <a:spcPct val="112000"/>
-              </a:lnSpc>
-              <a:spcBef>
-                <a:spcPts val="0"/>
-              </a:spcBef>
-              <a:spcAft>
-                <a:spcPts val="0"/>
-              </a:spcAft>
-              <a:buNone/>
-              <a:defRPr sz="2100" b="0">
-                <a:solidFill>
-                  <a:srgbClr val="303437"/>
-                </a:solidFill>
-                <a:latin typeface="Noto Sans"/>
-              </a:defRPr>
-            </a:pPr>
-            <a:r>
-              <a:rPr sz="2100" b="0" lang="ar-SA" altLang="en-US">
+                <a:spcPts val="2222"/>
+              </a:lnSpc>
+              <a:spcBef>
+                <a:spcPts val="0"/>
+              </a:spcBef>
+              <a:spcAft>
+                <a:spcPts val="0"/>
+              </a:spcAft>
+              <a:buNone/>
+              <a:defRPr sz="1900" b="0">
+                <a:solidFill>
+                  <a:srgbClr val="303437"/>
+                </a:solidFill>
+                <a:latin typeface="Noto Sans"/>
+              </a:defRPr>
+            </a:pPr>
+            <a:r>
+              <a:rPr sz="1900" b="0" lang="ar-SA" altLang="en-US">
                 <a:solidFill>
                   <a:srgbClr val="303437"/>
                 </a:solidFill>
@@ -24520,8 +22750,8 @@
         </p:nvSpPr>
         <p:spPr>
           <a:xfrm>
-            <a:off x="8183879" y="3667539"/>
-            <a:ext cx="365760" cy="411480"/>
+            <a:off x="548640" y="2495549"/>
+            <a:ext cx="3870960" cy="320420"/>
           </a:xfrm>
           <a:prstGeom prst="rect">
             <a:avLst/>
@@ -24536,24 +22766,24 @@
           <a:p>
             <a:pPr algn="l">
               <a:lnSpc>
-                <a:spcPct val="117000"/>
-              </a:lnSpc>
-              <a:spcBef>
-                <a:spcPts val="0"/>
-              </a:spcBef>
-              <a:spcAft>
-                <a:spcPts val="0"/>
-              </a:spcAft>
-              <a:buNone/>
-              <a:defRPr sz="2100" b="0">
-                <a:solidFill>
-                  <a:srgbClr val="303437"/>
-                </a:solidFill>
-                <a:latin typeface="Noto Sans"/>
-              </a:defRPr>
-            </a:pPr>
-            <a:r>
-              <a:rPr sz="2100" b="0" lang="ja-JP" altLang="en-US">
+                <a:spcPts val="2222"/>
+              </a:lnSpc>
+              <a:spcBef>
+                <a:spcPts val="0"/>
+              </a:spcBef>
+              <a:spcAft>
+                <a:spcPts val="0"/>
+              </a:spcAft>
+              <a:buNone/>
+              <a:defRPr sz="1900" b="0">
+                <a:solidFill>
+                  <a:srgbClr val="303437"/>
+                </a:solidFill>
+                <a:latin typeface="Noto Sans"/>
+              </a:defRPr>
+            </a:pPr>
+            <a:r>
+              <a:rPr sz="1900" b="0" lang="ja-JP" altLang="en-US">
                 <a:solidFill>
                   <a:srgbClr val="303437"/>
                 </a:solidFill>
@@ -24574,8 +22804,8 @@
         </p:nvSpPr>
         <p:spPr>
           <a:xfrm>
-            <a:off x="594360" y="3667539"/>
-            <a:ext cx="7452360" cy="462915"/>
+            <a:off x="993140" y="2495549"/>
+            <a:ext cx="3426460" cy="320420"/>
           </a:xfrm>
           <a:prstGeom prst="rect">
             <a:avLst/>
@@ -24590,24 +22820,24 @@
           <a:p>
             <a:pPr algn="r" rtl="1">
               <a:lnSpc>
-                <a:spcPct val="112000"/>
-              </a:lnSpc>
-              <a:spcBef>
-                <a:spcPts val="0"/>
-              </a:spcBef>
-              <a:spcAft>
-                <a:spcPts val="0"/>
-              </a:spcAft>
-              <a:buNone/>
-              <a:defRPr sz="2100" b="0">
-                <a:solidFill>
-                  <a:srgbClr val="303437"/>
-                </a:solidFill>
-                <a:latin typeface="Noto Sans"/>
-              </a:defRPr>
-            </a:pPr>
-            <a:r>
-              <a:rPr sz="2100" b="0" lang="ar-SA" altLang="en-US">
+                <a:spcPts val="2222"/>
+              </a:lnSpc>
+              <a:spcBef>
+                <a:spcPts val="0"/>
+              </a:spcBef>
+              <a:spcAft>
+                <a:spcPts val="0"/>
+              </a:spcAft>
+              <a:buNone/>
+              <a:defRPr sz="1900" b="0">
+                <a:solidFill>
+                  <a:srgbClr val="303437"/>
+                </a:solidFill>
+                <a:latin typeface="Noto Sans"/>
+              </a:defRPr>
+            </a:pPr>
+            <a:r>
+              <a:rPr sz="1900" b="0" lang="ar-SA" altLang="en-US">
                 <a:solidFill>
                   <a:srgbClr val="303437"/>
                 </a:solidFill>
@@ -24711,130 +22941,16 @@
           </a:p>
         </p:txBody>
       </p:sp>
-    </p:spTree>
-  </p:cSld>
-  <p:clrMapOvr>
-    <a:masterClrMapping/>
-  </p:clrMapOvr>
-</p:sld>
-</file>
-
-<file path=ppt/slides/slide46.xml><?xml version="1.0" encoding="utf-8"?>
-<p:sld xmlns:a="http://schemas.openxmlformats.org/drawingml/2006/main" xmlns:p="http://schemas.openxmlformats.org/presentationml/2006/main" xmlns:r="http://schemas.openxmlformats.org/officeDocument/2006/relationships">
-  <p:cSld>
-    <p:spTree>
-      <p:nvGrpSpPr>
-        <p:cNvPr id="1" name=""/>
-        <p:cNvGrpSpPr/>
-        <p:nvPr/>
-      </p:nvGrpSpPr>
-      <p:grpSpPr/>
-      <p:sp>
-        <p:nvSpPr>
-          <p:cNvPr id="2" name="Title 1"/>
-          <p:cNvSpPr>
-            <a:spLocks noGrp="1"/>
-          </p:cNvSpPr>
-          <p:nvPr>
-            <p:ph type="title"/>
-          </p:nvPr>
-        </p:nvSpPr>
-        <p:spPr>
-          <a:xfrm>
-            <a:off x="548640" y="786384"/>
-            <a:ext cx="8046720" cy="502920"/>
-          </a:xfrm>
-        </p:spPr>
-        <p:txBody>
-          <a:bodyPr wrap="square" lIns="0" rIns="0" tIns="0" bIns="0">
-            <a:noAutofit/>
-          </a:bodyPr>
-          <a:lstStyle/>
-          <a:p>
-            <a:pPr algn="l">
-              <a:lnSpc>
-                <a:spcPct val="110000"/>
-              </a:lnSpc>
-              <a:buNone/>
-              <a:defRPr sz="2800" b="0">
-                <a:solidFill>
-                  <a:srgbClr val="303437"/>
-                </a:solidFill>
-                <a:latin typeface="Noto Sans"/>
-              </a:defRPr>
-            </a:pPr>
-            <a:r>
-              <a:rPr sz="2800" b="1" lang="ja-JP" altLang="en-US">
-                <a:solidFill>
-                  <a:srgbClr val="303437"/>
-                </a:solidFill>
-                <a:latin typeface="Noto Sans"/>
-                <a:ea typeface="Noto Sans CJK JP"/>
-                <a:cs typeface="Noto Sans"/>
-              </a:rPr>
-              <a:t>追加例7：日本語訳と解説</a:t>
-            </a:r>
-          </a:p>
-        </p:txBody>
-      </p:sp>
-      <p:sp>
-        <p:nvSpPr>
-          <p:cNvPr id="3" name="Title 2"/>
-          <p:cNvSpPr>
-            <a:spLocks noGrp="1"/>
-          </p:cNvSpPr>
-          <p:nvPr>
-            <p:ph type="title" idx="2"/>
-          </p:nvPr>
-        </p:nvSpPr>
-        <p:spPr>
-          <a:xfrm>
-            <a:off x="75895" y="0"/>
-            <a:ext cx="8115300" cy="480060"/>
-          </a:xfrm>
-        </p:spPr>
-        <p:txBody>
-          <a:bodyPr wrap="square" lIns="0" rIns="0" tIns="0" bIns="0" anchor="ctr">
-            <a:noAutofit/>
-          </a:bodyPr>
-          <a:lstStyle/>
-          <a:p>
-            <a:pPr algn="l">
-              <a:lnSpc>
-                <a:spcPct val="110000"/>
-              </a:lnSpc>
-              <a:buNone/>
-              <a:defRPr sz="1400" b="0">
-                <a:solidFill>
-                  <a:srgbClr val="303437"/>
-                </a:solidFill>
-                <a:latin typeface="Noto Sans"/>
-              </a:defRPr>
-            </a:pPr>
-            <a:r>
-              <a:rPr sz="1400" b="1" lang="ja-JP" altLang="en-US">
-                <a:solidFill>
-                  <a:srgbClr val="FFFFFF"/>
-                </a:solidFill>
-                <a:latin typeface="Noto Sans"/>
-                <a:ea typeface="Noto Sans CJK JP"/>
-                <a:cs typeface="Noto Sans"/>
-              </a:rPr>
-              <a:t>Appendix: 1. 生活場面の追加例</a:t>
-            </a:r>
-          </a:p>
-        </p:txBody>
-      </p:sp>
-      <p:sp>
-        <p:nvSpPr>
-          <p:cNvPr id="4" name="実例ラベル"/>
+      <p:sp>
+        <p:nvSpPr>
+          <p:cNvPr id="11" name="実例ラベル"/>
           <p:cNvSpPr txBox="1"/>
           <p:nvPr/>
         </p:nvSpPr>
         <p:spPr>
           <a:xfrm>
-            <a:off x="594360" y="1481628"/>
-            <a:ext cx="7955279" cy="274320"/>
+            <a:off x="4724400" y="1422400"/>
+            <a:ext cx="3870960" cy="216408"/>
           </a:xfrm>
           <a:prstGeom prst="rect">
             <a:avLst/>
@@ -24849,7 +22965,7 @@
           <a:p>
             <a:pPr algn="l">
               <a:lnSpc>
-                <a:spcPct val="117000"/>
+                <a:spcPts val="1404"/>
               </a:lnSpc>
               <a:spcBef>
                 <a:spcPts val="0"/>
@@ -24881,14 +22997,14 @@
       </p:sp>
       <p:sp>
         <p:nvSpPr>
-          <p:cNvPr id="5" name="実例本文0"/>
+          <p:cNvPr id="12" name="実例本文0"/>
           <p:cNvSpPr txBox="1"/>
           <p:nvPr/>
         </p:nvSpPr>
         <p:spPr>
           <a:xfrm>
-            <a:off x="594360" y="1814628"/>
-            <a:ext cx="7955279" cy="481330"/>
+            <a:off x="4724400" y="1727708"/>
+            <a:ext cx="3870960" cy="320420"/>
           </a:xfrm>
           <a:prstGeom prst="rect">
             <a:avLst/>
@@ -24903,24 +23019,24 @@
           <a:p>
             <a:pPr algn="l">
               <a:lnSpc>
-                <a:spcPct val="112000"/>
-              </a:lnSpc>
-              <a:spcBef>
-                <a:spcPts val="0"/>
-              </a:spcBef>
-              <a:spcAft>
-                <a:spcPts val="0"/>
-              </a:spcAft>
-              <a:buNone/>
-              <a:defRPr sz="2200" b="0">
-                <a:solidFill>
-                  <a:srgbClr val="303437"/>
-                </a:solidFill>
-                <a:latin typeface="Noto Sans"/>
-              </a:defRPr>
-            </a:pPr>
-            <a:r>
-              <a:rPr sz="2200" b="0" lang="ja-JP" altLang="en-US">
+                <a:spcPts val="2222"/>
+              </a:lnSpc>
+              <a:spcBef>
+                <a:spcPts val="0"/>
+              </a:spcBef>
+              <a:spcAft>
+                <a:spcPts val="0"/>
+              </a:spcAft>
+              <a:buNone/>
+              <a:defRPr sz="1900" b="0">
+                <a:solidFill>
+                  <a:srgbClr val="303437"/>
+                </a:solidFill>
+                <a:latin typeface="Noto Sans"/>
+              </a:defRPr>
+            </a:pPr>
+            <a:r>
+              <a:rPr sz="1900" b="0" lang="ja-JP" altLang="en-US">
                 <a:solidFill>
                   <a:srgbClr val="303437"/>
                 </a:solidFill>
@@ -24935,14 +23051,14 @@
       </p:sp>
       <p:sp>
         <p:nvSpPr>
-          <p:cNvPr id="6" name="実例本文1"/>
+          <p:cNvPr id="13" name="実例本文1"/>
           <p:cNvSpPr txBox="1"/>
           <p:nvPr/>
         </p:nvSpPr>
         <p:spPr>
           <a:xfrm>
-            <a:off x="594360" y="2396984"/>
-            <a:ext cx="7955279" cy="462915"/>
+            <a:off x="4724400" y="2111629"/>
+            <a:ext cx="3870960" cy="320420"/>
           </a:xfrm>
           <a:prstGeom prst="rect">
             <a:avLst/>
@@ -24957,24 +23073,24 @@
           <a:p>
             <a:pPr algn="l">
               <a:lnSpc>
-                <a:spcPct val="112000"/>
-              </a:lnSpc>
-              <a:spcBef>
-                <a:spcPts val="0"/>
-              </a:spcBef>
-              <a:spcAft>
-                <a:spcPts val="0"/>
-              </a:spcAft>
-              <a:buNone/>
-              <a:defRPr sz="2100" b="0">
-                <a:solidFill>
-                  <a:srgbClr val="303437"/>
-                </a:solidFill>
-                <a:latin typeface="Noto Sans"/>
-              </a:defRPr>
-            </a:pPr>
-            <a:r>
-              <a:rPr sz="2100" b="0" lang="ja-JP" altLang="en-US">
+                <a:spcPts val="2222"/>
+              </a:lnSpc>
+              <a:spcBef>
+                <a:spcPts val="0"/>
+              </a:spcBef>
+              <a:spcAft>
+                <a:spcPts val="0"/>
+              </a:spcAft>
+              <a:buNone/>
+              <a:defRPr sz="1900" b="0">
+                <a:solidFill>
+                  <a:srgbClr val="303437"/>
+                </a:solidFill>
+                <a:latin typeface="Noto Sans"/>
+              </a:defRPr>
+            </a:pPr>
+            <a:r>
+              <a:rPr sz="1900" b="0" lang="ja-JP" altLang="en-US">
                 <a:solidFill>
                   <a:srgbClr val="303437"/>
                 </a:solidFill>
@@ -24989,14 +23105,14 @@
       </p:sp>
       <p:sp>
         <p:nvSpPr>
-          <p:cNvPr id="7" name="実例本文2"/>
+          <p:cNvPr id="14" name="実例本文2"/>
           <p:cNvSpPr txBox="1"/>
           <p:nvPr/>
         </p:nvSpPr>
         <p:spPr>
           <a:xfrm>
-            <a:off x="594360" y="2962501"/>
-            <a:ext cx="7955279" cy="462915"/>
+            <a:off x="4724400" y="2495549"/>
+            <a:ext cx="3870960" cy="320420"/>
           </a:xfrm>
           <a:prstGeom prst="rect">
             <a:avLst/>
@@ -25011,24 +23127,24 @@
           <a:p>
             <a:pPr algn="l">
               <a:lnSpc>
-                <a:spcPct val="112000"/>
-              </a:lnSpc>
-              <a:spcBef>
-                <a:spcPts val="0"/>
-              </a:spcBef>
-              <a:spcAft>
-                <a:spcPts val="0"/>
-              </a:spcAft>
-              <a:buNone/>
-              <a:defRPr sz="2100" b="0">
-                <a:solidFill>
-                  <a:srgbClr val="303437"/>
-                </a:solidFill>
-                <a:latin typeface="Noto Sans"/>
-              </a:defRPr>
-            </a:pPr>
-            <a:r>
-              <a:rPr sz="2100" b="0" lang="ja-JP" altLang="en-US">
+                <a:spcPts val="2222"/>
+              </a:lnSpc>
+              <a:spcBef>
+                <a:spcPts val="0"/>
+              </a:spcBef>
+              <a:spcAft>
+                <a:spcPts val="0"/>
+              </a:spcAft>
+              <a:buNone/>
+              <a:defRPr sz="1900" b="0">
+                <a:solidFill>
+                  <a:srgbClr val="303437"/>
+                </a:solidFill>
+                <a:latin typeface="Noto Sans"/>
+              </a:defRPr>
+            </a:pPr>
+            <a:r>
+              <a:rPr sz="1900" b="0" lang="ja-JP" altLang="en-US">
                 <a:solidFill>
                   <a:srgbClr val="303437"/>
                 </a:solidFill>
@@ -25043,14 +23159,14 @@
       </p:sp>
       <p:sp>
         <p:nvSpPr>
-          <p:cNvPr id="8" name="実例本文3"/>
+          <p:cNvPr id="15" name="実例本文3"/>
           <p:cNvSpPr txBox="1"/>
           <p:nvPr/>
         </p:nvSpPr>
         <p:spPr>
           <a:xfrm>
-            <a:off x="594360" y="3527584"/>
-            <a:ext cx="7955279" cy="481330"/>
+            <a:off x="548640" y="2955670"/>
+            <a:ext cx="8046720" cy="320420"/>
           </a:xfrm>
           <a:prstGeom prst="rect">
             <a:avLst/>
@@ -25065,24 +23181,24 @@
           <a:p>
             <a:pPr algn="l">
               <a:lnSpc>
-                <a:spcPct val="112000"/>
-              </a:lnSpc>
-              <a:spcBef>
-                <a:spcPts val="0"/>
-              </a:spcBef>
-              <a:spcAft>
-                <a:spcPts val="0"/>
-              </a:spcAft>
-              <a:buNone/>
-              <a:defRPr sz="2200" b="0">
-                <a:solidFill>
-                  <a:srgbClr val="303437"/>
-                </a:solidFill>
-                <a:latin typeface="Noto Sans"/>
-              </a:defRPr>
-            </a:pPr>
-            <a:r>
-              <a:rPr sz="2200" b="1" lang="ja-JP" altLang="en-US">
+                <a:spcPts val="2222"/>
+              </a:lnSpc>
+              <a:spcBef>
+                <a:spcPts val="0"/>
+              </a:spcBef>
+              <a:spcAft>
+                <a:spcPts val="0"/>
+              </a:spcAft>
+              <a:buNone/>
+              <a:defRPr sz="1900" b="0">
+                <a:solidFill>
+                  <a:srgbClr val="303437"/>
+                </a:solidFill>
+                <a:latin typeface="Noto Sans"/>
+              </a:defRPr>
+            </a:pPr>
+            <a:r>
+              <a:rPr sz="1900" b="1" lang="ja-JP" altLang="en-US">
                 <a:solidFill>
                   <a:srgbClr val="B13731"/>
                 </a:solidFill>
@@ -25097,14 +23213,14 @@
       </p:sp>
       <p:sp>
         <p:nvSpPr>
-          <p:cNvPr id="9" name="実例本文4"/>
+          <p:cNvPr id="16" name="実例本文4"/>
           <p:cNvSpPr txBox="1"/>
           <p:nvPr/>
         </p:nvSpPr>
         <p:spPr>
           <a:xfrm>
-            <a:off x="594360" y="4110663"/>
-            <a:ext cx="7955279" cy="775970"/>
+            <a:off x="548640" y="3339590"/>
+            <a:ext cx="8046720" cy="602741"/>
           </a:xfrm>
           <a:prstGeom prst="rect">
             <a:avLst/>
@@ -25119,7 +23235,7 @@
           <a:p>
             <a:pPr algn="l">
               <a:lnSpc>
-                <a:spcPct val="112000"/>
+                <a:spcPts val="2222"/>
               </a:lnSpc>
               <a:spcBef>
                 <a:spcPts val="0"/>
@@ -25145,97 +23261,6 @@
                 <a:cs typeface="Noto Sans"/>
               </a:rPr>
               <a:t>ハリッサは唐辛子を使う調味料。食べ物の名前と主な材料を対応させる。</a:t>
-            </a:r>
-          </a:p>
-        </p:txBody>
-      </p:sp>
-      <p:sp>
-        <p:nvSpPr>
-          <p:cNvPr id="10" name="TextBox 9"/>
-          <p:cNvSpPr txBox="1"/>
-          <p:nvPr/>
-        </p:nvSpPr>
-        <p:spPr>
-          <a:xfrm>
-            <a:off x="502920" y="4690872"/>
-            <a:ext cx="8183879" cy="393192"/>
-          </a:xfrm>
-          <a:prstGeom prst="rect">
-            <a:avLst/>
-          </a:prstGeom>
-          <a:noFill/>
-        </p:spPr>
-        <p:txBody>
-          <a:bodyPr wrap="square" lIns="0" rIns="0" tIns="0" bIns="0">
-            <a:noAutofit/>
-          </a:bodyPr>
-          <a:lstStyle/>
-          <a:p>
-            <a:pPr algn="l">
-              <a:lnSpc>
-                <a:spcPct val="112000"/>
-              </a:lnSpc>
-              <a:spcBef>
-                <a:spcPts val="0"/>
-              </a:spcBef>
-              <a:spcAft>
-                <a:spcPts val="0"/>
-              </a:spcAft>
-              <a:buNone/>
-              <a:defRPr sz="810" b="0">
-                <a:solidFill>
-                  <a:srgbClr val="303437"/>
-                </a:solidFill>
-                <a:latin typeface="Noto Sans"/>
-              </a:defRPr>
-            </a:pPr>
-            <a:r>
-              <a:rPr sz="810" b="0" lang="ja-JP" altLang="en-US">
-                <a:solidFill>
-                  <a:srgbClr val="626669"/>
-                </a:solidFill>
-                <a:latin typeface="Noto Sans"/>
-                <a:ea typeface="Noto Sans CJK JP"/>
-                <a:cs typeface="Noto Sans"/>
-              </a:rPr>
-              <a:t/>
-            </a:r>
-            <a:r>
-              <a:rPr sz="810" b="0" lang="ja-JP" altLang="en-US">
-                <a:solidFill>
-                  <a:srgbClr val="626669"/>
-                </a:solidFill>
-                <a:latin typeface="Noto Sans"/>
-                <a:ea typeface="Noto Sans CJK JP"/>
-                <a:cs typeface="Noto Sans"/>
-              </a:rPr>
-              <a:t>Global PIQA v1 / nonparallel / group0065_ex000039_arb_arab_0_v1。CC BY-SA 4.0。</a:t>
-            </a:r>
-          </a:p>
-          <a:p>
-            <a:pPr>
-              <a:lnSpc>
-                <a:spcPct val="112000"/>
-              </a:lnSpc>
-              <a:buNone/>
-              <a:defRPr sz="810" b="0">
-                <a:solidFill>
-                  <a:srgbClr val="303437"/>
-                </a:solidFill>
-                <a:latin typeface="Noto Sans"/>
-              </a:defRPr>
-            </a:pPr>
-            <a:r>
-              <a:rPr sz="810" b="0" lang="ja-JP" altLang="en-US">
-                <a:solidFill>
-                  <a:srgbClr val="626669"/>
-                </a:solidFill>
-                <a:latin typeface="Noto Sans"/>
-                <a:ea typeface="Noto Sans CJK JP"/>
-                <a:cs typeface="Noto Sans"/>
-                <a:hlinkClick r:id="rId2"/>
-              </a:rPr>
-              <a:t>https://huggingface.co/datasets/mrlbenchmarks/global-piqa-nonparallel</a:t>
             </a:r>
           </a:p>
         </p:txBody>
@@ -25362,8 +23387,8 @@
         </p:nvSpPr>
         <p:spPr>
           <a:xfrm>
-            <a:off x="594360" y="2067121"/>
-            <a:ext cx="7955279" cy="274320"/>
+            <a:off x="548640" y="1422400"/>
+            <a:ext cx="3870960" cy="216408"/>
           </a:xfrm>
           <a:prstGeom prst="rect">
             <a:avLst/>
@@ -25378,7 +23403,7 @@
           <a:p>
             <a:pPr algn="l">
               <a:lnSpc>
-                <a:spcPct val="117000"/>
+                <a:spcPts val="1404"/>
               </a:lnSpc>
               <a:spcBef>
                 <a:spcPts val="0"/>
@@ -25416,8 +23441,8 @@
         </p:nvSpPr>
         <p:spPr>
           <a:xfrm>
-            <a:off x="594360" y="2326317"/>
-            <a:ext cx="7955279" cy="481330"/>
+            <a:off x="548640" y="1727708"/>
+            <a:ext cx="3870960" cy="602741"/>
           </a:xfrm>
           <a:prstGeom prst="rect">
             <a:avLst/>
@@ -25432,24 +23457,24 @@
           <a:p>
             <a:pPr algn="l">
               <a:lnSpc>
-                <a:spcPct val="112000"/>
-              </a:lnSpc>
-              <a:spcBef>
-                <a:spcPts val="0"/>
-              </a:spcBef>
-              <a:spcAft>
-                <a:spcPts val="0"/>
-              </a:spcAft>
-              <a:buNone/>
-              <a:defRPr sz="2200" b="0">
-                <a:solidFill>
-                  <a:srgbClr val="303437"/>
-                </a:solidFill>
-                <a:latin typeface="Noto Sans"/>
-              </a:defRPr>
-            </a:pPr>
-            <a:r>
-              <a:rPr sz="2200" b="0" lang="ja-JP" altLang="en-US">
+                <a:spcPts val="2222"/>
+              </a:lnSpc>
+              <a:spcBef>
+                <a:spcPts val="0"/>
+              </a:spcBef>
+              <a:spcAft>
+                <a:spcPts val="0"/>
+              </a:spcAft>
+              <a:buNone/>
+              <a:defRPr sz="1900" b="0">
+                <a:solidFill>
+                  <a:srgbClr val="303437"/>
+                </a:solidFill>
+                <a:latin typeface="Noto Sans"/>
+              </a:defRPr>
+            </a:pPr>
+            <a:r>
+              <a:rPr sz="1900" b="0" lang="ja-JP" altLang="en-US">
                 <a:solidFill>
                   <a:srgbClr val="303437"/>
                 </a:solidFill>
@@ -25470,8 +23495,8 @@
         </p:nvSpPr>
         <p:spPr>
           <a:xfrm>
-            <a:off x="594360" y="2901684"/>
-            <a:ext cx="365760" cy="411480"/>
+            <a:off x="548640" y="2393950"/>
+            <a:ext cx="3870960" cy="320420"/>
           </a:xfrm>
           <a:prstGeom prst="rect">
             <a:avLst/>
@@ -25486,24 +23511,24 @@
           <a:p>
             <a:pPr algn="l">
               <a:lnSpc>
-                <a:spcPct val="117000"/>
-              </a:lnSpc>
-              <a:spcBef>
-                <a:spcPts val="0"/>
-              </a:spcBef>
-              <a:spcAft>
-                <a:spcPts val="0"/>
-              </a:spcAft>
-              <a:buNone/>
-              <a:defRPr sz="2100" b="0">
-                <a:solidFill>
-                  <a:srgbClr val="303437"/>
-                </a:solidFill>
-                <a:latin typeface="Noto Sans"/>
-              </a:defRPr>
-            </a:pPr>
-            <a:r>
-              <a:rPr sz="2100" b="0" lang="ja-JP" altLang="en-US">
+                <a:spcPts val="2222"/>
+              </a:lnSpc>
+              <a:spcBef>
+                <a:spcPts val="0"/>
+              </a:spcBef>
+              <a:spcAft>
+                <a:spcPts val="0"/>
+              </a:spcAft>
+              <a:buNone/>
+              <a:defRPr sz="1900" b="0">
+                <a:solidFill>
+                  <a:srgbClr val="303437"/>
+                </a:solidFill>
+                <a:latin typeface="Noto Sans"/>
+              </a:defRPr>
+            </a:pPr>
+            <a:r>
+              <a:rPr sz="1900" b="0" lang="ja-JP" altLang="en-US">
                 <a:solidFill>
                   <a:srgbClr val="303437"/>
                 </a:solidFill>
@@ -25524,8 +23549,8 @@
         </p:nvSpPr>
         <p:spPr>
           <a:xfrm>
-            <a:off x="1051560" y="2901684"/>
-            <a:ext cx="7452360" cy="462915"/>
+            <a:off x="993140" y="2393950"/>
+            <a:ext cx="3426460" cy="320420"/>
           </a:xfrm>
           <a:prstGeom prst="rect">
             <a:avLst/>
@@ -25540,24 +23565,24 @@
           <a:p>
             <a:pPr algn="l">
               <a:lnSpc>
-                <a:spcPct val="112000"/>
-              </a:lnSpc>
-              <a:spcBef>
-                <a:spcPts val="0"/>
-              </a:spcBef>
-              <a:spcAft>
-                <a:spcPts val="0"/>
-              </a:spcAft>
-              <a:buNone/>
-              <a:defRPr sz="2100" b="0">
-                <a:solidFill>
-                  <a:srgbClr val="303437"/>
-                </a:solidFill>
-                <a:latin typeface="Noto Sans"/>
-              </a:defRPr>
-            </a:pPr>
-            <a:r>
-              <a:rPr sz="2100" b="0" lang="ja-JP" altLang="en-US">
+                <a:spcPts val="2222"/>
+              </a:lnSpc>
+              <a:spcBef>
+                <a:spcPts val="0"/>
+              </a:spcBef>
+              <a:spcAft>
+                <a:spcPts val="0"/>
+              </a:spcAft>
+              <a:buNone/>
+              <a:defRPr sz="1900" b="0">
+                <a:solidFill>
+                  <a:srgbClr val="303437"/>
+                </a:solidFill>
+                <a:latin typeface="Noto Sans"/>
+              </a:defRPr>
+            </a:pPr>
+            <a:r>
+              <a:rPr sz="1900" b="0" lang="ja-JP" altLang="en-US">
                 <a:solidFill>
                   <a:srgbClr val="303437"/>
                 </a:solidFill>
@@ -25578,8 +23603,8 @@
         </p:nvSpPr>
         <p:spPr>
           <a:xfrm>
-            <a:off x="594360" y="3456891"/>
-            <a:ext cx="365760" cy="411480"/>
+            <a:off x="548640" y="2777871"/>
+            <a:ext cx="3870960" cy="320420"/>
           </a:xfrm>
           <a:prstGeom prst="rect">
             <a:avLst/>
@@ -25594,24 +23619,24 @@
           <a:p>
             <a:pPr algn="l">
               <a:lnSpc>
-                <a:spcPct val="117000"/>
-              </a:lnSpc>
-              <a:spcBef>
-                <a:spcPts val="0"/>
-              </a:spcBef>
-              <a:spcAft>
-                <a:spcPts val="0"/>
-              </a:spcAft>
-              <a:buNone/>
-              <a:defRPr sz="2100" b="0">
-                <a:solidFill>
-                  <a:srgbClr val="303437"/>
-                </a:solidFill>
-                <a:latin typeface="Noto Sans"/>
-              </a:defRPr>
-            </a:pPr>
-            <a:r>
-              <a:rPr sz="2100" b="0" lang="ja-JP" altLang="en-US">
+                <a:spcPts val="2222"/>
+              </a:lnSpc>
+              <a:spcBef>
+                <a:spcPts val="0"/>
+              </a:spcBef>
+              <a:spcAft>
+                <a:spcPts val="0"/>
+              </a:spcAft>
+              <a:buNone/>
+              <a:defRPr sz="1900" b="0">
+                <a:solidFill>
+                  <a:srgbClr val="303437"/>
+                </a:solidFill>
+                <a:latin typeface="Noto Sans"/>
+              </a:defRPr>
+            </a:pPr>
+            <a:r>
+              <a:rPr sz="1900" b="0" lang="ja-JP" altLang="en-US">
                 <a:solidFill>
                   <a:srgbClr val="303437"/>
                 </a:solidFill>
@@ -25632,8 +23657,8 @@
         </p:nvSpPr>
         <p:spPr>
           <a:xfrm>
-            <a:off x="1051560" y="3456891"/>
-            <a:ext cx="7452360" cy="462915"/>
+            <a:off x="993140" y="2777871"/>
+            <a:ext cx="3426460" cy="320420"/>
           </a:xfrm>
           <a:prstGeom prst="rect">
             <a:avLst/>
@@ -25648,24 +23673,24 @@
           <a:p>
             <a:pPr algn="l">
               <a:lnSpc>
-                <a:spcPct val="112000"/>
-              </a:lnSpc>
-              <a:spcBef>
-                <a:spcPts val="0"/>
-              </a:spcBef>
-              <a:spcAft>
-                <a:spcPts val="0"/>
-              </a:spcAft>
-              <a:buNone/>
-              <a:defRPr sz="2100" b="0">
-                <a:solidFill>
-                  <a:srgbClr val="303437"/>
-                </a:solidFill>
-                <a:latin typeface="Noto Sans"/>
-              </a:defRPr>
-            </a:pPr>
-            <a:r>
-              <a:rPr sz="2100" b="0" lang="ja-JP" altLang="en-US">
+                <a:spcPts val="2222"/>
+              </a:lnSpc>
+              <a:spcBef>
+                <a:spcPts val="0"/>
+              </a:spcBef>
+              <a:spcAft>
+                <a:spcPts val="0"/>
+              </a:spcAft>
+              <a:buNone/>
+              <a:defRPr sz="1900" b="0">
+                <a:solidFill>
+                  <a:srgbClr val="303437"/>
+                </a:solidFill>
+                <a:latin typeface="Noto Sans"/>
+              </a:defRPr>
+            </a:pPr>
+            <a:r>
+              <a:rPr sz="1900" b="0" lang="ja-JP" altLang="en-US">
                 <a:solidFill>
                   <a:srgbClr val="303437"/>
                 </a:solidFill>
@@ -25769,130 +23794,16 @@
           </a:p>
         </p:txBody>
       </p:sp>
-    </p:spTree>
-  </p:cSld>
-  <p:clrMapOvr>
-    <a:masterClrMapping/>
-  </p:clrMapOvr>
-</p:sld>
-</file>
-
-<file path=ppt/slides/slide48.xml><?xml version="1.0" encoding="utf-8"?>
-<p:sld xmlns:a="http://schemas.openxmlformats.org/drawingml/2006/main" xmlns:p="http://schemas.openxmlformats.org/presentationml/2006/main" xmlns:r="http://schemas.openxmlformats.org/officeDocument/2006/relationships">
-  <p:cSld>
-    <p:spTree>
-      <p:nvGrpSpPr>
-        <p:cNvPr id="1" name=""/>
-        <p:cNvGrpSpPr/>
-        <p:nvPr/>
-      </p:nvGrpSpPr>
-      <p:grpSpPr/>
-      <p:sp>
-        <p:nvSpPr>
-          <p:cNvPr id="2" name="Title 1"/>
-          <p:cNvSpPr>
-            <a:spLocks noGrp="1"/>
-          </p:cNvSpPr>
-          <p:nvPr>
-            <p:ph type="title"/>
-          </p:nvPr>
-        </p:nvSpPr>
-        <p:spPr>
-          <a:xfrm>
-            <a:off x="548640" y="786384"/>
-            <a:ext cx="8046720" cy="502920"/>
-          </a:xfrm>
-        </p:spPr>
-        <p:txBody>
-          <a:bodyPr wrap="square" lIns="0" rIns="0" tIns="0" bIns="0">
-            <a:noAutofit/>
-          </a:bodyPr>
-          <a:lstStyle/>
-          <a:p>
-            <a:pPr algn="l">
-              <a:lnSpc>
-                <a:spcPct val="110000"/>
-              </a:lnSpc>
-              <a:buNone/>
-              <a:defRPr sz="2800" b="0">
-                <a:solidFill>
-                  <a:srgbClr val="303437"/>
-                </a:solidFill>
-                <a:latin typeface="Noto Sans"/>
-              </a:defRPr>
-            </a:pPr>
-            <a:r>
-              <a:rPr sz="2800" b="1" lang="ja-JP" altLang="en-US">
-                <a:solidFill>
-                  <a:srgbClr val="303437"/>
-                </a:solidFill>
-                <a:latin typeface="Noto Sans"/>
-                <a:ea typeface="Noto Sans CJK JP"/>
-                <a:cs typeface="Noto Sans"/>
-              </a:rPr>
-              <a:t>追加例8：日本語訳と解説</a:t>
-            </a:r>
-          </a:p>
-        </p:txBody>
-      </p:sp>
-      <p:sp>
-        <p:nvSpPr>
-          <p:cNvPr id="3" name="Title 2"/>
-          <p:cNvSpPr>
-            <a:spLocks noGrp="1"/>
-          </p:cNvSpPr>
-          <p:nvPr>
-            <p:ph type="title" idx="2"/>
-          </p:nvPr>
-        </p:nvSpPr>
-        <p:spPr>
-          <a:xfrm>
-            <a:off x="75895" y="0"/>
-            <a:ext cx="8115300" cy="480060"/>
-          </a:xfrm>
-        </p:spPr>
-        <p:txBody>
-          <a:bodyPr wrap="square" lIns="0" rIns="0" tIns="0" bIns="0" anchor="ctr">
-            <a:noAutofit/>
-          </a:bodyPr>
-          <a:lstStyle/>
-          <a:p>
-            <a:pPr algn="l">
-              <a:lnSpc>
-                <a:spcPct val="110000"/>
-              </a:lnSpc>
-              <a:buNone/>
-              <a:defRPr sz="1400" b="0">
-                <a:solidFill>
-                  <a:srgbClr val="303437"/>
-                </a:solidFill>
-                <a:latin typeface="Noto Sans"/>
-              </a:defRPr>
-            </a:pPr>
-            <a:r>
-              <a:rPr sz="1400" b="1" lang="ja-JP" altLang="en-US">
-                <a:solidFill>
-                  <a:srgbClr val="FFFFFF"/>
-                </a:solidFill>
-                <a:latin typeface="Noto Sans"/>
-                <a:ea typeface="Noto Sans CJK JP"/>
-                <a:cs typeface="Noto Sans"/>
-              </a:rPr>
-              <a:t>Appendix: 1. 生活場面の追加例</a:t>
-            </a:r>
-          </a:p>
-        </p:txBody>
-      </p:sp>
-      <p:sp>
-        <p:nvSpPr>
-          <p:cNvPr id="4" name="実例ラベル"/>
+      <p:sp>
+        <p:nvSpPr>
+          <p:cNvPr id="11" name="実例ラベル"/>
           <p:cNvSpPr txBox="1"/>
           <p:nvPr/>
         </p:nvSpPr>
         <p:spPr>
           <a:xfrm>
-            <a:off x="594360" y="1481628"/>
-            <a:ext cx="7955279" cy="274320"/>
+            <a:off x="4724400" y="1422400"/>
+            <a:ext cx="3870960" cy="216408"/>
           </a:xfrm>
           <a:prstGeom prst="rect">
             <a:avLst/>
@@ -25907,7 +23818,7 @@
           <a:p>
             <a:pPr algn="l">
               <a:lnSpc>
-                <a:spcPct val="117000"/>
+                <a:spcPts val="1404"/>
               </a:lnSpc>
               <a:spcBef>
                 <a:spcPts val="0"/>
@@ -25939,14 +23850,14 @@
       </p:sp>
       <p:sp>
         <p:nvSpPr>
-          <p:cNvPr id="5" name="実例本文0"/>
+          <p:cNvPr id="12" name="実例本文0"/>
           <p:cNvSpPr txBox="1"/>
           <p:nvPr/>
         </p:nvSpPr>
         <p:spPr>
           <a:xfrm>
-            <a:off x="594360" y="1814628"/>
-            <a:ext cx="7955279" cy="481330"/>
+            <a:off x="4724400" y="1727708"/>
+            <a:ext cx="3870960" cy="602741"/>
           </a:xfrm>
           <a:prstGeom prst="rect">
             <a:avLst/>
@@ -25961,24 +23872,24 @@
           <a:p>
             <a:pPr algn="l">
               <a:lnSpc>
-                <a:spcPct val="112000"/>
-              </a:lnSpc>
-              <a:spcBef>
-                <a:spcPts val="0"/>
-              </a:spcBef>
-              <a:spcAft>
-                <a:spcPts val="0"/>
-              </a:spcAft>
-              <a:buNone/>
-              <a:defRPr sz="2200" b="0">
-                <a:solidFill>
-                  <a:srgbClr val="303437"/>
-                </a:solidFill>
-                <a:latin typeface="Noto Sans"/>
-              </a:defRPr>
-            </a:pPr>
-            <a:r>
-              <a:rPr sz="2200" b="0" lang="ja-JP" altLang="en-US">
+                <a:spcPts val="2222"/>
+              </a:lnSpc>
+              <a:spcBef>
+                <a:spcPts val="0"/>
+              </a:spcBef>
+              <a:spcAft>
+                <a:spcPts val="0"/>
+              </a:spcAft>
+              <a:buNone/>
+              <a:defRPr sz="1900" b="0">
+                <a:solidFill>
+                  <a:srgbClr val="303437"/>
+                </a:solidFill>
+                <a:latin typeface="Noto Sans"/>
+              </a:defRPr>
+            </a:pPr>
+            <a:r>
+              <a:rPr sz="1900" b="0" lang="ja-JP" altLang="en-US">
                 <a:solidFill>
                   <a:srgbClr val="303437"/>
                 </a:solidFill>
@@ -25993,14 +23904,14 @@
       </p:sp>
       <p:sp>
         <p:nvSpPr>
-          <p:cNvPr id="6" name="実例本文1"/>
+          <p:cNvPr id="13" name="実例本文1"/>
           <p:cNvSpPr txBox="1"/>
           <p:nvPr/>
         </p:nvSpPr>
         <p:spPr>
           <a:xfrm>
-            <a:off x="594360" y="2396984"/>
-            <a:ext cx="7955279" cy="462915"/>
+            <a:off x="4724400" y="2393950"/>
+            <a:ext cx="3870960" cy="320420"/>
           </a:xfrm>
           <a:prstGeom prst="rect">
             <a:avLst/>
@@ -26015,24 +23926,24 @@
           <a:p>
             <a:pPr algn="l">
               <a:lnSpc>
-                <a:spcPct val="112000"/>
-              </a:lnSpc>
-              <a:spcBef>
-                <a:spcPts val="0"/>
-              </a:spcBef>
-              <a:spcAft>
-                <a:spcPts val="0"/>
-              </a:spcAft>
-              <a:buNone/>
-              <a:defRPr sz="2100" b="0">
-                <a:solidFill>
-                  <a:srgbClr val="303437"/>
-                </a:solidFill>
-                <a:latin typeface="Noto Sans"/>
-              </a:defRPr>
-            </a:pPr>
-            <a:r>
-              <a:rPr sz="2100" b="0" lang="ja-JP" altLang="en-US">
+                <a:spcPts val="2222"/>
+              </a:lnSpc>
+              <a:spcBef>
+                <a:spcPts val="0"/>
+              </a:spcBef>
+              <a:spcAft>
+                <a:spcPts val="0"/>
+              </a:spcAft>
+              <a:buNone/>
+              <a:defRPr sz="1900" b="0">
+                <a:solidFill>
+                  <a:srgbClr val="303437"/>
+                </a:solidFill>
+                <a:latin typeface="Noto Sans"/>
+              </a:defRPr>
+            </a:pPr>
+            <a:r>
+              <a:rPr sz="1900" b="0" lang="ja-JP" altLang="en-US">
                 <a:solidFill>
                   <a:srgbClr val="303437"/>
                 </a:solidFill>
@@ -26047,14 +23958,14 @@
       </p:sp>
       <p:sp>
         <p:nvSpPr>
-          <p:cNvPr id="7" name="実例本文2"/>
+          <p:cNvPr id="14" name="実例本文2"/>
           <p:cNvSpPr txBox="1"/>
           <p:nvPr/>
         </p:nvSpPr>
         <p:spPr>
           <a:xfrm>
-            <a:off x="594360" y="2962501"/>
-            <a:ext cx="7955279" cy="462915"/>
+            <a:off x="4724400" y="2777871"/>
+            <a:ext cx="3870960" cy="320420"/>
           </a:xfrm>
           <a:prstGeom prst="rect">
             <a:avLst/>
@@ -26069,24 +23980,24 @@
           <a:p>
             <a:pPr algn="l">
               <a:lnSpc>
-                <a:spcPct val="112000"/>
-              </a:lnSpc>
-              <a:spcBef>
-                <a:spcPts val="0"/>
-              </a:spcBef>
-              <a:spcAft>
-                <a:spcPts val="0"/>
-              </a:spcAft>
-              <a:buNone/>
-              <a:defRPr sz="2100" b="0">
-                <a:solidFill>
-                  <a:srgbClr val="303437"/>
-                </a:solidFill>
-                <a:latin typeface="Noto Sans"/>
-              </a:defRPr>
-            </a:pPr>
-            <a:r>
-              <a:rPr sz="2100" b="0" lang="ja-JP" altLang="en-US">
+                <a:spcPts val="2222"/>
+              </a:lnSpc>
+              <a:spcBef>
+                <a:spcPts val="0"/>
+              </a:spcBef>
+              <a:spcAft>
+                <a:spcPts val="0"/>
+              </a:spcAft>
+              <a:buNone/>
+              <a:defRPr sz="1900" b="0">
+                <a:solidFill>
+                  <a:srgbClr val="303437"/>
+                </a:solidFill>
+                <a:latin typeface="Noto Sans"/>
+              </a:defRPr>
+            </a:pPr>
+            <a:r>
+              <a:rPr sz="1900" b="0" lang="ja-JP" altLang="en-US">
                 <a:solidFill>
                   <a:srgbClr val="303437"/>
                 </a:solidFill>
@@ -26101,14 +24012,14 @@
       </p:sp>
       <p:sp>
         <p:nvSpPr>
-          <p:cNvPr id="8" name="実例本文3"/>
+          <p:cNvPr id="15" name="実例本文3"/>
           <p:cNvSpPr txBox="1"/>
           <p:nvPr/>
         </p:nvSpPr>
         <p:spPr>
           <a:xfrm>
-            <a:off x="594360" y="3527584"/>
-            <a:ext cx="7955279" cy="481330"/>
+            <a:off x="548640" y="3237991"/>
+            <a:ext cx="8046720" cy="320420"/>
           </a:xfrm>
           <a:prstGeom prst="rect">
             <a:avLst/>
@@ -26123,24 +24034,24 @@
           <a:p>
             <a:pPr algn="l">
               <a:lnSpc>
-                <a:spcPct val="112000"/>
-              </a:lnSpc>
-              <a:spcBef>
-                <a:spcPts val="0"/>
-              </a:spcBef>
-              <a:spcAft>
-                <a:spcPts val="0"/>
-              </a:spcAft>
-              <a:buNone/>
-              <a:defRPr sz="2200" b="0">
-                <a:solidFill>
-                  <a:srgbClr val="303437"/>
-                </a:solidFill>
-                <a:latin typeface="Noto Sans"/>
-              </a:defRPr>
-            </a:pPr>
-            <a:r>
-              <a:rPr sz="2200" b="1" lang="ja-JP" altLang="en-US">
+                <a:spcPts val="2222"/>
+              </a:lnSpc>
+              <a:spcBef>
+                <a:spcPts val="0"/>
+              </a:spcBef>
+              <a:spcAft>
+                <a:spcPts val="0"/>
+              </a:spcAft>
+              <a:buNone/>
+              <a:defRPr sz="1900" b="0">
+                <a:solidFill>
+                  <a:srgbClr val="303437"/>
+                </a:solidFill>
+                <a:latin typeface="Noto Sans"/>
+              </a:defRPr>
+            </a:pPr>
+            <a:r>
+              <a:rPr sz="1900" b="1" lang="ja-JP" altLang="en-US">
                 <a:solidFill>
                   <a:srgbClr val="B13731"/>
                 </a:solidFill>
@@ -26155,14 +24066,14 @@
       </p:sp>
       <p:sp>
         <p:nvSpPr>
-          <p:cNvPr id="9" name="実例本文4"/>
+          <p:cNvPr id="16" name="実例本文4"/>
           <p:cNvSpPr txBox="1"/>
           <p:nvPr/>
         </p:nvSpPr>
         <p:spPr>
           <a:xfrm>
-            <a:off x="594360" y="4111018"/>
-            <a:ext cx="7955279" cy="426084"/>
+            <a:off x="548640" y="3621911"/>
+            <a:ext cx="8046720" cy="320420"/>
           </a:xfrm>
           <a:prstGeom prst="rect">
             <a:avLst/>
@@ -26177,7 +24088,7 @@
           <a:p>
             <a:pPr algn="l">
               <a:lnSpc>
-                <a:spcPct val="112000"/>
+                <a:spcPts val="2222"/>
               </a:lnSpc>
               <a:spcBef>
                 <a:spcPts val="0"/>
@@ -26203,97 +24114,6 @@
                 <a:cs typeface="Noto Sans"/>
               </a:rPr>
               <a:t>ラッシーは乳製品の飲み物。攪拌したときのバターの動きを問う。</a:t>
-            </a:r>
-          </a:p>
-        </p:txBody>
-      </p:sp>
-      <p:sp>
-        <p:nvSpPr>
-          <p:cNvPr id="10" name="TextBox 9"/>
-          <p:cNvSpPr txBox="1"/>
-          <p:nvPr/>
-        </p:nvSpPr>
-        <p:spPr>
-          <a:xfrm>
-            <a:off x="502920" y="4690872"/>
-            <a:ext cx="8183879" cy="393192"/>
-          </a:xfrm>
-          <a:prstGeom prst="rect">
-            <a:avLst/>
-          </a:prstGeom>
-          <a:noFill/>
-        </p:spPr>
-        <p:txBody>
-          <a:bodyPr wrap="square" lIns="0" rIns="0" tIns="0" bIns="0">
-            <a:noAutofit/>
-          </a:bodyPr>
-          <a:lstStyle/>
-          <a:p>
-            <a:pPr algn="l">
-              <a:lnSpc>
-                <a:spcPct val="112000"/>
-              </a:lnSpc>
-              <a:spcBef>
-                <a:spcPts val="0"/>
-              </a:spcBef>
-              <a:spcAft>
-                <a:spcPts val="0"/>
-              </a:spcAft>
-              <a:buNone/>
-              <a:defRPr sz="810" b="0">
-                <a:solidFill>
-                  <a:srgbClr val="303437"/>
-                </a:solidFill>
-                <a:latin typeface="Noto Sans"/>
-              </a:defRPr>
-            </a:pPr>
-            <a:r>
-              <a:rPr sz="810" b="0" lang="ja-JP" altLang="en-US">
-                <a:solidFill>
-                  <a:srgbClr val="626669"/>
-                </a:solidFill>
-                <a:latin typeface="Noto Sans"/>
-                <a:ea typeface="Noto Sans CJK JP"/>
-                <a:cs typeface="Noto Sans"/>
-              </a:rPr>
-              <a:t/>
-            </a:r>
-            <a:r>
-              <a:rPr sz="810" b="0" lang="ja-JP" altLang="en-US">
-                <a:solidFill>
-                  <a:srgbClr val="626669"/>
-                </a:solidFill>
-                <a:latin typeface="Noto Sans"/>
-                <a:ea typeface="Noto Sans CJK JP"/>
-                <a:cs typeface="Noto Sans"/>
-              </a:rPr>
-              <a:t>Global PIQA v1 / nonparallel / group0098_ex000091_hin_deva_9_v1。CC BY-SA 4.0。</a:t>
-            </a:r>
-          </a:p>
-          <a:p>
-            <a:pPr>
-              <a:lnSpc>
-                <a:spcPct val="112000"/>
-              </a:lnSpc>
-              <a:buNone/>
-              <a:defRPr sz="810" b="0">
-                <a:solidFill>
-                  <a:srgbClr val="303437"/>
-                </a:solidFill>
-                <a:latin typeface="Noto Sans"/>
-              </a:defRPr>
-            </a:pPr>
-            <a:r>
-              <a:rPr sz="810" b="0" lang="ja-JP" altLang="en-US">
-                <a:solidFill>
-                  <a:srgbClr val="626669"/>
-                </a:solidFill>
-                <a:latin typeface="Noto Sans"/>
-                <a:ea typeface="Noto Sans CJK JP"/>
-                <a:cs typeface="Noto Sans"/>
-                <a:hlinkClick r:id="rId2"/>
-              </a:rPr>
-              <a:t>https://huggingface.co/datasets/mrlbenchmarks/global-piqa-nonparallel</a:t>
             </a:r>
           </a:p>
         </p:txBody>
@@ -26420,8 +24240,8 @@
         </p:nvSpPr>
         <p:spPr>
           <a:xfrm>
-            <a:off x="594360" y="2036073"/>
-            <a:ext cx="7955279" cy="274320"/>
+            <a:off x="548640" y="1422400"/>
+            <a:ext cx="3870960" cy="216408"/>
           </a:xfrm>
           <a:prstGeom prst="rect">
             <a:avLst/>
@@ -26436,7 +24256,7 @@
           <a:p>
             <a:pPr algn="l">
               <a:lnSpc>
-                <a:spcPct val="117000"/>
+                <a:spcPts val="1404"/>
               </a:lnSpc>
               <a:spcBef>
                 <a:spcPts val="0"/>
@@ -26474,8 +24294,8 @@
         </p:nvSpPr>
         <p:spPr>
           <a:xfrm>
-            <a:off x="594360" y="2369162"/>
-            <a:ext cx="7955279" cy="481330"/>
+            <a:off x="548640" y="1727708"/>
+            <a:ext cx="3870960" cy="602741"/>
           </a:xfrm>
           <a:prstGeom prst="rect">
             <a:avLst/>
@@ -26490,24 +24310,24 @@
           <a:p>
             <a:pPr algn="l">
               <a:lnSpc>
-                <a:spcPct val="112000"/>
-              </a:lnSpc>
-              <a:spcBef>
-                <a:spcPts val="0"/>
-              </a:spcBef>
-              <a:spcAft>
-                <a:spcPts val="0"/>
-              </a:spcAft>
-              <a:buNone/>
-              <a:defRPr sz="2200" b="0">
-                <a:solidFill>
-                  <a:srgbClr val="303437"/>
-                </a:solidFill>
-                <a:latin typeface="Noto Sans"/>
-              </a:defRPr>
-            </a:pPr>
-            <a:r>
-              <a:rPr sz="2200" b="0" lang="ja-JP" altLang="en-US">
+                <a:spcPts val="2222"/>
+              </a:lnSpc>
+              <a:spcBef>
+                <a:spcPts val="0"/>
+              </a:spcBef>
+              <a:spcAft>
+                <a:spcPts val="0"/>
+              </a:spcAft>
+              <a:buNone/>
+              <a:defRPr sz="1900" b="0">
+                <a:solidFill>
+                  <a:srgbClr val="303437"/>
+                </a:solidFill>
+                <a:latin typeface="Noto Sans"/>
+              </a:defRPr>
+            </a:pPr>
+            <a:r>
+              <a:rPr sz="1900" b="0" lang="ja-JP" altLang="en-US">
                 <a:solidFill>
                   <a:srgbClr val="303437"/>
                 </a:solidFill>
@@ -26528,8 +24348,8 @@
         </p:nvSpPr>
         <p:spPr>
           <a:xfrm>
-            <a:off x="594360" y="2953193"/>
-            <a:ext cx="7955279" cy="462915"/>
+            <a:off x="548640" y="2393950"/>
+            <a:ext cx="3870960" cy="320420"/>
           </a:xfrm>
           <a:prstGeom prst="rect">
             <a:avLst/>
@@ -26544,24 +24364,24 @@
           <a:p>
             <a:pPr algn="l">
               <a:lnSpc>
-                <a:spcPct val="112000"/>
-              </a:lnSpc>
-              <a:spcBef>
-                <a:spcPts val="0"/>
-              </a:spcBef>
-              <a:spcAft>
-                <a:spcPts val="0"/>
-              </a:spcAft>
-              <a:buNone/>
-              <a:defRPr sz="2100" b="0">
-                <a:solidFill>
-                  <a:srgbClr val="303437"/>
-                </a:solidFill>
-                <a:latin typeface="Noto Sans"/>
-              </a:defRPr>
-            </a:pPr>
-            <a:r>
-              <a:rPr sz="2100" b="0" lang="ja-JP" altLang="en-US">
+                <a:spcPts val="2222"/>
+              </a:lnSpc>
+              <a:spcBef>
+                <a:spcPts val="0"/>
+              </a:spcBef>
+              <a:spcAft>
+                <a:spcPts val="0"/>
+              </a:spcAft>
+              <a:buNone/>
+              <a:defRPr sz="1900" b="0">
+                <a:solidFill>
+                  <a:srgbClr val="303437"/>
+                </a:solidFill>
+                <a:latin typeface="Noto Sans"/>
+              </a:defRPr>
+            </a:pPr>
+            <a:r>
+              <a:rPr sz="1900" b="0" lang="ja-JP" altLang="en-US">
                 <a:solidFill>
                   <a:srgbClr val="303437"/>
                 </a:solidFill>
@@ -26582,8 +24402,8 @@
         </p:nvSpPr>
         <p:spPr>
           <a:xfrm>
-            <a:off x="594360" y="3518355"/>
-            <a:ext cx="7955279" cy="462915"/>
+            <a:off x="548640" y="2777871"/>
+            <a:ext cx="3870960" cy="320420"/>
           </a:xfrm>
           <a:prstGeom prst="rect">
             <a:avLst/>
@@ -26598,24 +24418,24 @@
           <a:p>
             <a:pPr algn="l">
               <a:lnSpc>
-                <a:spcPct val="112000"/>
-              </a:lnSpc>
-              <a:spcBef>
-                <a:spcPts val="0"/>
-              </a:spcBef>
-              <a:spcAft>
-                <a:spcPts val="0"/>
-              </a:spcAft>
-              <a:buNone/>
-              <a:defRPr sz="2100" b="0">
-                <a:solidFill>
-                  <a:srgbClr val="303437"/>
-                </a:solidFill>
-                <a:latin typeface="Noto Sans"/>
-              </a:defRPr>
-            </a:pPr>
-            <a:r>
-              <a:rPr sz="2100" b="0" lang="ja-JP" altLang="en-US">
+                <a:spcPts val="2222"/>
+              </a:lnSpc>
+              <a:spcBef>
+                <a:spcPts val="0"/>
+              </a:spcBef>
+              <a:spcAft>
+                <a:spcPts val="0"/>
+              </a:spcAft>
+              <a:buNone/>
+              <a:defRPr sz="1900" b="0">
+                <a:solidFill>
+                  <a:srgbClr val="303437"/>
+                </a:solidFill>
+                <a:latin typeface="Noto Sans"/>
+              </a:defRPr>
+            </a:pPr>
+            <a:r>
+              <a:rPr sz="1900" b="0" lang="ja-JP" altLang="en-US">
                 <a:solidFill>
                   <a:srgbClr val="303437"/>
                 </a:solidFill>
@@ -26715,6 +24535,330 @@
                 <a:hlinkClick r:id="rId2"/>
               </a:rPr>
               <a:t>https://huggingface.co/datasets/mrlbenchmarks/global-piqa-nonparallel</a:t>
+            </a:r>
+          </a:p>
+        </p:txBody>
+      </p:sp>
+      <p:sp>
+        <p:nvSpPr>
+          <p:cNvPr id="9" name="実例ラベル"/>
+          <p:cNvSpPr txBox="1"/>
+          <p:nvPr/>
+        </p:nvSpPr>
+        <p:spPr>
+          <a:xfrm>
+            <a:off x="4724400" y="1422400"/>
+            <a:ext cx="3870960" cy="216408"/>
+          </a:xfrm>
+          <a:prstGeom prst="rect">
+            <a:avLst/>
+          </a:prstGeom>
+          <a:noFill/>
+        </p:spPr>
+        <p:txBody>
+          <a:bodyPr wrap="square" lIns="0" rIns="0" tIns="0" bIns="0">
+            <a:noAutofit/>
+          </a:bodyPr>
+          <a:lstStyle/>
+          <a:p>
+            <a:pPr algn="l">
+              <a:lnSpc>
+                <a:spcPts val="1404"/>
+              </a:lnSpc>
+              <a:spcBef>
+                <a:spcPts val="0"/>
+              </a:spcBef>
+              <a:spcAft>
+                <a:spcPts val="0"/>
+              </a:spcAft>
+              <a:buNone/>
+              <a:defRPr sz="1200" b="0">
+                <a:solidFill>
+                  <a:srgbClr val="303437"/>
+                </a:solidFill>
+                <a:latin typeface="Noto Sans"/>
+              </a:defRPr>
+            </a:pPr>
+            <a:r>
+              <a:rPr sz="1200" b="0" lang="ja-JP" altLang="en-US">
+                <a:solidFill>
+                  <a:srgbClr val="626669"/>
+                </a:solidFill>
+                <a:latin typeface="Noto Sans"/>
+                <a:ea typeface="Noto Sans CJK JP"/>
+                <a:cs typeface="Noto Sans"/>
+              </a:rPr>
+              <a:t>日本語訳</a:t>
+            </a:r>
+          </a:p>
+        </p:txBody>
+      </p:sp>
+      <p:sp>
+        <p:nvSpPr>
+          <p:cNvPr id="10" name="実例本文0"/>
+          <p:cNvSpPr txBox="1"/>
+          <p:nvPr/>
+        </p:nvSpPr>
+        <p:spPr>
+          <a:xfrm>
+            <a:off x="4724400" y="1727708"/>
+            <a:ext cx="3870960" cy="602741"/>
+          </a:xfrm>
+          <a:prstGeom prst="rect">
+            <a:avLst/>
+          </a:prstGeom>
+          <a:noFill/>
+        </p:spPr>
+        <p:txBody>
+          <a:bodyPr wrap="square" lIns="0" rIns="0" tIns="0" bIns="0">
+            <a:noAutofit/>
+          </a:bodyPr>
+          <a:lstStyle/>
+          <a:p>
+            <a:pPr algn="l">
+              <a:lnSpc>
+                <a:spcPts val="2222"/>
+              </a:lnSpc>
+              <a:spcBef>
+                <a:spcPts val="0"/>
+              </a:spcBef>
+              <a:spcAft>
+                <a:spcPts val="0"/>
+              </a:spcAft>
+              <a:buNone/>
+              <a:defRPr sz="1900" b="0">
+                <a:solidFill>
+                  <a:srgbClr val="303437"/>
+                </a:solidFill>
+                <a:latin typeface="Noto Sans"/>
+              </a:defRPr>
+            </a:pPr>
+            <a:r>
+              <a:rPr sz="1900" b="0" lang="ja-JP" altLang="en-US">
+                <a:solidFill>
+                  <a:srgbClr val="303437"/>
+                </a:solidFill>
+                <a:latin typeface="Noto Sans"/>
+                <a:ea typeface="Noto Sans CJK JP"/>
+                <a:cs typeface="Noto Sans"/>
+              </a:rPr>
+              <a:t>次のうち、歯や上あごによりくっつきやすい食べ物は。</a:t>
+            </a:r>
+          </a:p>
+        </p:txBody>
+      </p:sp>
+      <p:sp>
+        <p:nvSpPr>
+          <p:cNvPr id="11" name="実例本文1"/>
+          <p:cNvSpPr txBox="1"/>
+          <p:nvPr/>
+        </p:nvSpPr>
+        <p:spPr>
+          <a:xfrm>
+            <a:off x="4724400" y="2393950"/>
+            <a:ext cx="3870960" cy="320420"/>
+          </a:xfrm>
+          <a:prstGeom prst="rect">
+            <a:avLst/>
+          </a:prstGeom>
+          <a:noFill/>
+        </p:spPr>
+        <p:txBody>
+          <a:bodyPr wrap="square" lIns="0" rIns="0" tIns="0" bIns="0">
+            <a:noAutofit/>
+          </a:bodyPr>
+          <a:lstStyle/>
+          <a:p>
+            <a:pPr algn="l">
+              <a:lnSpc>
+                <a:spcPts val="2222"/>
+              </a:lnSpc>
+              <a:spcBef>
+                <a:spcPts val="0"/>
+              </a:spcBef>
+              <a:spcAft>
+                <a:spcPts val="0"/>
+              </a:spcAft>
+              <a:buNone/>
+              <a:defRPr sz="1900" b="0">
+                <a:solidFill>
+                  <a:srgbClr val="303437"/>
+                </a:solidFill>
+                <a:latin typeface="Noto Sans"/>
+              </a:defRPr>
+            </a:pPr>
+            <a:r>
+              <a:rPr sz="1900" b="0" lang="ja-JP" altLang="en-US">
+                <a:solidFill>
+                  <a:srgbClr val="303437"/>
+                </a:solidFill>
+                <a:latin typeface="Noto Sans"/>
+                <a:ea typeface="Noto Sans CJK JP"/>
+                <a:cs typeface="Noto Sans"/>
+              </a:rPr>
+              <a:t>A) ムジゲトク（虹色の蒸し餅）。</a:t>
+            </a:r>
+          </a:p>
+        </p:txBody>
+      </p:sp>
+      <p:sp>
+        <p:nvSpPr>
+          <p:cNvPr id="12" name="実例本文2"/>
+          <p:cNvSpPr txBox="1"/>
+          <p:nvPr/>
+        </p:nvSpPr>
+        <p:spPr>
+          <a:xfrm>
+            <a:off x="4724400" y="2777871"/>
+            <a:ext cx="3870960" cy="320420"/>
+          </a:xfrm>
+          <a:prstGeom prst="rect">
+            <a:avLst/>
+          </a:prstGeom>
+          <a:noFill/>
+        </p:spPr>
+        <p:txBody>
+          <a:bodyPr wrap="square" lIns="0" rIns="0" tIns="0" bIns="0">
+            <a:noAutofit/>
+          </a:bodyPr>
+          <a:lstStyle/>
+          <a:p>
+            <a:pPr algn="l">
+              <a:lnSpc>
+                <a:spcPts val="2222"/>
+              </a:lnSpc>
+              <a:spcBef>
+                <a:spcPts val="0"/>
+              </a:spcBef>
+              <a:spcAft>
+                <a:spcPts val="0"/>
+              </a:spcAft>
+              <a:buNone/>
+              <a:defRPr sz="1900" b="0">
+                <a:solidFill>
+                  <a:srgbClr val="303437"/>
+                </a:solidFill>
+                <a:latin typeface="Noto Sans"/>
+              </a:defRPr>
+            </a:pPr>
+            <a:r>
+              <a:rPr sz="1900" b="0" lang="ja-JP" altLang="en-US">
+                <a:solidFill>
+                  <a:srgbClr val="303437"/>
+                </a:solidFill>
+                <a:latin typeface="Noto Sans"/>
+                <a:ea typeface="Noto Sans CJK JP"/>
+                <a:cs typeface="Noto Sans"/>
+              </a:rPr>
+              <a:t>B) インジョルミ（ついた餅）。</a:t>
+            </a:r>
+          </a:p>
+        </p:txBody>
+      </p:sp>
+      <p:sp>
+        <p:nvSpPr>
+          <p:cNvPr id="13" name="実例本文3"/>
+          <p:cNvSpPr txBox="1"/>
+          <p:nvPr/>
+        </p:nvSpPr>
+        <p:spPr>
+          <a:xfrm>
+            <a:off x="548640" y="3237991"/>
+            <a:ext cx="8046720" cy="320420"/>
+          </a:xfrm>
+          <a:prstGeom prst="rect">
+            <a:avLst/>
+          </a:prstGeom>
+          <a:noFill/>
+        </p:spPr>
+        <p:txBody>
+          <a:bodyPr wrap="square" lIns="0" rIns="0" tIns="0" bIns="0">
+            <a:noAutofit/>
+          </a:bodyPr>
+          <a:lstStyle/>
+          <a:p>
+            <a:pPr algn="l">
+              <a:lnSpc>
+                <a:spcPts val="2222"/>
+              </a:lnSpc>
+              <a:spcBef>
+                <a:spcPts val="0"/>
+              </a:spcBef>
+              <a:spcAft>
+                <a:spcPts val="0"/>
+              </a:spcAft>
+              <a:buNone/>
+              <a:defRPr sz="1900" b="0">
+                <a:solidFill>
+                  <a:srgbClr val="303437"/>
+                </a:solidFill>
+                <a:latin typeface="Noto Sans"/>
+              </a:defRPr>
+            </a:pPr>
+            <a:r>
+              <a:rPr sz="1900" b="1" lang="ja-JP" altLang="en-US">
+                <a:solidFill>
+                  <a:srgbClr val="B13731"/>
+                </a:solidFill>
+                <a:latin typeface="Noto Sans"/>
+                <a:ea typeface="Noto Sans CJK JP"/>
+                <a:cs typeface="Noto Sans"/>
+              </a:rPr>
+              <a:t>配布正解：B</a:t>
+            </a:r>
+          </a:p>
+        </p:txBody>
+      </p:sp>
+      <p:sp>
+        <p:nvSpPr>
+          <p:cNvPr id="14" name="実例本文4"/>
+          <p:cNvSpPr txBox="1"/>
+          <p:nvPr/>
+        </p:nvSpPr>
+        <p:spPr>
+          <a:xfrm>
+            <a:off x="548640" y="3621911"/>
+            <a:ext cx="8046720" cy="320420"/>
+          </a:xfrm>
+          <a:prstGeom prst="rect">
+            <a:avLst/>
+          </a:prstGeom>
+          <a:noFill/>
+        </p:spPr>
+        <p:txBody>
+          <a:bodyPr wrap="square" lIns="0" rIns="0" tIns="0" bIns="0">
+            <a:noAutofit/>
+          </a:bodyPr>
+          <a:lstStyle/>
+          <a:p>
+            <a:pPr algn="l">
+              <a:lnSpc>
+                <a:spcPts val="2222"/>
+              </a:lnSpc>
+              <a:spcBef>
+                <a:spcPts val="0"/>
+              </a:spcBef>
+              <a:spcAft>
+                <a:spcPts val="0"/>
+              </a:spcAft>
+              <a:buNone/>
+              <a:defRPr sz="1900" b="0">
+                <a:solidFill>
+                  <a:srgbClr val="303437"/>
+                </a:solidFill>
+                <a:latin typeface="Noto Sans"/>
+              </a:defRPr>
+            </a:pPr>
+            <a:r>
+              <a:rPr sz="1900" b="0" lang="ja-JP" altLang="en-US">
+                <a:solidFill>
+                  <a:srgbClr val="303437"/>
+                </a:solidFill>
+                <a:latin typeface="Noto Sans"/>
+                <a:ea typeface="Noto Sans CJK JP"/>
+                <a:cs typeface="Noto Sans"/>
+              </a:rPr>
+              <a:t>二種類の餅の名称と、口の中で感じる粘りを結び付ける。</a:t>
             </a:r>
           </a:p>
         </p:txBody>
@@ -27042,535 +25186,6 @@
 </p:sld>
 </file>
 
-<file path=ppt/slides/slide50.xml><?xml version="1.0" encoding="utf-8"?>
-<p:sld xmlns:a="http://schemas.openxmlformats.org/drawingml/2006/main" xmlns:p="http://schemas.openxmlformats.org/presentationml/2006/main" xmlns:r="http://schemas.openxmlformats.org/officeDocument/2006/relationships">
-  <p:cSld>
-    <p:spTree>
-      <p:nvGrpSpPr>
-        <p:cNvPr id="1" name=""/>
-        <p:cNvGrpSpPr/>
-        <p:nvPr/>
-      </p:nvGrpSpPr>
-      <p:grpSpPr/>
-      <p:sp>
-        <p:nvSpPr>
-          <p:cNvPr id="2" name="Title 1"/>
-          <p:cNvSpPr>
-            <a:spLocks noGrp="1"/>
-          </p:cNvSpPr>
-          <p:nvPr>
-            <p:ph type="title"/>
-          </p:nvPr>
-        </p:nvSpPr>
-        <p:spPr>
-          <a:xfrm>
-            <a:off x="548640" y="786384"/>
-            <a:ext cx="8046720" cy="502920"/>
-          </a:xfrm>
-        </p:spPr>
-        <p:txBody>
-          <a:bodyPr wrap="square" lIns="0" rIns="0" tIns="0" bIns="0">
-            <a:noAutofit/>
-          </a:bodyPr>
-          <a:lstStyle/>
-          <a:p>
-            <a:pPr algn="l">
-              <a:lnSpc>
-                <a:spcPct val="110000"/>
-              </a:lnSpc>
-              <a:buNone/>
-              <a:defRPr sz="2800" b="0">
-                <a:solidFill>
-                  <a:srgbClr val="303437"/>
-                </a:solidFill>
-                <a:latin typeface="Noto Sans"/>
-              </a:defRPr>
-            </a:pPr>
-            <a:r>
-              <a:rPr sz="2800" b="1" lang="ja-JP" altLang="en-US">
-                <a:solidFill>
-                  <a:srgbClr val="303437"/>
-                </a:solidFill>
-                <a:latin typeface="Noto Sans"/>
-                <a:ea typeface="Noto Sans CJK JP"/>
-                <a:cs typeface="Noto Sans"/>
-              </a:rPr>
-              <a:t>追加例9：日本語訳と解説</a:t>
-            </a:r>
-          </a:p>
-        </p:txBody>
-      </p:sp>
-      <p:sp>
-        <p:nvSpPr>
-          <p:cNvPr id="3" name="Title 2"/>
-          <p:cNvSpPr>
-            <a:spLocks noGrp="1"/>
-          </p:cNvSpPr>
-          <p:nvPr>
-            <p:ph type="title" idx="2"/>
-          </p:nvPr>
-        </p:nvSpPr>
-        <p:spPr>
-          <a:xfrm>
-            <a:off x="75895" y="0"/>
-            <a:ext cx="8115300" cy="480060"/>
-          </a:xfrm>
-        </p:spPr>
-        <p:txBody>
-          <a:bodyPr wrap="square" lIns="0" rIns="0" tIns="0" bIns="0" anchor="ctr">
-            <a:noAutofit/>
-          </a:bodyPr>
-          <a:lstStyle/>
-          <a:p>
-            <a:pPr algn="l">
-              <a:lnSpc>
-                <a:spcPct val="110000"/>
-              </a:lnSpc>
-              <a:buNone/>
-              <a:defRPr sz="1400" b="0">
-                <a:solidFill>
-                  <a:srgbClr val="303437"/>
-                </a:solidFill>
-                <a:latin typeface="Noto Sans"/>
-              </a:defRPr>
-            </a:pPr>
-            <a:r>
-              <a:rPr sz="1400" b="1" lang="ja-JP" altLang="en-US">
-                <a:solidFill>
-                  <a:srgbClr val="FFFFFF"/>
-                </a:solidFill>
-                <a:latin typeface="Noto Sans"/>
-                <a:ea typeface="Noto Sans CJK JP"/>
-                <a:cs typeface="Noto Sans"/>
-              </a:rPr>
-              <a:t>Appendix: 1. 生活場面の追加例</a:t>
-            </a:r>
-          </a:p>
-        </p:txBody>
-      </p:sp>
-      <p:sp>
-        <p:nvSpPr>
-          <p:cNvPr id="4" name="実例ラベル"/>
-          <p:cNvSpPr txBox="1"/>
-          <p:nvPr/>
-        </p:nvSpPr>
-        <p:spPr>
-          <a:xfrm>
-            <a:off x="594360" y="1481628"/>
-            <a:ext cx="7955279" cy="274320"/>
-          </a:xfrm>
-          <a:prstGeom prst="rect">
-            <a:avLst/>
-          </a:prstGeom>
-          <a:noFill/>
-        </p:spPr>
-        <p:txBody>
-          <a:bodyPr wrap="square" lIns="0" rIns="0" tIns="0" bIns="0">
-            <a:noAutofit/>
-          </a:bodyPr>
-          <a:lstStyle/>
-          <a:p>
-            <a:pPr algn="l">
-              <a:lnSpc>
-                <a:spcPct val="117000"/>
-              </a:lnSpc>
-              <a:spcBef>
-                <a:spcPts val="0"/>
-              </a:spcBef>
-              <a:spcAft>
-                <a:spcPts val="0"/>
-              </a:spcAft>
-              <a:buNone/>
-              <a:defRPr sz="1200" b="0">
-                <a:solidFill>
-                  <a:srgbClr val="303437"/>
-                </a:solidFill>
-                <a:latin typeface="Noto Sans"/>
-              </a:defRPr>
-            </a:pPr>
-            <a:r>
-              <a:rPr sz="1200" b="0" lang="ja-JP" altLang="en-US">
-                <a:solidFill>
-                  <a:srgbClr val="626669"/>
-                </a:solidFill>
-                <a:latin typeface="Noto Sans"/>
-                <a:ea typeface="Noto Sans CJK JP"/>
-                <a:cs typeface="Noto Sans"/>
-              </a:rPr>
-              <a:t>日本語訳</a:t>
-            </a:r>
-          </a:p>
-        </p:txBody>
-      </p:sp>
-      <p:sp>
-        <p:nvSpPr>
-          <p:cNvPr id="5" name="実例本文0"/>
-          <p:cNvSpPr txBox="1"/>
-          <p:nvPr/>
-        </p:nvSpPr>
-        <p:spPr>
-          <a:xfrm>
-            <a:off x="594360" y="1814628"/>
-            <a:ext cx="7955279" cy="481330"/>
-          </a:xfrm>
-          <a:prstGeom prst="rect">
-            <a:avLst/>
-          </a:prstGeom>
-          <a:noFill/>
-        </p:spPr>
-        <p:txBody>
-          <a:bodyPr wrap="square" lIns="0" rIns="0" tIns="0" bIns="0">
-            <a:noAutofit/>
-          </a:bodyPr>
-          <a:lstStyle/>
-          <a:p>
-            <a:pPr algn="l">
-              <a:lnSpc>
-                <a:spcPct val="112000"/>
-              </a:lnSpc>
-              <a:spcBef>
-                <a:spcPts val="0"/>
-              </a:spcBef>
-              <a:spcAft>
-                <a:spcPts val="0"/>
-              </a:spcAft>
-              <a:buNone/>
-              <a:defRPr sz="2200" b="0">
-                <a:solidFill>
-                  <a:srgbClr val="303437"/>
-                </a:solidFill>
-                <a:latin typeface="Noto Sans"/>
-              </a:defRPr>
-            </a:pPr>
-            <a:r>
-              <a:rPr sz="2200" b="0" lang="ja-JP" altLang="en-US">
-                <a:solidFill>
-                  <a:srgbClr val="303437"/>
-                </a:solidFill>
-                <a:latin typeface="Noto Sans"/>
-                <a:ea typeface="Noto Sans CJK JP"/>
-                <a:cs typeface="Noto Sans"/>
-              </a:rPr>
-              <a:t>次のうち、歯や上あごによりくっつきやすい食べ物は。</a:t>
-            </a:r>
-          </a:p>
-        </p:txBody>
-      </p:sp>
-      <p:sp>
-        <p:nvSpPr>
-          <p:cNvPr id="6" name="実例本文1"/>
-          <p:cNvSpPr txBox="1"/>
-          <p:nvPr/>
-        </p:nvSpPr>
-        <p:spPr>
-          <a:xfrm>
-            <a:off x="594360" y="2396984"/>
-            <a:ext cx="7955279" cy="462915"/>
-          </a:xfrm>
-          <a:prstGeom prst="rect">
-            <a:avLst/>
-          </a:prstGeom>
-          <a:noFill/>
-        </p:spPr>
-        <p:txBody>
-          <a:bodyPr wrap="square" lIns="0" rIns="0" tIns="0" bIns="0">
-            <a:noAutofit/>
-          </a:bodyPr>
-          <a:lstStyle/>
-          <a:p>
-            <a:pPr algn="l">
-              <a:lnSpc>
-                <a:spcPct val="112000"/>
-              </a:lnSpc>
-              <a:spcBef>
-                <a:spcPts val="0"/>
-              </a:spcBef>
-              <a:spcAft>
-                <a:spcPts val="0"/>
-              </a:spcAft>
-              <a:buNone/>
-              <a:defRPr sz="2100" b="0">
-                <a:solidFill>
-                  <a:srgbClr val="303437"/>
-                </a:solidFill>
-                <a:latin typeface="Noto Sans"/>
-              </a:defRPr>
-            </a:pPr>
-            <a:r>
-              <a:rPr sz="2100" b="0" lang="ja-JP" altLang="en-US">
-                <a:solidFill>
-                  <a:srgbClr val="303437"/>
-                </a:solidFill>
-                <a:latin typeface="Noto Sans"/>
-                <a:ea typeface="Noto Sans CJK JP"/>
-                <a:cs typeface="Noto Sans"/>
-              </a:rPr>
-              <a:t>A) ムジゲトク（虹色の蒸し餅）。</a:t>
-            </a:r>
-          </a:p>
-        </p:txBody>
-      </p:sp>
-      <p:sp>
-        <p:nvSpPr>
-          <p:cNvPr id="7" name="実例本文2"/>
-          <p:cNvSpPr txBox="1"/>
-          <p:nvPr/>
-        </p:nvSpPr>
-        <p:spPr>
-          <a:xfrm>
-            <a:off x="594360" y="2962501"/>
-            <a:ext cx="7955279" cy="462915"/>
-          </a:xfrm>
-          <a:prstGeom prst="rect">
-            <a:avLst/>
-          </a:prstGeom>
-          <a:noFill/>
-        </p:spPr>
-        <p:txBody>
-          <a:bodyPr wrap="square" lIns="0" rIns="0" tIns="0" bIns="0">
-            <a:noAutofit/>
-          </a:bodyPr>
-          <a:lstStyle/>
-          <a:p>
-            <a:pPr algn="l">
-              <a:lnSpc>
-                <a:spcPct val="112000"/>
-              </a:lnSpc>
-              <a:spcBef>
-                <a:spcPts val="0"/>
-              </a:spcBef>
-              <a:spcAft>
-                <a:spcPts val="0"/>
-              </a:spcAft>
-              <a:buNone/>
-              <a:defRPr sz="2100" b="0">
-                <a:solidFill>
-                  <a:srgbClr val="303437"/>
-                </a:solidFill>
-                <a:latin typeface="Noto Sans"/>
-              </a:defRPr>
-            </a:pPr>
-            <a:r>
-              <a:rPr sz="2100" b="0" lang="ja-JP" altLang="en-US">
-                <a:solidFill>
-                  <a:srgbClr val="303437"/>
-                </a:solidFill>
-                <a:latin typeface="Noto Sans"/>
-                <a:ea typeface="Noto Sans CJK JP"/>
-                <a:cs typeface="Noto Sans"/>
-              </a:rPr>
-              <a:t>B) インジョルミ（ついた餅）。</a:t>
-            </a:r>
-          </a:p>
-        </p:txBody>
-      </p:sp>
-      <p:sp>
-        <p:nvSpPr>
-          <p:cNvPr id="8" name="実例本文3"/>
-          <p:cNvSpPr txBox="1"/>
-          <p:nvPr/>
-        </p:nvSpPr>
-        <p:spPr>
-          <a:xfrm>
-            <a:off x="594360" y="3527584"/>
-            <a:ext cx="7955279" cy="481330"/>
-          </a:xfrm>
-          <a:prstGeom prst="rect">
-            <a:avLst/>
-          </a:prstGeom>
-          <a:noFill/>
-        </p:spPr>
-        <p:txBody>
-          <a:bodyPr wrap="square" lIns="0" rIns="0" tIns="0" bIns="0">
-            <a:noAutofit/>
-          </a:bodyPr>
-          <a:lstStyle/>
-          <a:p>
-            <a:pPr algn="l">
-              <a:lnSpc>
-                <a:spcPct val="112000"/>
-              </a:lnSpc>
-              <a:spcBef>
-                <a:spcPts val="0"/>
-              </a:spcBef>
-              <a:spcAft>
-                <a:spcPts val="0"/>
-              </a:spcAft>
-              <a:buNone/>
-              <a:defRPr sz="2200" b="0">
-                <a:solidFill>
-                  <a:srgbClr val="303437"/>
-                </a:solidFill>
-                <a:latin typeface="Noto Sans"/>
-              </a:defRPr>
-            </a:pPr>
-            <a:r>
-              <a:rPr sz="2200" b="1" lang="ja-JP" altLang="en-US">
-                <a:solidFill>
-                  <a:srgbClr val="B13731"/>
-                </a:solidFill>
-                <a:latin typeface="Noto Sans"/>
-                <a:ea typeface="Noto Sans CJK JP"/>
-                <a:cs typeface="Noto Sans"/>
-              </a:rPr>
-              <a:t>配布正解：B</a:t>
-            </a:r>
-          </a:p>
-        </p:txBody>
-      </p:sp>
-      <p:sp>
-        <p:nvSpPr>
-          <p:cNvPr id="9" name="実例本文4"/>
-          <p:cNvSpPr txBox="1"/>
-          <p:nvPr/>
-        </p:nvSpPr>
-        <p:spPr>
-          <a:xfrm>
-            <a:off x="594360" y="4111018"/>
-            <a:ext cx="7955279" cy="426084"/>
-          </a:xfrm>
-          <a:prstGeom prst="rect">
-            <a:avLst/>
-          </a:prstGeom>
-          <a:noFill/>
-        </p:spPr>
-        <p:txBody>
-          <a:bodyPr wrap="square" lIns="0" rIns="0" tIns="0" bIns="0">
-            <a:noAutofit/>
-          </a:bodyPr>
-          <a:lstStyle/>
-          <a:p>
-            <a:pPr algn="l">
-              <a:lnSpc>
-                <a:spcPct val="112000"/>
-              </a:lnSpc>
-              <a:spcBef>
-                <a:spcPts val="0"/>
-              </a:spcBef>
-              <a:spcAft>
-                <a:spcPts val="0"/>
-              </a:spcAft>
-              <a:buNone/>
-              <a:defRPr sz="1900" b="0">
-                <a:solidFill>
-                  <a:srgbClr val="303437"/>
-                </a:solidFill>
-                <a:latin typeface="Noto Sans"/>
-              </a:defRPr>
-            </a:pPr>
-            <a:r>
-              <a:rPr sz="1900" b="0" lang="ja-JP" altLang="en-US">
-                <a:solidFill>
-                  <a:srgbClr val="303437"/>
-                </a:solidFill>
-                <a:latin typeface="Noto Sans"/>
-                <a:ea typeface="Noto Sans CJK JP"/>
-                <a:cs typeface="Noto Sans"/>
-              </a:rPr>
-              <a:t>二種類の餅の名称と、口の中で感じる粘りを結び付ける。</a:t>
-            </a:r>
-          </a:p>
-        </p:txBody>
-      </p:sp>
-      <p:sp>
-        <p:nvSpPr>
-          <p:cNvPr id="10" name="TextBox 9"/>
-          <p:cNvSpPr txBox="1"/>
-          <p:nvPr/>
-        </p:nvSpPr>
-        <p:spPr>
-          <a:xfrm>
-            <a:off x="502920" y="4690872"/>
-            <a:ext cx="8183879" cy="393192"/>
-          </a:xfrm>
-          <a:prstGeom prst="rect">
-            <a:avLst/>
-          </a:prstGeom>
-          <a:noFill/>
-        </p:spPr>
-        <p:txBody>
-          <a:bodyPr wrap="square" lIns="0" rIns="0" tIns="0" bIns="0">
-            <a:noAutofit/>
-          </a:bodyPr>
-          <a:lstStyle/>
-          <a:p>
-            <a:pPr algn="l">
-              <a:lnSpc>
-                <a:spcPct val="112000"/>
-              </a:lnSpc>
-              <a:spcBef>
-                <a:spcPts val="0"/>
-              </a:spcBef>
-              <a:spcAft>
-                <a:spcPts val="0"/>
-              </a:spcAft>
-              <a:buNone/>
-              <a:defRPr sz="810" b="0">
-                <a:solidFill>
-                  <a:srgbClr val="303437"/>
-                </a:solidFill>
-                <a:latin typeface="Noto Sans"/>
-              </a:defRPr>
-            </a:pPr>
-            <a:r>
-              <a:rPr sz="810" b="0" lang="ja-JP" altLang="en-US">
-                <a:solidFill>
-                  <a:srgbClr val="626669"/>
-                </a:solidFill>
-                <a:latin typeface="Noto Sans"/>
-                <a:ea typeface="Noto Sans CJK JP"/>
-                <a:cs typeface="Noto Sans"/>
-              </a:rPr>
-              <a:t/>
-            </a:r>
-            <a:r>
-              <a:rPr sz="810" b="0" lang="ja-JP" altLang="en-US">
-                <a:solidFill>
-                  <a:srgbClr val="626669"/>
-                </a:solidFill>
-                <a:latin typeface="Noto Sans"/>
-                <a:ea typeface="Noto Sans CJK JP"/>
-                <a:cs typeface="Noto Sans"/>
-              </a:rPr>
-              <a:t>Global PIQA v1 / nonparallel / group0018_ex000012_kor_hang_0_v1。CC BY-SA 4.0。</a:t>
-            </a:r>
-          </a:p>
-          <a:p>
-            <a:pPr>
-              <a:lnSpc>
-                <a:spcPct val="112000"/>
-              </a:lnSpc>
-              <a:buNone/>
-              <a:defRPr sz="810" b="0">
-                <a:solidFill>
-                  <a:srgbClr val="303437"/>
-                </a:solidFill>
-                <a:latin typeface="Noto Sans"/>
-              </a:defRPr>
-            </a:pPr>
-            <a:r>
-              <a:rPr sz="810" b="0" lang="ja-JP" altLang="en-US">
-                <a:solidFill>
-                  <a:srgbClr val="626669"/>
-                </a:solidFill>
-                <a:latin typeface="Noto Sans"/>
-                <a:ea typeface="Noto Sans CJK JP"/>
-                <a:cs typeface="Noto Sans"/>
-                <a:hlinkClick r:id="rId2"/>
-              </a:rPr>
-              <a:t>https://huggingface.co/datasets/mrlbenchmarks/global-piqa-nonparallel</a:t>
-            </a:r>
-          </a:p>
-        </p:txBody>
-      </p:sp>
-    </p:spTree>
-  </p:cSld>
-  <p:clrMapOvr>
-    <a:masterClrMapping/>
-  </p:clrMapOvr>
-</p:sld>
-</file>
-
 <file path=ppt/slides/slide51.xml><?xml version="1.0" encoding="utf-8"?>
 <p:sld xmlns:a="http://schemas.openxmlformats.org/drawingml/2006/main" xmlns:p="http://schemas.openxmlformats.org/presentationml/2006/main" xmlns:r="http://schemas.openxmlformats.org/officeDocument/2006/relationships">
   <p:cSld>
@@ -27685,8 +25300,8 @@
         </p:nvSpPr>
         <p:spPr>
           <a:xfrm>
-            <a:off x="594360" y="2036823"/>
-            <a:ext cx="7955279" cy="274320"/>
+            <a:off x="548640" y="1422400"/>
+            <a:ext cx="3870960" cy="216408"/>
           </a:xfrm>
           <a:prstGeom prst="rect">
             <a:avLst/>
@@ -27701,7 +25316,7 @@
           <a:p>
             <a:pPr algn="l">
               <a:lnSpc>
-                <a:spcPct val="117000"/>
+                <a:spcPts val="1404"/>
               </a:lnSpc>
               <a:spcBef>
                 <a:spcPts val="0"/>
@@ -27739,8 +25354,8 @@
         </p:nvSpPr>
         <p:spPr>
           <a:xfrm>
-            <a:off x="594360" y="2369822"/>
-            <a:ext cx="7955279" cy="481330"/>
+            <a:off x="548640" y="1727708"/>
+            <a:ext cx="3870960" cy="320420"/>
           </a:xfrm>
           <a:prstGeom prst="rect">
             <a:avLst/>
@@ -27755,24 +25370,24 @@
           <a:p>
             <a:pPr algn="l">
               <a:lnSpc>
-                <a:spcPct val="112000"/>
-              </a:lnSpc>
-              <a:spcBef>
-                <a:spcPts val="0"/>
-              </a:spcBef>
-              <a:spcAft>
-                <a:spcPts val="0"/>
-              </a:spcAft>
-              <a:buNone/>
-              <a:defRPr sz="2200" b="0">
-                <a:solidFill>
-                  <a:srgbClr val="303437"/>
-                </a:solidFill>
-                <a:latin typeface="Noto Sans"/>
-              </a:defRPr>
-            </a:pPr>
-            <a:r>
-              <a:rPr sz="2200" b="0" lang="ja-JP" altLang="en-US">
+                <a:spcPts val="2222"/>
+              </a:lnSpc>
+              <a:spcBef>
+                <a:spcPts val="0"/>
+              </a:spcBef>
+              <a:spcAft>
+                <a:spcPts val="0"/>
+              </a:spcAft>
+              <a:buNone/>
+              <a:defRPr sz="1900" b="0">
+                <a:solidFill>
+                  <a:srgbClr val="303437"/>
+                </a:solidFill>
+                <a:latin typeface="Noto Sans"/>
+              </a:defRPr>
+            </a:pPr>
+            <a:r>
+              <a:rPr sz="1900" b="0" lang="ja-JP" altLang="en-US">
                 <a:solidFill>
                   <a:srgbClr val="303437"/>
                 </a:solidFill>
@@ -27793,8 +25408,8 @@
         </p:nvSpPr>
         <p:spPr>
           <a:xfrm>
-            <a:off x="594360" y="2952547"/>
-            <a:ext cx="7955279" cy="462915"/>
+            <a:off x="548640" y="2393950"/>
+            <a:ext cx="3870960" cy="320420"/>
           </a:xfrm>
           <a:prstGeom prst="rect">
             <a:avLst/>
@@ -27809,24 +25424,24 @@
           <a:p>
             <a:pPr algn="l">
               <a:lnSpc>
-                <a:spcPct val="112000"/>
-              </a:lnSpc>
-              <a:spcBef>
-                <a:spcPts val="0"/>
-              </a:spcBef>
-              <a:spcAft>
-                <a:spcPts val="0"/>
-              </a:spcAft>
-              <a:buNone/>
-              <a:defRPr sz="2100" b="0">
-                <a:solidFill>
-                  <a:srgbClr val="303437"/>
-                </a:solidFill>
-                <a:latin typeface="Noto Sans"/>
-              </a:defRPr>
-            </a:pPr>
-            <a:r>
-              <a:rPr sz="2100" b="0" lang="ja-JP" altLang="en-US">
+                <a:spcPts val="2222"/>
+              </a:lnSpc>
+              <a:spcBef>
+                <a:spcPts val="0"/>
+              </a:spcBef>
+              <a:spcAft>
+                <a:spcPts val="0"/>
+              </a:spcAft>
+              <a:buNone/>
+              <a:defRPr sz="1900" b="0">
+                <a:solidFill>
+                  <a:srgbClr val="303437"/>
+                </a:solidFill>
+                <a:latin typeface="Noto Sans"/>
+              </a:defRPr>
+            </a:pPr>
+            <a:r>
+              <a:rPr sz="1900" b="0" lang="ja-JP" altLang="en-US">
                 <a:solidFill>
                   <a:srgbClr val="303437"/>
                 </a:solidFill>
@@ -27847,8 +25462,8 @@
         </p:nvSpPr>
         <p:spPr>
           <a:xfrm>
-            <a:off x="594360" y="3517683"/>
-            <a:ext cx="7955279" cy="462915"/>
+            <a:off x="548640" y="2777871"/>
+            <a:ext cx="3870960" cy="320420"/>
           </a:xfrm>
           <a:prstGeom prst="rect">
             <a:avLst/>
@@ -27863,24 +25478,24 @@
           <a:p>
             <a:pPr algn="l">
               <a:lnSpc>
-                <a:spcPct val="112000"/>
-              </a:lnSpc>
-              <a:spcBef>
-                <a:spcPts val="0"/>
-              </a:spcBef>
-              <a:spcAft>
-                <a:spcPts val="0"/>
-              </a:spcAft>
-              <a:buNone/>
-              <a:defRPr sz="2100" b="0">
-                <a:solidFill>
-                  <a:srgbClr val="303437"/>
-                </a:solidFill>
-                <a:latin typeface="Noto Sans"/>
-              </a:defRPr>
-            </a:pPr>
-            <a:r>
-              <a:rPr sz="2100" b="0" lang="ja-JP" altLang="en-US">
+                <a:spcPts val="2222"/>
+              </a:lnSpc>
+              <a:spcBef>
+                <a:spcPts val="0"/>
+              </a:spcBef>
+              <a:spcAft>
+                <a:spcPts val="0"/>
+              </a:spcAft>
+              <a:buNone/>
+              <a:defRPr sz="1900" b="0">
+                <a:solidFill>
+                  <a:srgbClr val="303437"/>
+                </a:solidFill>
+                <a:latin typeface="Noto Sans"/>
+              </a:defRPr>
+            </a:pPr>
+            <a:r>
+              <a:rPr sz="1900" b="0" lang="ja-JP" altLang="en-US">
                 <a:solidFill>
                   <a:srgbClr val="303437"/>
                 </a:solidFill>
@@ -27984,130 +25599,16 @@
           </a:p>
         </p:txBody>
       </p:sp>
-    </p:spTree>
-  </p:cSld>
-  <p:clrMapOvr>
-    <a:masterClrMapping/>
-  </p:clrMapOvr>
-</p:sld>
-</file>
-
-<file path=ppt/slides/slide52.xml><?xml version="1.0" encoding="utf-8"?>
-<p:sld xmlns:a="http://schemas.openxmlformats.org/drawingml/2006/main" xmlns:p="http://schemas.openxmlformats.org/presentationml/2006/main" xmlns:r="http://schemas.openxmlformats.org/officeDocument/2006/relationships">
-  <p:cSld>
-    <p:spTree>
-      <p:nvGrpSpPr>
-        <p:cNvPr id="1" name=""/>
-        <p:cNvGrpSpPr/>
-        <p:nvPr/>
-      </p:nvGrpSpPr>
-      <p:grpSpPr/>
-      <p:sp>
-        <p:nvSpPr>
-          <p:cNvPr id="2" name="Title 1"/>
-          <p:cNvSpPr>
-            <a:spLocks noGrp="1"/>
-          </p:cNvSpPr>
-          <p:nvPr>
-            <p:ph type="title"/>
-          </p:nvPr>
-        </p:nvSpPr>
-        <p:spPr>
-          <a:xfrm>
-            <a:off x="548640" y="786384"/>
-            <a:ext cx="8046720" cy="502920"/>
-          </a:xfrm>
-        </p:spPr>
-        <p:txBody>
-          <a:bodyPr wrap="square" lIns="0" rIns="0" tIns="0" bIns="0">
-            <a:noAutofit/>
-          </a:bodyPr>
-          <a:lstStyle/>
-          <a:p>
-            <a:pPr algn="l">
-              <a:lnSpc>
-                <a:spcPct val="110000"/>
-              </a:lnSpc>
-              <a:buNone/>
-              <a:defRPr sz="2800" b="0">
-                <a:solidFill>
-                  <a:srgbClr val="303437"/>
-                </a:solidFill>
-                <a:latin typeface="Noto Sans"/>
-              </a:defRPr>
-            </a:pPr>
-            <a:r>
-              <a:rPr sz="2800" b="1" lang="ja-JP" altLang="en-US">
-                <a:solidFill>
-                  <a:srgbClr val="303437"/>
-                </a:solidFill>
-                <a:latin typeface="Noto Sans"/>
-                <a:ea typeface="Noto Sans CJK JP"/>
-                <a:cs typeface="Noto Sans"/>
-              </a:rPr>
-              <a:t>追加例10：日本語訳と解説</a:t>
-            </a:r>
-          </a:p>
-        </p:txBody>
-      </p:sp>
-      <p:sp>
-        <p:nvSpPr>
-          <p:cNvPr id="3" name="Title 2"/>
-          <p:cNvSpPr>
-            <a:spLocks noGrp="1"/>
-          </p:cNvSpPr>
-          <p:nvPr>
-            <p:ph type="title" idx="2"/>
-          </p:nvPr>
-        </p:nvSpPr>
-        <p:spPr>
-          <a:xfrm>
-            <a:off x="75895" y="0"/>
-            <a:ext cx="8115300" cy="480060"/>
-          </a:xfrm>
-        </p:spPr>
-        <p:txBody>
-          <a:bodyPr wrap="square" lIns="0" rIns="0" tIns="0" bIns="0" anchor="ctr">
-            <a:noAutofit/>
-          </a:bodyPr>
-          <a:lstStyle/>
-          <a:p>
-            <a:pPr algn="l">
-              <a:lnSpc>
-                <a:spcPct val="110000"/>
-              </a:lnSpc>
-              <a:buNone/>
-              <a:defRPr sz="1400" b="0">
-                <a:solidFill>
-                  <a:srgbClr val="303437"/>
-                </a:solidFill>
-                <a:latin typeface="Noto Sans"/>
-              </a:defRPr>
-            </a:pPr>
-            <a:r>
-              <a:rPr sz="1400" b="1" lang="ja-JP" altLang="en-US">
-                <a:solidFill>
-                  <a:srgbClr val="FFFFFF"/>
-                </a:solidFill>
-                <a:latin typeface="Noto Sans"/>
-                <a:ea typeface="Noto Sans CJK JP"/>
-                <a:cs typeface="Noto Sans"/>
-              </a:rPr>
-              <a:t>Appendix: 1. 生活場面の追加例</a:t>
-            </a:r>
-          </a:p>
-        </p:txBody>
-      </p:sp>
-      <p:sp>
-        <p:nvSpPr>
-          <p:cNvPr id="4" name="実例ラベル"/>
+      <p:sp>
+        <p:nvSpPr>
+          <p:cNvPr id="9" name="実例ラベル"/>
           <p:cNvSpPr txBox="1"/>
           <p:nvPr/>
         </p:nvSpPr>
         <p:spPr>
           <a:xfrm>
-            <a:off x="594360" y="1481628"/>
-            <a:ext cx="7955279" cy="274320"/>
+            <a:off x="4724400" y="1422400"/>
+            <a:ext cx="3870960" cy="216408"/>
           </a:xfrm>
           <a:prstGeom prst="rect">
             <a:avLst/>
@@ -28122,7 +25623,7 @@
           <a:p>
             <a:pPr algn="l">
               <a:lnSpc>
-                <a:spcPct val="117000"/>
+                <a:spcPts val="1404"/>
               </a:lnSpc>
               <a:spcBef>
                 <a:spcPts val="0"/>
@@ -28154,14 +25655,14 @@
       </p:sp>
       <p:sp>
         <p:nvSpPr>
-          <p:cNvPr id="5" name="実例本文0"/>
+          <p:cNvPr id="10" name="実例本文0"/>
           <p:cNvSpPr txBox="1"/>
           <p:nvPr/>
         </p:nvSpPr>
         <p:spPr>
           <a:xfrm>
-            <a:off x="594360" y="1814628"/>
-            <a:ext cx="7955279" cy="481330"/>
+            <a:off x="4724400" y="1727708"/>
+            <a:ext cx="3870960" cy="602741"/>
           </a:xfrm>
           <a:prstGeom prst="rect">
             <a:avLst/>
@@ -28176,24 +25677,24 @@
           <a:p>
             <a:pPr algn="l">
               <a:lnSpc>
-                <a:spcPct val="112000"/>
-              </a:lnSpc>
-              <a:spcBef>
-                <a:spcPts val="0"/>
-              </a:spcBef>
-              <a:spcAft>
-                <a:spcPts val="0"/>
-              </a:spcAft>
-              <a:buNone/>
-              <a:defRPr sz="2200" b="0">
-                <a:solidFill>
-                  <a:srgbClr val="303437"/>
-                </a:solidFill>
-                <a:latin typeface="Noto Sans"/>
-              </a:defRPr>
-            </a:pPr>
-            <a:r>
-              <a:rPr sz="2200" b="0" lang="ja-JP" altLang="en-US">
+                <a:spcPts val="2222"/>
+              </a:lnSpc>
+              <a:spcBef>
+                <a:spcPts val="0"/>
+              </a:spcBef>
+              <a:spcAft>
+                <a:spcPts val="0"/>
+              </a:spcAft>
+              <a:buNone/>
+              <a:defRPr sz="1900" b="0">
+                <a:solidFill>
+                  <a:srgbClr val="303437"/>
+                </a:solidFill>
+                <a:latin typeface="Noto Sans"/>
+              </a:defRPr>
+            </a:pPr>
+            <a:r>
+              <a:rPr sz="1900" b="0" lang="ja-JP" altLang="en-US">
                 <a:solidFill>
                   <a:srgbClr val="303437"/>
                 </a:solidFill>
@@ -28208,14 +25709,14 @@
       </p:sp>
       <p:sp>
         <p:nvSpPr>
-          <p:cNvPr id="6" name="実例本文1"/>
+          <p:cNvPr id="11" name="実例本文1"/>
           <p:cNvSpPr txBox="1"/>
           <p:nvPr/>
         </p:nvSpPr>
         <p:spPr>
           <a:xfrm>
-            <a:off x="594360" y="2396984"/>
-            <a:ext cx="7955279" cy="462915"/>
+            <a:off x="4724400" y="2393950"/>
+            <a:ext cx="3870960" cy="320420"/>
           </a:xfrm>
           <a:prstGeom prst="rect">
             <a:avLst/>
@@ -28230,24 +25731,24 @@
           <a:p>
             <a:pPr algn="l">
               <a:lnSpc>
-                <a:spcPct val="112000"/>
-              </a:lnSpc>
-              <a:spcBef>
-                <a:spcPts val="0"/>
-              </a:spcBef>
-              <a:spcAft>
-                <a:spcPts val="0"/>
-              </a:spcAft>
-              <a:buNone/>
-              <a:defRPr sz="2100" b="0">
-                <a:solidFill>
-                  <a:srgbClr val="303437"/>
-                </a:solidFill>
-                <a:latin typeface="Noto Sans"/>
-              </a:defRPr>
-            </a:pPr>
-            <a:r>
-              <a:rPr sz="2100" b="0" lang="ja-JP" altLang="en-US">
+                <a:spcPts val="2222"/>
+              </a:lnSpc>
+              <a:spcBef>
+                <a:spcPts val="0"/>
+              </a:spcBef>
+              <a:spcAft>
+                <a:spcPts val="0"/>
+              </a:spcAft>
+              <a:buNone/>
+              <a:defRPr sz="1900" b="0">
+                <a:solidFill>
+                  <a:srgbClr val="303437"/>
+                </a:solidFill>
+                <a:latin typeface="Noto Sans"/>
+              </a:defRPr>
+            </a:pPr>
+            <a:r>
+              <a:rPr sz="1900" b="0" lang="ja-JP" altLang="en-US">
                 <a:solidFill>
                   <a:srgbClr val="303437"/>
                 </a:solidFill>
@@ -28262,14 +25763,14 @@
       </p:sp>
       <p:sp>
         <p:nvSpPr>
-          <p:cNvPr id="7" name="実例本文2"/>
+          <p:cNvPr id="12" name="実例本文2"/>
           <p:cNvSpPr txBox="1"/>
           <p:nvPr/>
         </p:nvSpPr>
         <p:spPr>
           <a:xfrm>
-            <a:off x="594360" y="2962501"/>
-            <a:ext cx="7955279" cy="462915"/>
+            <a:off x="4724400" y="2777871"/>
+            <a:ext cx="3870960" cy="320420"/>
           </a:xfrm>
           <a:prstGeom prst="rect">
             <a:avLst/>
@@ -28284,24 +25785,24 @@
           <a:p>
             <a:pPr algn="l">
               <a:lnSpc>
-                <a:spcPct val="112000"/>
-              </a:lnSpc>
-              <a:spcBef>
-                <a:spcPts val="0"/>
-              </a:spcBef>
-              <a:spcAft>
-                <a:spcPts val="0"/>
-              </a:spcAft>
-              <a:buNone/>
-              <a:defRPr sz="2100" b="0">
-                <a:solidFill>
-                  <a:srgbClr val="303437"/>
-                </a:solidFill>
-                <a:latin typeface="Noto Sans"/>
-              </a:defRPr>
-            </a:pPr>
-            <a:r>
-              <a:rPr sz="2100" b="0" lang="ja-JP" altLang="en-US">
+                <a:spcPts val="2222"/>
+              </a:lnSpc>
+              <a:spcBef>
+                <a:spcPts val="0"/>
+              </a:spcBef>
+              <a:spcAft>
+                <a:spcPts val="0"/>
+              </a:spcAft>
+              <a:buNone/>
+              <a:defRPr sz="1900" b="0">
+                <a:solidFill>
+                  <a:srgbClr val="303437"/>
+                </a:solidFill>
+                <a:latin typeface="Noto Sans"/>
+              </a:defRPr>
+            </a:pPr>
+            <a:r>
+              <a:rPr sz="1900" b="0" lang="ja-JP" altLang="en-US">
                 <a:solidFill>
                   <a:srgbClr val="303437"/>
                 </a:solidFill>
@@ -28316,14 +25817,14 @@
       </p:sp>
       <p:sp>
         <p:nvSpPr>
-          <p:cNvPr id="8" name="実例本文3"/>
+          <p:cNvPr id="13" name="実例本文3"/>
           <p:cNvSpPr txBox="1"/>
           <p:nvPr/>
         </p:nvSpPr>
         <p:spPr>
           <a:xfrm>
-            <a:off x="594360" y="3527584"/>
-            <a:ext cx="7955279" cy="481330"/>
+            <a:off x="548640" y="3237991"/>
+            <a:ext cx="8046720" cy="320420"/>
           </a:xfrm>
           <a:prstGeom prst="rect">
             <a:avLst/>
@@ -28338,24 +25839,24 @@
           <a:p>
             <a:pPr algn="l">
               <a:lnSpc>
-                <a:spcPct val="112000"/>
-              </a:lnSpc>
-              <a:spcBef>
-                <a:spcPts val="0"/>
-              </a:spcBef>
-              <a:spcAft>
-                <a:spcPts val="0"/>
-              </a:spcAft>
-              <a:buNone/>
-              <a:defRPr sz="2200" b="0">
-                <a:solidFill>
-                  <a:srgbClr val="303437"/>
-                </a:solidFill>
-                <a:latin typeface="Noto Sans"/>
-              </a:defRPr>
-            </a:pPr>
-            <a:r>
-              <a:rPr sz="2200" b="1" lang="ja-JP" altLang="en-US">
+                <a:spcPts val="2222"/>
+              </a:lnSpc>
+              <a:spcBef>
+                <a:spcPts val="0"/>
+              </a:spcBef>
+              <a:spcAft>
+                <a:spcPts val="0"/>
+              </a:spcAft>
+              <a:buNone/>
+              <a:defRPr sz="1900" b="0">
+                <a:solidFill>
+                  <a:srgbClr val="303437"/>
+                </a:solidFill>
+                <a:latin typeface="Noto Sans"/>
+              </a:defRPr>
+            </a:pPr>
+            <a:r>
+              <a:rPr sz="1900" b="1" lang="ja-JP" altLang="en-US">
                 <a:solidFill>
                   <a:srgbClr val="B13731"/>
                 </a:solidFill>
@@ -28370,14 +25871,14 @@
       </p:sp>
       <p:sp>
         <p:nvSpPr>
-          <p:cNvPr id="9" name="実例本文4"/>
+          <p:cNvPr id="14" name="実例本文4"/>
           <p:cNvSpPr txBox="1"/>
           <p:nvPr/>
         </p:nvSpPr>
         <p:spPr>
           <a:xfrm>
-            <a:off x="594360" y="4111018"/>
-            <a:ext cx="7955279" cy="426084"/>
+            <a:off x="548640" y="3621911"/>
+            <a:ext cx="8046720" cy="320420"/>
           </a:xfrm>
           <a:prstGeom prst="rect">
             <a:avLst/>
@@ -28392,7 +25893,7 @@
           <a:p>
             <a:pPr algn="l">
               <a:lnSpc>
-                <a:spcPct val="112000"/>
+                <a:spcPts val="2222"/>
               </a:lnSpc>
               <a:spcBef>
                 <a:spcPts val="0"/>
@@ -28418,97 +25919,6 @@
                 <a:cs typeface="Noto Sans"/>
               </a:rPr>
               <a:t>快板は竹の板で拍子を取る語り芸。道具を扱う手の位置を問う。</a:t>
-            </a:r>
-          </a:p>
-        </p:txBody>
-      </p:sp>
-      <p:sp>
-        <p:nvSpPr>
-          <p:cNvPr id="10" name="TextBox 9"/>
-          <p:cNvSpPr txBox="1"/>
-          <p:nvPr/>
-        </p:nvSpPr>
-        <p:spPr>
-          <a:xfrm>
-            <a:off x="502920" y="4690872"/>
-            <a:ext cx="8183879" cy="393192"/>
-          </a:xfrm>
-          <a:prstGeom prst="rect">
-            <a:avLst/>
-          </a:prstGeom>
-          <a:noFill/>
-        </p:spPr>
-        <p:txBody>
-          <a:bodyPr wrap="square" lIns="0" rIns="0" tIns="0" bIns="0">
-            <a:noAutofit/>
-          </a:bodyPr>
-          <a:lstStyle/>
-          <a:p>
-            <a:pPr algn="l">
-              <a:lnSpc>
-                <a:spcPct val="112000"/>
-              </a:lnSpc>
-              <a:spcBef>
-                <a:spcPts val="0"/>
-              </a:spcBef>
-              <a:spcAft>
-                <a:spcPts val="0"/>
-              </a:spcAft>
-              <a:buNone/>
-              <a:defRPr sz="810" b="0">
-                <a:solidFill>
-                  <a:srgbClr val="303437"/>
-                </a:solidFill>
-                <a:latin typeface="Noto Sans"/>
-              </a:defRPr>
-            </a:pPr>
-            <a:r>
-              <a:rPr sz="810" b="0" lang="ja-JP" altLang="en-US">
-                <a:solidFill>
-                  <a:srgbClr val="626669"/>
-                </a:solidFill>
-                <a:latin typeface="Noto Sans"/>
-                <a:ea typeface="Noto Sans CJK JP"/>
-                <a:cs typeface="Noto Sans"/>
-              </a:rPr>
-              <a:t/>
-            </a:r>
-            <a:r>
-              <a:rPr sz="810" b="0" lang="ja-JP" altLang="en-US">
-                <a:solidFill>
-                  <a:srgbClr val="626669"/>
-                </a:solidFill>
-                <a:latin typeface="Noto Sans"/>
-                <a:ea typeface="Noto Sans CJK JP"/>
-                <a:cs typeface="Noto Sans"/>
-              </a:rPr>
-              <a:t>Global PIQA v1 / nonparallel / group0048_ex000334_cmn_hans_2_v1。CC BY-SA 4.0。</a:t>
-            </a:r>
-          </a:p>
-          <a:p>
-            <a:pPr>
-              <a:lnSpc>
-                <a:spcPct val="112000"/>
-              </a:lnSpc>
-              <a:buNone/>
-              <a:defRPr sz="810" b="0">
-                <a:solidFill>
-                  <a:srgbClr val="303437"/>
-                </a:solidFill>
-                <a:latin typeface="Noto Sans"/>
-              </a:defRPr>
-            </a:pPr>
-            <a:r>
-              <a:rPr sz="810" b="0" lang="ja-JP" altLang="en-US">
-                <a:solidFill>
-                  <a:srgbClr val="626669"/>
-                </a:solidFill>
-                <a:latin typeface="Noto Sans"/>
-                <a:ea typeface="Noto Sans CJK JP"/>
-                <a:cs typeface="Noto Sans"/>
-                <a:hlinkClick r:id="rId2"/>
-              </a:rPr>
-              <a:t>https://huggingface.co/datasets/mrlbenchmarks/global-piqa-nonparallel</a:t>
             </a:r>
           </a:p>
         </p:txBody>
@@ -30840,7 +28250,7 @@
                 <a:ea typeface="Noto Sans CJK JP"/>
                 <a:cs typeface="Noto Sans"/>
               </a:rPr>
-              <a:t>原著のオープンモデルの評価は、モデルの種類に応じて生成形式とcloze形式を使い分けている。</a:t>
+              <a:t>オープンモデルの評価では、モデルの種類に応じて生成形式とcloze形式を使い分けている。</a:t>
             </a:r>
           </a:p>
         </p:txBody>
@@ -33120,7 +30530,7 @@
                 <a:ea typeface="Noto Sans CJK JP"/>
                 <a:cs typeface="Noto Sans"/>
               </a:rPr>
-              <a:t>原著では全著者と各チームの所属・データ作成方法が付録に掲載されている。公開された全著者リストの最終著者はDavid Ifeoluwa Adelani。</a:t>
+              <a:t>論文の付録に、全著者と各チームの所属・データ作成方法が掲載されている。公開された全著者リストの最終著者はDavid Ifeoluwa Adelani。</a:t>
             </a:r>
           </a:p>
         </p:txBody>
@@ -35446,8 +32856,8 @@
         </p:nvSpPr>
         <p:spPr>
           <a:xfrm>
-            <a:off x="594360" y="2073151"/>
-            <a:ext cx="7955279" cy="274320"/>
+            <a:off x="548640" y="1422400"/>
+            <a:ext cx="3870960" cy="216408"/>
           </a:xfrm>
           <a:prstGeom prst="rect">
             <a:avLst/>
@@ -35462,7 +32872,7 @@
           <a:p>
             <a:pPr algn="l">
               <a:lnSpc>
-                <a:spcPct val="117000"/>
+                <a:spcPts val="1404"/>
               </a:lnSpc>
               <a:spcBef>
                 <a:spcPts val="0"/>
@@ -35500,8 +32910,8 @@
         </p:nvSpPr>
         <p:spPr>
           <a:xfrm>
-            <a:off x="594360" y="2380818"/>
-            <a:ext cx="7955279" cy="481330"/>
+            <a:off x="548640" y="1727708"/>
+            <a:ext cx="3870960" cy="320420"/>
           </a:xfrm>
           <a:prstGeom prst="rect">
             <a:avLst/>
@@ -35516,24 +32926,24 @@
           <a:p>
             <a:pPr algn="l">
               <a:lnSpc>
-                <a:spcPct val="112000"/>
-              </a:lnSpc>
-              <a:spcBef>
-                <a:spcPts val="0"/>
-              </a:spcBef>
-              <a:spcAft>
-                <a:spcPts val="0"/>
-              </a:spcAft>
-              <a:buNone/>
-              <a:defRPr sz="2200" b="0">
-                <a:solidFill>
-                  <a:srgbClr val="303437"/>
-                </a:solidFill>
-                <a:latin typeface="Noto Sans"/>
-              </a:defRPr>
-            </a:pPr>
-            <a:r>
-              <a:rPr sz="2200" b="0" lang="ja-JP" altLang="en-US">
+                <a:spcPts val="2222"/>
+              </a:lnSpc>
+              <a:spcBef>
+                <a:spcPts val="0"/>
+              </a:spcBef>
+              <a:spcAft>
+                <a:spcPts val="0"/>
+              </a:spcAft>
+              <a:buNone/>
+              <a:defRPr sz="1900" b="0">
+                <a:solidFill>
+                  <a:srgbClr val="303437"/>
+                </a:solidFill>
+                <a:latin typeface="Noto Sans"/>
+              </a:defRPr>
+            </a:pPr>
+            <a:r>
+              <a:rPr sz="1900" b="0" lang="ja-JP" altLang="en-US">
                 <a:solidFill>
                   <a:srgbClr val="303437"/>
                 </a:solidFill>
@@ -35554,8 +32964,8 @@
         </p:nvSpPr>
         <p:spPr>
           <a:xfrm>
-            <a:off x="594360" y="2940258"/>
-            <a:ext cx="7955279" cy="462915"/>
+            <a:off x="548640" y="2111629"/>
+            <a:ext cx="3870960" cy="602741"/>
           </a:xfrm>
           <a:prstGeom prst="rect">
             <a:avLst/>
@@ -35570,24 +32980,24 @@
           <a:p>
             <a:pPr algn="l">
               <a:lnSpc>
-                <a:spcPct val="112000"/>
-              </a:lnSpc>
-              <a:spcBef>
-                <a:spcPts val="0"/>
-              </a:spcBef>
-              <a:spcAft>
-                <a:spcPts val="0"/>
-              </a:spcAft>
-              <a:buNone/>
-              <a:defRPr sz="2100" b="0">
-                <a:solidFill>
-                  <a:srgbClr val="303437"/>
-                </a:solidFill>
-                <a:latin typeface="Noto Sans"/>
-              </a:defRPr>
-            </a:pPr>
-            <a:r>
-              <a:rPr sz="2100" b="0" lang="ja-JP" altLang="en-US">
+                <a:spcPts val="2222"/>
+              </a:lnSpc>
+              <a:spcBef>
+                <a:spcPts val="0"/>
+              </a:spcBef>
+              <a:spcAft>
+                <a:spcPts val="0"/>
+              </a:spcAft>
+              <a:buNone/>
+              <a:defRPr sz="1900" b="0">
+                <a:solidFill>
+                  <a:srgbClr val="303437"/>
+                </a:solidFill>
+                <a:latin typeface="Noto Sans"/>
+              </a:defRPr>
+            </a:pPr>
+            <a:r>
+              <a:rPr sz="1900" b="0" lang="ja-JP" altLang="en-US">
                 <a:solidFill>
                   <a:srgbClr val="303437"/>
                 </a:solidFill>
@@ -35608,8 +33018,8 @@
         </p:nvSpPr>
         <p:spPr>
           <a:xfrm>
-            <a:off x="594360" y="3481539"/>
-            <a:ext cx="7955279" cy="462915"/>
+            <a:off x="548640" y="2777870"/>
+            <a:ext cx="3870960" cy="602741"/>
           </a:xfrm>
           <a:prstGeom prst="rect">
             <a:avLst/>
@@ -35624,24 +33034,24 @@
           <a:p>
             <a:pPr algn="l">
               <a:lnSpc>
-                <a:spcPct val="112000"/>
-              </a:lnSpc>
-              <a:spcBef>
-                <a:spcPts val="0"/>
-              </a:spcBef>
-              <a:spcAft>
-                <a:spcPts val="0"/>
-              </a:spcAft>
-              <a:buNone/>
-              <a:defRPr sz="2100" b="0">
-                <a:solidFill>
-                  <a:srgbClr val="303437"/>
-                </a:solidFill>
-                <a:latin typeface="Noto Sans"/>
-              </a:defRPr>
-            </a:pPr>
-            <a:r>
-              <a:rPr sz="2100" b="0" lang="ja-JP" altLang="en-US">
+                <a:spcPts val="2222"/>
+              </a:lnSpc>
+              <a:spcBef>
+                <a:spcPts val="0"/>
+              </a:spcBef>
+              <a:spcAft>
+                <a:spcPts val="0"/>
+              </a:spcAft>
+              <a:buNone/>
+              <a:defRPr sz="1900" b="0">
+                <a:solidFill>
+                  <a:srgbClr val="303437"/>
+                </a:solidFill>
+                <a:latin typeface="Noto Sans"/>
+              </a:defRPr>
+            </a:pPr>
+            <a:r>
+              <a:rPr sz="1900" b="0" lang="ja-JP" altLang="en-US">
                 <a:solidFill>
                   <a:srgbClr val="303437"/>
                 </a:solidFill>
@@ -35741,6 +33151,330 @@
                 <a:hlinkClick r:id="rId2"/>
               </a:rPr>
               <a:t>https://huggingface.co/datasets/mrlbenchmarks/global-piqa-nonparallel</a:t>
+            </a:r>
+          </a:p>
+        </p:txBody>
+      </p:sp>
+      <p:sp>
+        <p:nvSpPr>
+          <p:cNvPr id="9" name="実例ラベル"/>
+          <p:cNvSpPr txBox="1"/>
+          <p:nvPr/>
+        </p:nvSpPr>
+        <p:spPr>
+          <a:xfrm>
+            <a:off x="4724400" y="1422400"/>
+            <a:ext cx="3870960" cy="216408"/>
+          </a:xfrm>
+          <a:prstGeom prst="rect">
+            <a:avLst/>
+          </a:prstGeom>
+          <a:noFill/>
+        </p:spPr>
+        <p:txBody>
+          <a:bodyPr wrap="square" lIns="0" rIns="0" tIns="0" bIns="0">
+            <a:noAutofit/>
+          </a:bodyPr>
+          <a:lstStyle/>
+          <a:p>
+            <a:pPr algn="l">
+              <a:lnSpc>
+                <a:spcPts val="1404"/>
+              </a:lnSpc>
+              <a:spcBef>
+                <a:spcPts val="0"/>
+              </a:spcBef>
+              <a:spcAft>
+                <a:spcPts val="0"/>
+              </a:spcAft>
+              <a:buNone/>
+              <a:defRPr sz="1200" b="0">
+                <a:solidFill>
+                  <a:srgbClr val="303437"/>
+                </a:solidFill>
+                <a:latin typeface="Noto Sans"/>
+              </a:defRPr>
+            </a:pPr>
+            <a:r>
+              <a:rPr sz="1200" b="0" lang="ja-JP" altLang="en-US">
+                <a:solidFill>
+                  <a:srgbClr val="626669"/>
+                </a:solidFill>
+                <a:latin typeface="Noto Sans"/>
+                <a:ea typeface="Noto Sans CJK JP"/>
+                <a:cs typeface="Noto Sans"/>
+              </a:rPr>
+              <a:t>日本語訳</a:t>
+            </a:r>
+          </a:p>
+        </p:txBody>
+      </p:sp>
+      <p:sp>
+        <p:nvSpPr>
+          <p:cNvPr id="10" name="実例本文0"/>
+          <p:cNvSpPr txBox="1"/>
+          <p:nvPr/>
+        </p:nvSpPr>
+        <p:spPr>
+          <a:xfrm>
+            <a:off x="4724400" y="1727708"/>
+            <a:ext cx="3870960" cy="320420"/>
+          </a:xfrm>
+          <a:prstGeom prst="rect">
+            <a:avLst/>
+          </a:prstGeom>
+          <a:noFill/>
+        </p:spPr>
+        <p:txBody>
+          <a:bodyPr wrap="square" lIns="0" rIns="0" tIns="0" bIns="0">
+            <a:noAutofit/>
+          </a:bodyPr>
+          <a:lstStyle/>
+          <a:p>
+            <a:pPr algn="l">
+              <a:lnSpc>
+                <a:spcPts val="2222"/>
+              </a:lnSpc>
+              <a:spcBef>
+                <a:spcPts val="0"/>
+              </a:spcBef>
+              <a:spcAft>
+                <a:spcPts val="0"/>
+              </a:spcAft>
+              <a:buNone/>
+              <a:defRPr sz="1900" b="0">
+                <a:solidFill>
+                  <a:srgbClr val="303437"/>
+                </a:solidFill>
+                <a:latin typeface="Noto Sans"/>
+              </a:defRPr>
+            </a:pPr>
+            <a:r>
+              <a:rPr sz="1900" b="0" lang="ja-JP" altLang="en-US">
+                <a:solidFill>
+                  <a:srgbClr val="303437"/>
+                </a:solidFill>
+                <a:latin typeface="Noto Sans"/>
+                <a:ea typeface="Noto Sans CJK JP"/>
+                <a:cs typeface="Noto Sans"/>
+              </a:rPr>
+              <a:t>BBQで調味料を分けて出すには。</a:t>
+            </a:r>
+          </a:p>
+        </p:txBody>
+      </p:sp>
+      <p:sp>
+        <p:nvSpPr>
+          <p:cNvPr id="11" name="実例本文1"/>
+          <p:cNvSpPr txBox="1"/>
+          <p:nvPr/>
+        </p:nvSpPr>
+        <p:spPr>
+          <a:xfrm>
+            <a:off x="4724400" y="2111629"/>
+            <a:ext cx="3870960" cy="602741"/>
+          </a:xfrm>
+          <a:prstGeom prst="rect">
+            <a:avLst/>
+          </a:prstGeom>
+          <a:noFill/>
+        </p:spPr>
+        <p:txBody>
+          <a:bodyPr wrap="square" lIns="0" rIns="0" tIns="0" bIns="0">
+            <a:noAutofit/>
+          </a:bodyPr>
+          <a:lstStyle/>
+          <a:p>
+            <a:pPr algn="l">
+              <a:lnSpc>
+                <a:spcPts val="2222"/>
+              </a:lnSpc>
+              <a:spcBef>
+                <a:spcPts val="0"/>
+              </a:spcBef>
+              <a:spcAft>
+                <a:spcPts val="0"/>
+              </a:spcAft>
+              <a:buNone/>
+              <a:defRPr sz="1900" b="0">
+                <a:solidFill>
+                  <a:srgbClr val="303437"/>
+                </a:solidFill>
+                <a:latin typeface="Noto Sans"/>
+              </a:defRPr>
+            </a:pPr>
+            <a:r>
+              <a:rPr sz="1900" b="0" lang="ja-JP" altLang="en-US">
+                <a:solidFill>
+                  <a:srgbClr val="303437"/>
+                </a:solidFill>
+                <a:latin typeface="Noto Sans"/>
+                <a:ea typeface="Noto Sans CJK JP"/>
+                <a:cs typeface="Noto Sans"/>
+              </a:rPr>
+              <a:t>A) 各種の調味料をワッフルメーカーに入れる。</a:t>
+            </a:r>
+          </a:p>
+        </p:txBody>
+      </p:sp>
+      <p:sp>
+        <p:nvSpPr>
+          <p:cNvPr id="12" name="実例本文2"/>
+          <p:cNvSpPr txBox="1"/>
+          <p:nvPr/>
+        </p:nvSpPr>
+        <p:spPr>
+          <a:xfrm>
+            <a:off x="4724400" y="2777870"/>
+            <a:ext cx="3870960" cy="602741"/>
+          </a:xfrm>
+          <a:prstGeom prst="rect">
+            <a:avLst/>
+          </a:prstGeom>
+          <a:noFill/>
+        </p:spPr>
+        <p:txBody>
+          <a:bodyPr wrap="square" lIns="0" rIns="0" tIns="0" bIns="0">
+            <a:noAutofit/>
+          </a:bodyPr>
+          <a:lstStyle/>
+          <a:p>
+            <a:pPr algn="l">
+              <a:lnSpc>
+                <a:spcPts val="2222"/>
+              </a:lnSpc>
+              <a:spcBef>
+                <a:spcPts val="0"/>
+              </a:spcBef>
+              <a:spcAft>
+                <a:spcPts val="0"/>
+              </a:spcAft>
+              <a:buNone/>
+              <a:defRPr sz="1900" b="0">
+                <a:solidFill>
+                  <a:srgbClr val="303437"/>
+                </a:solidFill>
+                <a:latin typeface="Noto Sans"/>
+              </a:defRPr>
+            </a:pPr>
+            <a:r>
+              <a:rPr sz="1900" b="0" lang="ja-JP" altLang="en-US">
+                <a:solidFill>
+                  <a:srgbClr val="303437"/>
+                </a:solidFill>
+                <a:latin typeface="Noto Sans"/>
+                <a:ea typeface="Noto Sans CJK JP"/>
+                <a:cs typeface="Noto Sans"/>
+              </a:rPr>
+              <a:t>B) 各種の調味料をマフィン型に入れる。</a:t>
+            </a:r>
+          </a:p>
+        </p:txBody>
+      </p:sp>
+      <p:sp>
+        <p:nvSpPr>
+          <p:cNvPr id="13" name="実例本文3"/>
+          <p:cNvSpPr txBox="1"/>
+          <p:nvPr/>
+        </p:nvSpPr>
+        <p:spPr>
+          <a:xfrm>
+            <a:off x="548640" y="3520312"/>
+            <a:ext cx="8046720" cy="320420"/>
+          </a:xfrm>
+          <a:prstGeom prst="rect">
+            <a:avLst/>
+          </a:prstGeom>
+          <a:noFill/>
+        </p:spPr>
+        <p:txBody>
+          <a:bodyPr wrap="square" lIns="0" rIns="0" tIns="0" bIns="0">
+            <a:noAutofit/>
+          </a:bodyPr>
+          <a:lstStyle/>
+          <a:p>
+            <a:pPr algn="l">
+              <a:lnSpc>
+                <a:spcPts val="2222"/>
+              </a:lnSpc>
+              <a:spcBef>
+                <a:spcPts val="0"/>
+              </a:spcBef>
+              <a:spcAft>
+                <a:spcPts val="0"/>
+              </a:spcAft>
+              <a:buNone/>
+              <a:defRPr sz="1900" b="0">
+                <a:solidFill>
+                  <a:srgbClr val="303437"/>
+                </a:solidFill>
+                <a:latin typeface="Noto Sans"/>
+              </a:defRPr>
+            </a:pPr>
+            <a:r>
+              <a:rPr sz="1900" b="1" lang="ja-JP" altLang="en-US">
+                <a:solidFill>
+                  <a:srgbClr val="B13731"/>
+                </a:solidFill>
+                <a:latin typeface="Noto Sans"/>
+                <a:ea typeface="Noto Sans CJK JP"/>
+                <a:cs typeface="Noto Sans"/>
+              </a:rPr>
+              <a:t>配布正解：B</a:t>
+            </a:r>
+          </a:p>
+        </p:txBody>
+      </p:sp>
+      <p:sp>
+        <p:nvSpPr>
+          <p:cNvPr id="14" name="実例本文4"/>
+          <p:cNvSpPr txBox="1"/>
+          <p:nvPr/>
+        </p:nvSpPr>
+        <p:spPr>
+          <a:xfrm>
+            <a:off x="548640" y="3904232"/>
+            <a:ext cx="8046720" cy="320420"/>
+          </a:xfrm>
+          <a:prstGeom prst="rect">
+            <a:avLst/>
+          </a:prstGeom>
+          <a:noFill/>
+        </p:spPr>
+        <p:txBody>
+          <a:bodyPr wrap="square" lIns="0" rIns="0" tIns="0" bIns="0">
+            <a:noAutofit/>
+          </a:bodyPr>
+          <a:lstStyle/>
+          <a:p>
+            <a:pPr algn="l">
+              <a:lnSpc>
+                <a:spcPts val="2222"/>
+              </a:lnSpc>
+              <a:spcBef>
+                <a:spcPts val="0"/>
+              </a:spcBef>
+              <a:spcAft>
+                <a:spcPts val="0"/>
+              </a:spcAft>
+              <a:buNone/>
+              <a:defRPr sz="1900" b="0">
+                <a:solidFill>
+                  <a:srgbClr val="303437"/>
+                </a:solidFill>
+                <a:latin typeface="Noto Sans"/>
+              </a:defRPr>
+            </a:pPr>
+            <a:r>
+              <a:rPr sz="1900" b="0" lang="ja-JP" altLang="en-US">
+                <a:solidFill>
+                  <a:srgbClr val="303437"/>
+                </a:solidFill>
+                <a:latin typeface="Noto Sans"/>
+                <a:ea typeface="Noto Sans CJK JP"/>
+                <a:cs typeface="Noto Sans"/>
+              </a:rPr>
+              <a:t>一つずつくぼみが分かれたマフィン型を、調味料の容器として使う。</a:t>
             </a:r>
           </a:p>
         </p:txBody>
